--- a/preview_v7/cn/l-cn-bs-u3-6.pptx
+++ b/preview_v7/cn/l-cn-bs-u3-6.pptx
@@ -3142,14 +3142,102 @@
       </p:sp>
       <p:sp>
         <p:nvSpPr>
-          <p:cNvPr id="3" name="TextBox 2"/>
+          <p:cNvPr id="3" name="Rectangle 2"/>
+          <p:cNvSpPr/>
+          <p:nvPr/>
+        </p:nvSpPr>
+        <p:spPr>
+          <a:xfrm>
+            <a:off x="0" y="0"/>
+            <a:ext cx="12191695" cy="1371600"/>
+          </a:xfrm>
+          <a:prstGeom prst="rect">
+            <a:avLst/>
+          </a:prstGeom>
+          <a:solidFill>
+            <a:srgbClr val="1C2A33"/>
+          </a:solidFill>
+          <a:ln>
+            <a:noFill/>
+          </a:ln>
+          <a:effectLst/>
+        </p:spPr>
+        <p:style>
+          <a:lnRef idx="1">
+            <a:schemeClr val="accent1"/>
+          </a:lnRef>
+          <a:fillRef idx="3">
+            <a:schemeClr val="accent1"/>
+          </a:fillRef>
+          <a:effectRef idx="2">
+            <a:schemeClr val="accent1"/>
+          </a:effectRef>
+          <a:fontRef idx="minor">
+            <a:schemeClr val="lt1"/>
+          </a:fontRef>
+        </p:style>
+        <p:txBody>
+          <a:bodyPr rtlCol="0" anchor="ctr"/>
+          <a:lstStyle/>
+          <a:p>
+            <a:pPr algn="ctr"/>
+          </a:p>
+        </p:txBody>
+      </p:sp>
+      <p:sp>
+        <p:nvSpPr>
+          <p:cNvPr id="4" name="Rectangle 3"/>
+          <p:cNvSpPr/>
+          <p:nvPr/>
+        </p:nvSpPr>
+        <p:spPr>
+          <a:xfrm>
+            <a:off x="640080" y="365760"/>
+            <a:ext cx="822960" cy="38100"/>
+          </a:xfrm>
+          <a:prstGeom prst="rect">
+            <a:avLst/>
+          </a:prstGeom>
+          <a:solidFill>
+            <a:srgbClr val="C8A86B"/>
+          </a:solidFill>
+          <a:ln>
+            <a:noFill/>
+          </a:ln>
+          <a:effectLst/>
+        </p:spPr>
+        <p:style>
+          <a:lnRef idx="1">
+            <a:schemeClr val="accent1"/>
+          </a:lnRef>
+          <a:fillRef idx="3">
+            <a:schemeClr val="accent1"/>
+          </a:fillRef>
+          <a:effectRef idx="2">
+            <a:schemeClr val="accent1"/>
+          </a:effectRef>
+          <a:fontRef idx="minor">
+            <a:schemeClr val="lt1"/>
+          </a:fontRef>
+        </p:style>
+        <p:txBody>
+          <a:bodyPr rtlCol="0" anchor="ctr"/>
+          <a:lstStyle/>
+          <a:p>
+            <a:pPr algn="ctr"/>
+          </a:p>
+        </p:txBody>
+      </p:sp>
+      <p:sp>
+        <p:nvSpPr>
+          <p:cNvPr id="5" name="TextBox 4"/>
           <p:cNvSpPr txBox="1"/>
           <p:nvPr/>
         </p:nvSpPr>
         <p:spPr>
           <a:xfrm>
-            <a:off x="640080" y="640080"/>
-            <a:ext cx="10911535" cy="502920"/>
+            <a:off x="640080" y="475488"/>
+            <a:ext cx="10911535" cy="457200"/>
           </a:xfrm>
           <a:prstGeom prst="rect">
             <a:avLst/>
@@ -3163,34 +3251,169 @@
           <a:lstStyle/>
           <a:p>
             <a:pPr algn="l">
+              <a:lnSpc>
+                <a:spcPct val="145000"/>
+              </a:lnSpc>
               <a:spcAft>
-                <a:spcPts val="0"/>
+                <a:spcPts val="400"/>
               </a:spcAft>
             </a:pPr>
             <a:r>
-              <a:rPr sz="1200" b="1">
-                <a:solidFill>
-                  <a:srgbClr val="B23A2A"/>
+              <a:rPr sz="1400" b="1">
+                <a:solidFill>
+                  <a:srgbClr val="C8A86B"/>
                 </a:solidFill>
                 <a:latin typeface="微软雅黑"/>
                 <a:ea typeface="微软雅黑"/>
                 <a:cs typeface="微软雅黑"/>
               </a:rPr>
-              <a:t>语文 · 必修上册 · 第3单元 生命的诗意</a:t>
-            </a:r>
-          </a:p>
-        </p:txBody>
-      </p:sp>
-      <p:sp>
-        <p:nvSpPr>
-          <p:cNvPr id="4" name="Rectangle 3"/>
+              <a:t>语文 · 必修上册 · 第3单元（生命的诗意）</a:t>
+            </a:r>
+          </a:p>
+        </p:txBody>
+      </p:sp>
+      <p:sp>
+        <p:nvSpPr>
+          <p:cNvPr id="6" name="TextBox 5"/>
+          <p:cNvSpPr txBox="1"/>
+          <p:nvPr/>
+        </p:nvSpPr>
+        <p:spPr>
+          <a:xfrm>
+            <a:off x="640080" y="914400"/>
+            <a:ext cx="10911535" cy="411480"/>
+          </a:xfrm>
+          <a:prstGeom prst="rect">
+            <a:avLst/>
+          </a:prstGeom>
+          <a:noFill/>
+        </p:spPr>
+        <p:txBody>
+          <a:bodyPr wrap="square" anchor="t" lIns="0" rIns="0" tIns="0" bIns="0">
+            <a:spAutoFit/>
+          </a:bodyPr>
+          <a:lstStyle/>
+          <a:p>
+            <a:pPr algn="l">
+              <a:lnSpc>
+                <a:spcPct val="145000"/>
+              </a:lnSpc>
+              <a:spcAft>
+                <a:spcPts val="400"/>
+              </a:spcAft>
+            </a:pPr>
+            <a:r>
+              <a:rPr sz="1300" b="0">
+                <a:solidFill>
+                  <a:srgbClr val="FFFFFF"/>
+                </a:solidFill>
+                <a:latin typeface="微软雅黑"/>
+                <a:ea typeface="微软雅黑"/>
+                <a:cs typeface="微软雅黑"/>
+              </a:rPr>
+              <a:t>第6课时 · 写作指导</a:t>
+            </a:r>
+          </a:p>
+        </p:txBody>
+      </p:sp>
+      <p:sp>
+        <p:nvSpPr>
+          <p:cNvPr id="7" name="Rectangle 6"/>
           <p:cNvSpPr/>
           <p:nvPr/>
         </p:nvSpPr>
         <p:spPr>
           <a:xfrm>
-            <a:off x="640080" y="1207008"/>
-            <a:ext cx="822960" cy="30480"/>
+            <a:off x="11185855" y="320040"/>
+            <a:ext cx="640080" cy="640080"/>
+          </a:xfrm>
+          <a:prstGeom prst="rect">
+            <a:avLst/>
+          </a:prstGeom>
+          <a:solidFill>
+            <a:srgbClr val="2E7D6B"/>
+          </a:solidFill>
+          <a:ln>
+            <a:noFill/>
+          </a:ln>
+          <a:effectLst/>
+        </p:spPr>
+        <p:style>
+          <a:lnRef idx="1">
+            <a:schemeClr val="accent1"/>
+          </a:lnRef>
+          <a:fillRef idx="3">
+            <a:schemeClr val="accent1"/>
+          </a:fillRef>
+          <a:effectRef idx="2">
+            <a:schemeClr val="accent1"/>
+          </a:effectRef>
+          <a:fontRef idx="minor">
+            <a:schemeClr val="lt1"/>
+          </a:fontRef>
+        </p:style>
+        <p:txBody>
+          <a:bodyPr rtlCol="0" anchor="ctr"/>
+          <a:lstStyle/>
+          <a:p>
+            <a:pPr algn="ctr"/>
+          </a:p>
+        </p:txBody>
+      </p:sp>
+      <p:sp>
+        <p:nvSpPr>
+          <p:cNvPr id="8" name="TextBox 7"/>
+          <p:cNvSpPr txBox="1"/>
+          <p:nvPr/>
+        </p:nvSpPr>
+        <p:spPr>
+          <a:xfrm>
+            <a:off x="640080" y="1965960"/>
+            <a:ext cx="10911535" cy="2377440"/>
+          </a:xfrm>
+          <a:prstGeom prst="rect">
+            <a:avLst/>
+          </a:prstGeom>
+          <a:noFill/>
+        </p:spPr>
+        <p:txBody>
+          <a:bodyPr wrap="square" anchor="t" lIns="0" rIns="0" tIns="0" bIns="0">
+            <a:spAutoFit/>
+          </a:bodyPr>
+          <a:lstStyle/>
+          <a:p>
+            <a:pPr algn="l">
+              <a:lnSpc>
+                <a:spcPct val="125000"/>
+              </a:lnSpc>
+              <a:spcAft>
+                <a:spcPts val="400"/>
+              </a:spcAft>
+            </a:pPr>
+            <a:r>
+              <a:rPr sz="3400" b="1">
+                <a:solidFill>
+                  <a:srgbClr val="1C2A33"/>
+                </a:solidFill>
+                <a:latin typeface="楷体"/>
+                <a:ea typeface="楷体"/>
+                <a:cs typeface="楷体"/>
+              </a:rPr>
+              <a:t>写作指导——学写文学短评：诗词评点法</a:t>
+            </a:r>
+          </a:p>
+        </p:txBody>
+      </p:sp>
+      <p:sp>
+        <p:nvSpPr>
+          <p:cNvPr id="9" name="Rectangle 8"/>
+          <p:cNvSpPr/>
+          <p:nvPr/>
+        </p:nvSpPr>
+        <p:spPr>
+          <a:xfrm>
+            <a:off x="640080" y="4343400"/>
+            <a:ext cx="822960" cy="38100"/>
           </a:xfrm>
           <a:prstGeom prst="rect">
             <a:avLst/>
@@ -3227,14 +3450,14 @@
       </p:sp>
       <p:sp>
         <p:nvSpPr>
-          <p:cNvPr id="5" name="TextBox 4"/>
+          <p:cNvPr id="10" name="TextBox 9"/>
           <p:cNvSpPr txBox="1"/>
           <p:nvPr/>
         </p:nvSpPr>
         <p:spPr>
           <a:xfrm>
-            <a:off x="640080" y="1737360"/>
-            <a:ext cx="10911535" cy="2011680"/>
+            <a:off x="640080" y="4572000"/>
+            <a:ext cx="10911535" cy="1005840"/>
           </a:xfrm>
           <a:prstGeom prst="rect">
             <a:avLst/>
@@ -3249,76 +3472,42 @@
           <a:p>
             <a:pPr algn="l">
               <a:lnSpc>
-                <a:spcPct val="115000"/>
+                <a:spcPct val="145000"/>
               </a:lnSpc>
+              <a:spcAft>
+                <a:spcPts val="400"/>
+              </a:spcAft>
             </a:pPr>
             <a:r>
-              <a:rPr sz="4000" b="1">
-                <a:solidFill>
-                  <a:srgbClr val="1C2A33"/>
+              <a:rPr sz="1700" b="0">
+                <a:solidFill>
+                  <a:srgbClr val="6B6258"/>
                 </a:solidFill>
                 <a:latin typeface="楷体"/>
                 <a:ea typeface="楷体"/>
                 <a:cs typeface="楷体"/>
               </a:rPr>
-              <a:t>写作指导——学写文学短评：诗词评点法</a:t>
-            </a:r>
-          </a:p>
-        </p:txBody>
-      </p:sp>
-      <p:sp>
-        <p:nvSpPr>
-          <p:cNvPr id="6" name="TextBox 5"/>
-          <p:cNvSpPr txBox="1"/>
-          <p:nvPr/>
-        </p:nvSpPr>
-        <p:spPr>
-          <a:xfrm>
-            <a:off x="640080" y="3840480"/>
-            <a:ext cx="10911535" cy="457200"/>
-          </a:xfrm>
-          <a:prstGeom prst="rect">
-            <a:avLst/>
-          </a:prstGeom>
-          <a:noFill/>
-        </p:spPr>
-        <p:txBody>
-          <a:bodyPr wrap="square" anchor="t" lIns="0" rIns="0" tIns="0" bIns="0">
-            <a:spAutoFit/>
-          </a:bodyPr>
-          <a:lstStyle/>
-          <a:p>
-            <a:pPr algn="l"/>
-            <a:r>
-              <a:rPr sz="1700" b="1">
-                <a:solidFill>
-                  <a:srgbClr val="B23A2A"/>
-                </a:solidFill>
-                <a:latin typeface="微软雅黑"/>
-                <a:ea typeface="微软雅黑"/>
-                <a:cs typeface="微软雅黑"/>
-              </a:rPr>
-              <a:t>写作指导  ·  第6课时  ·  45分钟</a:t>
-            </a:r>
-          </a:p>
-        </p:txBody>
-      </p:sp>
-      <p:sp>
-        <p:nvSpPr>
-          <p:cNvPr id="7" name="Rectangle 6"/>
+              <a:t>八首诗词，八种生命的姿态与回响。</a:t>
+            </a:r>
+          </a:p>
+        </p:txBody>
+      </p:sp>
+      <p:sp>
+        <p:nvSpPr>
+          <p:cNvPr id="11" name="Rectangle 10"/>
           <p:cNvSpPr/>
           <p:nvPr/>
         </p:nvSpPr>
         <p:spPr>
           <a:xfrm>
-            <a:off x="640080" y="5394960"/>
-            <a:ext cx="2011680" cy="33020"/>
+            <a:off x="0" y="6656832"/>
+            <a:ext cx="12191695" cy="201168"/>
           </a:xfrm>
           <a:prstGeom prst="rect">
             <a:avLst/>
           </a:prstGeom>
           <a:solidFill>
-            <a:srgbClr val="C8A86B"/>
+            <a:srgbClr val="B23A2A"/>
           </a:solidFill>
           <a:ln>
             <a:noFill/>
@@ -3349,14 +3538,14 @@
       </p:sp>
       <p:sp>
         <p:nvSpPr>
-          <p:cNvPr id="8" name="TextBox 7"/>
+          <p:cNvPr id="12" name="TextBox 11"/>
           <p:cNvSpPr txBox="1"/>
           <p:nvPr/>
         </p:nvSpPr>
         <p:spPr>
           <a:xfrm>
-            <a:off x="640080" y="5623560"/>
-            <a:ext cx="10911535" cy="548640"/>
+            <a:off x="640080" y="6400800"/>
+            <a:ext cx="10911535" cy="274320"/>
           </a:xfrm>
           <a:prstGeom prst="rect">
             <a:avLst/>
@@ -3369,9 +3558,16 @@
           </a:bodyPr>
           <a:lstStyle/>
           <a:p>
-            <a:pPr algn="l"/>
-            <a:r>
-              <a:rPr sz="1400" b="0">
+            <a:pPr algn="l">
+              <a:lnSpc>
+                <a:spcPct val="145000"/>
+              </a:lnSpc>
+              <a:spcAft>
+                <a:spcPts val="400"/>
+              </a:spcAft>
+            </a:pPr>
+            <a:r>
+              <a:rPr sz="1100" b="0">
                 <a:solidFill>
                   <a:srgbClr val="6B6258"/>
                 </a:solidFill>
@@ -3379,14 +3575,14 @@
                 <a:ea typeface="微软雅黑"/>
                 <a:cs typeface="微软雅黑"/>
               </a:rPr>
-              <a:t>学习任务群：文学阅读与写作    |    年级：高一</a:t>
-            </a:r>
-          </a:p>
-        </p:txBody>
-      </p:sp>
-      <p:sp>
-        <p:nvSpPr>
-          <p:cNvPr id="9" name="TextBox 8"/>
+              <a:t>本课件未使用无关配图 · 学科色块兜底</a:t>
+            </a:r>
+          </a:p>
+        </p:txBody>
+      </p:sp>
+      <p:sp>
+        <p:nvSpPr>
+          <p:cNvPr id="13" name="TextBox 12"/>
           <p:cNvSpPr txBox="1"/>
           <p:nvPr/>
         </p:nvSpPr>
@@ -3570,14 +3766,58 @@
       </p:sp>
       <p:sp>
         <p:nvSpPr>
-          <p:cNvPr id="5" name="Rounded Rectangle 4"/>
+          <p:cNvPr id="5" name="TextBox 4"/>
+          <p:cNvSpPr txBox="1"/>
+          <p:nvPr/>
+        </p:nvSpPr>
+        <p:spPr>
+          <a:xfrm>
+            <a:off x="640080" y="1325880"/>
+            <a:ext cx="10911535" cy="640080"/>
+          </a:xfrm>
+          <a:prstGeom prst="rect">
+            <a:avLst/>
+          </a:prstGeom>
+          <a:noFill/>
+        </p:spPr>
+        <p:txBody>
+          <a:bodyPr wrap="square" anchor="t" lIns="0" rIns="0" tIns="0" bIns="0">
+            <a:spAutoFit/>
+          </a:bodyPr>
+          <a:lstStyle/>
+          <a:p>
+            <a:pPr algn="l">
+              <a:lnSpc>
+                <a:spcPct val="145000"/>
+              </a:lnSpc>
+              <a:spcAft>
+                <a:spcPts val="400"/>
+              </a:spcAft>
+            </a:pPr>
+            <a:r>
+              <a:rPr sz="3000" b="1">
+                <a:solidFill>
+                  <a:srgbClr val="1C2A33"/>
+                </a:solidFill>
+                <a:latin typeface="楷体"/>
+                <a:ea typeface="楷体"/>
+                <a:cs typeface="楷体"/>
+              </a:rPr>
+              <a:t>四向学习目标</a:t>
+            </a:r>
+          </a:p>
+        </p:txBody>
+      </p:sp>
+      <p:sp>
+        <p:nvSpPr>
+          <p:cNvPr id="6" name="Rounded Rectangle 5"/>
           <p:cNvSpPr/>
           <p:nvPr/>
         </p:nvSpPr>
         <p:spPr>
           <a:xfrm>
-            <a:off x="640080" y="1417320"/>
-            <a:ext cx="5349240" cy="2057400"/>
+            <a:off x="640080" y="2377440"/>
+            <a:ext cx="2453563" cy="3566160"/>
           </a:xfrm>
           <a:prstGeom prst="roundRect">
             <a:avLst/>
@@ -3585,7 +3825,7 @@
           <a:solidFill>
             <a:srgbClr val="FFFFFF"/>
           </a:solidFill>
-          <a:ln w="22860">
+          <a:ln w="20320">
             <a:solidFill>
               <a:srgbClr val="B23A2A"/>
             </a:solidFill>
@@ -3616,23 +3856,113 @@
       </p:sp>
       <p:sp>
         <p:nvSpPr>
-          <p:cNvPr id="6" name="Oval 5"/>
+          <p:cNvPr id="7" name="TextBox 6"/>
+          <p:cNvSpPr txBox="1"/>
+          <p:nvPr/>
+        </p:nvSpPr>
+        <p:spPr>
+          <a:xfrm>
+            <a:off x="914400" y="2578608"/>
+            <a:ext cx="1950643" cy="822960"/>
+          </a:xfrm>
+          <a:prstGeom prst="rect">
+            <a:avLst/>
+          </a:prstGeom>
+          <a:noFill/>
+        </p:spPr>
+        <p:txBody>
+          <a:bodyPr wrap="square" anchor="t" lIns="0" rIns="0" tIns="0" bIns="0">
+            <a:spAutoFit/>
+          </a:bodyPr>
+          <a:lstStyle/>
+          <a:p>
+            <a:pPr algn="l">
+              <a:lnSpc>
+                <a:spcPct val="130000"/>
+              </a:lnSpc>
+              <a:spcAft>
+                <a:spcPts val="400"/>
+              </a:spcAft>
+            </a:pPr>
+            <a:r>
+              <a:rPr sz="1600" b="1">
+                <a:solidFill>
+                  <a:srgbClr val="B23A2A"/>
+                </a:solidFill>
+                <a:latin typeface="微软雅黑"/>
+                <a:ea typeface="微软雅黑"/>
+                <a:cs typeface="微软雅黑"/>
+              </a:rPr>
+              <a:t>语言能力</a:t>
+            </a:r>
+          </a:p>
+        </p:txBody>
+      </p:sp>
+      <p:sp>
+        <p:nvSpPr>
+          <p:cNvPr id="8" name="TextBox 7"/>
+          <p:cNvSpPr txBox="1"/>
+          <p:nvPr/>
+        </p:nvSpPr>
+        <p:spPr>
+          <a:xfrm>
+            <a:off x="868680" y="3337560"/>
+            <a:ext cx="1996363" cy="2423160"/>
+          </a:xfrm>
+          <a:prstGeom prst="rect">
+            <a:avLst/>
+          </a:prstGeom>
+          <a:noFill/>
+        </p:spPr>
+        <p:txBody>
+          <a:bodyPr wrap="square" anchor="t" lIns="0" rIns="0" tIns="0" bIns="0">
+            <a:spAutoFit/>
+          </a:bodyPr>
+          <a:lstStyle/>
+          <a:p>
+            <a:pPr algn="l">
+              <a:lnSpc>
+                <a:spcPct val="145000"/>
+              </a:lnSpc>
+              <a:spcAft>
+                <a:spcPts val="400"/>
+              </a:spcAft>
+            </a:pPr>
+            <a:r>
+              <a:rPr sz="1250" b="0">
+                <a:solidFill>
+                  <a:srgbClr val="1C2A33"/>
+                </a:solidFill>
+                <a:latin typeface="楷体"/>
+                <a:ea typeface="楷体"/>
+                <a:cs typeface="楷体"/>
+              </a:rPr>
+              <a:t>能就一首诗词的某一「点」（意象/手法/情感）写300字左右短评，做到引文准确、分析有据。</a:t>
+            </a:r>
+          </a:p>
+        </p:txBody>
+      </p:sp>
+      <p:sp>
+        <p:nvSpPr>
+          <p:cNvPr id="9" name="Rounded Rectangle 8"/>
           <p:cNvSpPr/>
           <p:nvPr/>
         </p:nvSpPr>
         <p:spPr>
           <a:xfrm>
-            <a:off x="804672" y="1581912"/>
-            <a:ext cx="457200" cy="457200"/>
-          </a:xfrm>
-          <a:prstGeom prst="ellipse">
+            <a:off x="3459403" y="2377440"/>
+            <a:ext cx="2453563" cy="3566160"/>
+          </a:xfrm>
+          <a:prstGeom prst="roundRect">
             <a:avLst/>
           </a:prstGeom>
           <a:solidFill>
-            <a:srgbClr val="B23A2A"/>
+            <a:srgbClr val="FFFFFF"/>
           </a:solidFill>
-          <a:ln>
-            <a:noFill/>
+          <a:ln w="20320">
+            <a:solidFill>
+              <a:srgbClr val="2E7D6B"/>
+            </a:solidFill>
           </a:ln>
           <a:effectLst/>
         </p:spPr>
@@ -3660,14 +3990,14 @@
       </p:sp>
       <p:sp>
         <p:nvSpPr>
-          <p:cNvPr id="7" name="TextBox 6"/>
+          <p:cNvPr id="10" name="TextBox 9"/>
           <p:cNvSpPr txBox="1"/>
           <p:nvPr/>
         </p:nvSpPr>
         <p:spPr>
           <a:xfrm>
-            <a:off x="804672" y="1636776"/>
-            <a:ext cx="457200" cy="384048"/>
+            <a:off x="3733723" y="2578608"/>
+            <a:ext cx="1950643" cy="822960"/>
           </a:xfrm>
           <a:prstGeom prst="rect">
             <a:avLst/>
@@ -3680,31 +4010,38 @@
           </a:bodyPr>
           <a:lstStyle/>
           <a:p>
-            <a:pPr algn="ctr"/>
+            <a:pPr algn="l">
+              <a:lnSpc>
+                <a:spcPct val="130000"/>
+              </a:lnSpc>
+              <a:spcAft>
+                <a:spcPts val="400"/>
+              </a:spcAft>
+            </a:pPr>
             <a:r>
               <a:rPr sz="1600" b="1">
                 <a:solidFill>
-                  <a:srgbClr val="FFFFFF"/>
+                  <a:srgbClr val="2E7D6B"/>
                 </a:solidFill>
                 <a:latin typeface="微软雅黑"/>
                 <a:ea typeface="微软雅黑"/>
                 <a:cs typeface="微软雅黑"/>
               </a:rPr>
-              <a:t>1</a:t>
-            </a:r>
-          </a:p>
-        </p:txBody>
-      </p:sp>
-      <p:sp>
-        <p:nvSpPr>
-          <p:cNvPr id="8" name="TextBox 7"/>
+              <a:t>文化意识</a:t>
+            </a:r>
+          </a:p>
+        </p:txBody>
+      </p:sp>
+      <p:sp>
+        <p:nvSpPr>
+          <p:cNvPr id="11" name="TextBox 10"/>
           <p:cNvSpPr txBox="1"/>
           <p:nvPr/>
         </p:nvSpPr>
         <p:spPr>
           <a:xfrm>
-            <a:off x="1371600" y="1527048"/>
-            <a:ext cx="4434840" cy="457200"/>
+            <a:off x="3688003" y="3337560"/>
+            <a:ext cx="1996363" cy="2423160"/>
           </a:xfrm>
           <a:prstGeom prst="rect">
             <a:avLst/>
@@ -3719,52 +4056,14 @@
           <a:p>
             <a:pPr algn="l">
               <a:lnSpc>
-                <a:spcPct val="110000"/>
+                <a:spcPct val="145000"/>
               </a:lnSpc>
+              <a:spcAft>
+                <a:spcPts val="400"/>
+              </a:spcAft>
             </a:pPr>
             <a:r>
-              <a:rPr sz="1600" b="1">
-                <a:solidFill>
-                  <a:srgbClr val="1C2A33"/>
-                </a:solidFill>
-                <a:latin typeface="微软雅黑"/>
-                <a:ea typeface="微软雅黑"/>
-                <a:cs typeface="微软雅黑"/>
-              </a:rPr>
-              <a:t>目标</a:t>
-            </a:r>
-          </a:p>
-        </p:txBody>
-      </p:sp>
-      <p:sp>
-        <p:nvSpPr>
-          <p:cNvPr id="9" name="TextBox 8"/>
-          <p:cNvSpPr txBox="1"/>
-          <p:nvPr/>
-        </p:nvSpPr>
-        <p:spPr>
-          <a:xfrm>
-            <a:off x="1371600" y="1965960"/>
-            <a:ext cx="4434840" cy="1417320"/>
-          </a:xfrm>
-          <a:prstGeom prst="rect">
-            <a:avLst/>
-          </a:prstGeom>
-          <a:noFill/>
-        </p:spPr>
-        <p:txBody>
-          <a:bodyPr wrap="square" anchor="t" lIns="0" rIns="0" tIns="0" bIns="0">
-            <a:spAutoFit/>
-          </a:bodyPr>
-          <a:lstStyle/>
-          <a:p>
-            <a:pPr algn="l">
-              <a:lnSpc>
-                <a:spcPct val="128000"/>
-              </a:lnSpc>
-            </a:pPr>
-            <a:r>
-              <a:rPr sz="1200" b="0">
+              <a:rPr sz="1250" b="0">
                 <a:solidFill>
                   <a:srgbClr val="1C2A33"/>
                 </a:solidFill>
@@ -3772,21 +4071,21 @@
                 <a:ea typeface="楷体"/>
                 <a:cs typeface="楷体"/>
               </a:rPr>
-              <a:t>语言能力：能就一首诗词的某一「点」（意象/手法/情感）写300字左右短评，做到引文准确、分析有据。</a:t>
-            </a:r>
-          </a:p>
-        </p:txBody>
-      </p:sp>
-      <p:sp>
-        <p:nvSpPr>
-          <p:cNvPr id="10" name="Rounded Rectangle 9"/>
+              <a:t>在评点诗词中深化对古典诗歌的审美理解，培养文学批评的初步素养。</a:t>
+            </a:r>
+          </a:p>
+        </p:txBody>
+      </p:sp>
+      <p:sp>
+        <p:nvSpPr>
+          <p:cNvPr id="12" name="Rounded Rectangle 11"/>
           <p:cNvSpPr/>
           <p:nvPr/>
         </p:nvSpPr>
         <p:spPr>
           <a:xfrm>
-            <a:off x="6263640" y="1417320"/>
-            <a:ext cx="5349240" cy="2057400"/>
+            <a:off x="6278727" y="2377440"/>
+            <a:ext cx="2453563" cy="3566160"/>
           </a:xfrm>
           <a:prstGeom prst="roundRect">
             <a:avLst/>
@@ -3794,9 +4093,9 @@
           <a:solidFill>
             <a:srgbClr val="FFFFFF"/>
           </a:solidFill>
-          <a:ln w="22860">
+          <a:ln w="20320">
             <a:solidFill>
-              <a:srgbClr val="B23A2A"/>
+              <a:srgbClr val="C8A86B"/>
             </a:solidFill>
           </a:ln>
           <a:effectLst/>
@@ -3825,23 +4124,113 @@
       </p:sp>
       <p:sp>
         <p:nvSpPr>
-          <p:cNvPr id="11" name="Oval 10"/>
+          <p:cNvPr id="13" name="TextBox 12"/>
+          <p:cNvSpPr txBox="1"/>
+          <p:nvPr/>
+        </p:nvSpPr>
+        <p:spPr>
+          <a:xfrm>
+            <a:off x="6553047" y="2578608"/>
+            <a:ext cx="1950643" cy="822960"/>
+          </a:xfrm>
+          <a:prstGeom prst="rect">
+            <a:avLst/>
+          </a:prstGeom>
+          <a:noFill/>
+        </p:spPr>
+        <p:txBody>
+          <a:bodyPr wrap="square" anchor="t" lIns="0" rIns="0" tIns="0" bIns="0">
+            <a:spAutoFit/>
+          </a:bodyPr>
+          <a:lstStyle/>
+          <a:p>
+            <a:pPr algn="l">
+              <a:lnSpc>
+                <a:spcPct val="130000"/>
+              </a:lnSpc>
+              <a:spcAft>
+                <a:spcPts val="400"/>
+              </a:spcAft>
+            </a:pPr>
+            <a:r>
+              <a:rPr sz="1600" b="1">
+                <a:solidFill>
+                  <a:srgbClr val="C8A86B"/>
+                </a:solidFill>
+                <a:latin typeface="微软雅黑"/>
+                <a:ea typeface="微软雅黑"/>
+                <a:cs typeface="微软雅黑"/>
+              </a:rPr>
+              <a:t>思维品质</a:t>
+            </a:r>
+          </a:p>
+        </p:txBody>
+      </p:sp>
+      <p:sp>
+        <p:nvSpPr>
+          <p:cNvPr id="14" name="TextBox 13"/>
+          <p:cNvSpPr txBox="1"/>
+          <p:nvPr/>
+        </p:nvSpPr>
+        <p:spPr>
+          <a:xfrm>
+            <a:off x="6507327" y="3337560"/>
+            <a:ext cx="1996363" cy="2423160"/>
+          </a:xfrm>
+          <a:prstGeom prst="rect">
+            <a:avLst/>
+          </a:prstGeom>
+          <a:noFill/>
+        </p:spPr>
+        <p:txBody>
+          <a:bodyPr wrap="square" anchor="t" lIns="0" rIns="0" tIns="0" bIns="0">
+            <a:spAutoFit/>
+          </a:bodyPr>
+          <a:lstStyle/>
+          <a:p>
+            <a:pPr algn="l">
+              <a:lnSpc>
+                <a:spcPct val="145000"/>
+              </a:lnSpc>
+              <a:spcAft>
+                <a:spcPts val="400"/>
+              </a:spcAft>
+            </a:pPr>
+            <a:r>
+              <a:rPr sz="1250" b="0">
+                <a:solidFill>
+                  <a:srgbClr val="1C2A33"/>
+                </a:solidFill>
+                <a:latin typeface="楷体"/>
+                <a:ea typeface="楷体"/>
+                <a:cs typeface="楷体"/>
+              </a:rPr>
+              <a:t>在「选点—分析—提升」中培养聚焦论证与逻辑表达的能力。</a:t>
+            </a:r>
+          </a:p>
+        </p:txBody>
+      </p:sp>
+      <p:sp>
+        <p:nvSpPr>
+          <p:cNvPr id="15" name="Rounded Rectangle 14"/>
           <p:cNvSpPr/>
           <p:nvPr/>
         </p:nvSpPr>
         <p:spPr>
           <a:xfrm>
-            <a:off x="6428232" y="1581912"/>
-            <a:ext cx="457200" cy="457200"/>
-          </a:xfrm>
-          <a:prstGeom prst="ellipse">
+            <a:off x="9098051" y="2377440"/>
+            <a:ext cx="2453563" cy="3566160"/>
+          </a:xfrm>
+          <a:prstGeom prst="roundRect">
             <a:avLst/>
           </a:prstGeom>
           <a:solidFill>
-            <a:srgbClr val="B23A2A"/>
+            <a:srgbClr val="FFFFFF"/>
           </a:solidFill>
-          <a:ln>
-            <a:noFill/>
+          <a:ln w="20320">
+            <a:solidFill>
+              <a:srgbClr val="6B6258"/>
+            </a:solidFill>
           </a:ln>
           <a:effectLst/>
         </p:spPr>
@@ -3869,14 +4258,14 @@
       </p:sp>
       <p:sp>
         <p:nvSpPr>
-          <p:cNvPr id="12" name="TextBox 11"/>
+          <p:cNvPr id="16" name="TextBox 15"/>
           <p:cNvSpPr txBox="1"/>
           <p:nvPr/>
         </p:nvSpPr>
         <p:spPr>
           <a:xfrm>
-            <a:off x="6428232" y="1636776"/>
-            <a:ext cx="457200" cy="384048"/>
+            <a:off x="9372371" y="2578608"/>
+            <a:ext cx="1950643" cy="822960"/>
           </a:xfrm>
           <a:prstGeom prst="rect">
             <a:avLst/>
@@ -3889,31 +4278,38 @@
           </a:bodyPr>
           <a:lstStyle/>
           <a:p>
-            <a:pPr algn="ctr"/>
+            <a:pPr algn="l">
+              <a:lnSpc>
+                <a:spcPct val="130000"/>
+              </a:lnSpc>
+              <a:spcAft>
+                <a:spcPts val="400"/>
+              </a:spcAft>
+            </a:pPr>
             <a:r>
               <a:rPr sz="1600" b="1">
                 <a:solidFill>
-                  <a:srgbClr val="FFFFFF"/>
+                  <a:srgbClr val="6B6258"/>
                 </a:solidFill>
                 <a:latin typeface="微软雅黑"/>
                 <a:ea typeface="微软雅黑"/>
                 <a:cs typeface="微软雅黑"/>
               </a:rPr>
-              <a:t>2</a:t>
-            </a:r>
-          </a:p>
-        </p:txBody>
-      </p:sp>
-      <p:sp>
-        <p:nvSpPr>
-          <p:cNvPr id="13" name="TextBox 12"/>
+              <a:t>学习能力</a:t>
+            </a:r>
+          </a:p>
+        </p:txBody>
+      </p:sp>
+      <p:sp>
+        <p:nvSpPr>
+          <p:cNvPr id="17" name="TextBox 16"/>
           <p:cNvSpPr txBox="1"/>
           <p:nvPr/>
         </p:nvSpPr>
         <p:spPr>
           <a:xfrm>
-            <a:off x="6995160" y="1527048"/>
-            <a:ext cx="4434840" cy="457200"/>
+            <a:off x="9326651" y="3337560"/>
+            <a:ext cx="1996363" cy="2423160"/>
           </a:xfrm>
           <a:prstGeom prst="rect">
             <a:avLst/>
@@ -3928,52 +4324,14 @@
           <a:p>
             <a:pPr algn="l">
               <a:lnSpc>
-                <a:spcPct val="110000"/>
+                <a:spcPct val="145000"/>
               </a:lnSpc>
+              <a:spcAft>
+                <a:spcPts val="400"/>
+              </a:spcAft>
             </a:pPr>
             <a:r>
-              <a:rPr sz="1600" b="1">
-                <a:solidFill>
-                  <a:srgbClr val="1C2A33"/>
-                </a:solidFill>
-                <a:latin typeface="微软雅黑"/>
-                <a:ea typeface="微软雅黑"/>
-                <a:cs typeface="微软雅黑"/>
-              </a:rPr>
-              <a:t>目标</a:t>
-            </a:r>
-          </a:p>
-        </p:txBody>
-      </p:sp>
-      <p:sp>
-        <p:nvSpPr>
-          <p:cNvPr id="14" name="TextBox 13"/>
-          <p:cNvSpPr txBox="1"/>
-          <p:nvPr/>
-        </p:nvSpPr>
-        <p:spPr>
-          <a:xfrm>
-            <a:off x="6995160" y="1965960"/>
-            <a:ext cx="4434840" cy="1417320"/>
-          </a:xfrm>
-          <a:prstGeom prst="rect">
-            <a:avLst/>
-          </a:prstGeom>
-          <a:noFill/>
-        </p:spPr>
-        <p:txBody>
-          <a:bodyPr wrap="square" anchor="t" lIns="0" rIns="0" tIns="0" bIns="0">
-            <a:spAutoFit/>
-          </a:bodyPr>
-          <a:lstStyle/>
-          <a:p>
-            <a:pPr algn="l">
-              <a:lnSpc>
-                <a:spcPct val="128000"/>
-              </a:lnSpc>
-            </a:pPr>
-            <a:r>
-              <a:rPr sz="1400" b="0">
+              <a:rPr sz="1250" b="0">
                 <a:solidFill>
                   <a:srgbClr val="1C2A33"/>
                 </a:solidFill>
@@ -3981,134 +4339,7 @@
                 <a:ea typeface="楷体"/>
                 <a:cs typeface="楷体"/>
               </a:rPr>
-              <a:t>文化意识：在评点诗词中深化对古典诗歌的审美理解，培养文学批评的初步素养。</a:t>
-            </a:r>
-          </a:p>
-        </p:txBody>
-      </p:sp>
-      <p:sp>
-        <p:nvSpPr>
-          <p:cNvPr id="15" name="Rounded Rectangle 14"/>
-          <p:cNvSpPr/>
-          <p:nvPr/>
-        </p:nvSpPr>
-        <p:spPr>
-          <a:xfrm>
-            <a:off x="640080" y="3703320"/>
-            <a:ext cx="5349240" cy="2057400"/>
-          </a:xfrm>
-          <a:prstGeom prst="roundRect">
-            <a:avLst/>
-          </a:prstGeom>
-          <a:solidFill>
-            <a:srgbClr val="FFFFFF"/>
-          </a:solidFill>
-          <a:ln w="22860">
-            <a:solidFill>
-              <a:srgbClr val="B23A2A"/>
-            </a:solidFill>
-          </a:ln>
-          <a:effectLst/>
-        </p:spPr>
-        <p:style>
-          <a:lnRef idx="1">
-            <a:schemeClr val="accent1"/>
-          </a:lnRef>
-          <a:fillRef idx="3">
-            <a:schemeClr val="accent1"/>
-          </a:fillRef>
-          <a:effectRef idx="2">
-            <a:schemeClr val="accent1"/>
-          </a:effectRef>
-          <a:fontRef idx="minor">
-            <a:schemeClr val="lt1"/>
-          </a:fontRef>
-        </p:style>
-        <p:txBody>
-          <a:bodyPr rtlCol="0" anchor="ctr"/>
-          <a:lstStyle/>
-          <a:p>
-            <a:pPr algn="ctr"/>
-          </a:p>
-        </p:txBody>
-      </p:sp>
-      <p:sp>
-        <p:nvSpPr>
-          <p:cNvPr id="16" name="Oval 15"/>
-          <p:cNvSpPr/>
-          <p:nvPr/>
-        </p:nvSpPr>
-        <p:spPr>
-          <a:xfrm>
-            <a:off x="804672" y="3867912"/>
-            <a:ext cx="457200" cy="457200"/>
-          </a:xfrm>
-          <a:prstGeom prst="ellipse">
-            <a:avLst/>
-          </a:prstGeom>
-          <a:solidFill>
-            <a:srgbClr val="B23A2A"/>
-          </a:solidFill>
-          <a:ln>
-            <a:noFill/>
-          </a:ln>
-          <a:effectLst/>
-        </p:spPr>
-        <p:style>
-          <a:lnRef idx="1">
-            <a:schemeClr val="accent1"/>
-          </a:lnRef>
-          <a:fillRef idx="3">
-            <a:schemeClr val="accent1"/>
-          </a:fillRef>
-          <a:effectRef idx="2">
-            <a:schemeClr val="accent1"/>
-          </a:effectRef>
-          <a:fontRef idx="minor">
-            <a:schemeClr val="lt1"/>
-          </a:fontRef>
-        </p:style>
-        <p:txBody>
-          <a:bodyPr rtlCol="0" anchor="ctr"/>
-          <a:lstStyle/>
-          <a:p>
-            <a:pPr algn="ctr"/>
-          </a:p>
-        </p:txBody>
-      </p:sp>
-      <p:sp>
-        <p:nvSpPr>
-          <p:cNvPr id="17" name="TextBox 16"/>
-          <p:cNvSpPr txBox="1"/>
-          <p:nvPr/>
-        </p:nvSpPr>
-        <p:spPr>
-          <a:xfrm>
-            <a:off x="804672" y="3922776"/>
-            <a:ext cx="457200" cy="384048"/>
-          </a:xfrm>
-          <a:prstGeom prst="rect">
-            <a:avLst/>
-          </a:prstGeom>
-          <a:noFill/>
-        </p:spPr>
-        <p:txBody>
-          <a:bodyPr wrap="square" anchor="t" lIns="0" rIns="0" tIns="0" bIns="0">
-            <a:spAutoFit/>
-          </a:bodyPr>
-          <a:lstStyle/>
-          <a:p>
-            <a:pPr algn="ctr"/>
-            <a:r>
-              <a:rPr sz="1600" b="1">
-                <a:solidFill>
-                  <a:srgbClr val="FFFFFF"/>
-                </a:solidFill>
-                <a:latin typeface="微软雅黑"/>
-                <a:ea typeface="微软雅黑"/>
-                <a:cs typeface="微软雅黑"/>
-              </a:rPr>
-              <a:t>3</a:t>
+              <a:t>掌握「选点→引文→分析→提升」的文学短评四步法。</a:t>
             </a:r>
           </a:p>
         </p:txBody>
@@ -4116,297 +4347,6 @@
       <p:sp>
         <p:nvSpPr>
           <p:cNvPr id="18" name="TextBox 17"/>
-          <p:cNvSpPr txBox="1"/>
-          <p:nvPr/>
-        </p:nvSpPr>
-        <p:spPr>
-          <a:xfrm>
-            <a:off x="1371600" y="3813048"/>
-            <a:ext cx="4434840" cy="457200"/>
-          </a:xfrm>
-          <a:prstGeom prst="rect">
-            <a:avLst/>
-          </a:prstGeom>
-          <a:noFill/>
-        </p:spPr>
-        <p:txBody>
-          <a:bodyPr wrap="square" anchor="t" lIns="0" rIns="0" tIns="0" bIns="0">
-            <a:spAutoFit/>
-          </a:bodyPr>
-          <a:lstStyle/>
-          <a:p>
-            <a:pPr algn="l">
-              <a:lnSpc>
-                <a:spcPct val="110000"/>
-              </a:lnSpc>
-            </a:pPr>
-            <a:r>
-              <a:rPr sz="1600" b="1">
-                <a:solidFill>
-                  <a:srgbClr val="1C2A33"/>
-                </a:solidFill>
-                <a:latin typeface="微软雅黑"/>
-                <a:ea typeface="微软雅黑"/>
-                <a:cs typeface="微软雅黑"/>
-              </a:rPr>
-              <a:t>目标</a:t>
-            </a:r>
-          </a:p>
-        </p:txBody>
-      </p:sp>
-      <p:sp>
-        <p:nvSpPr>
-          <p:cNvPr id="19" name="TextBox 18"/>
-          <p:cNvSpPr txBox="1"/>
-          <p:nvPr/>
-        </p:nvSpPr>
-        <p:spPr>
-          <a:xfrm>
-            <a:off x="1371600" y="4251960"/>
-            <a:ext cx="4434840" cy="1417320"/>
-          </a:xfrm>
-          <a:prstGeom prst="rect">
-            <a:avLst/>
-          </a:prstGeom>
-          <a:noFill/>
-        </p:spPr>
-        <p:txBody>
-          <a:bodyPr wrap="square" anchor="t" lIns="0" rIns="0" tIns="0" bIns="0">
-            <a:spAutoFit/>
-          </a:bodyPr>
-          <a:lstStyle/>
-          <a:p>
-            <a:pPr algn="l">
-              <a:lnSpc>
-                <a:spcPct val="128000"/>
-              </a:lnSpc>
-            </a:pPr>
-            <a:r>
-              <a:rPr sz="1400" b="0">
-                <a:solidFill>
-                  <a:srgbClr val="1C2A33"/>
-                </a:solidFill>
-                <a:latin typeface="楷体"/>
-                <a:ea typeface="楷体"/>
-                <a:cs typeface="楷体"/>
-              </a:rPr>
-              <a:t>思维品质：在「选点—分析—提升」中培养聚焦论证与逻辑表达的能力。</a:t>
-            </a:r>
-          </a:p>
-        </p:txBody>
-      </p:sp>
-      <p:sp>
-        <p:nvSpPr>
-          <p:cNvPr id="20" name="Rounded Rectangle 19"/>
-          <p:cNvSpPr/>
-          <p:nvPr/>
-        </p:nvSpPr>
-        <p:spPr>
-          <a:xfrm>
-            <a:off x="6263640" y="3703320"/>
-            <a:ext cx="5349240" cy="2057400"/>
-          </a:xfrm>
-          <a:prstGeom prst="roundRect">
-            <a:avLst/>
-          </a:prstGeom>
-          <a:solidFill>
-            <a:srgbClr val="FFFFFF"/>
-          </a:solidFill>
-          <a:ln w="22860">
-            <a:solidFill>
-              <a:srgbClr val="B23A2A"/>
-            </a:solidFill>
-          </a:ln>
-          <a:effectLst/>
-        </p:spPr>
-        <p:style>
-          <a:lnRef idx="1">
-            <a:schemeClr val="accent1"/>
-          </a:lnRef>
-          <a:fillRef idx="3">
-            <a:schemeClr val="accent1"/>
-          </a:fillRef>
-          <a:effectRef idx="2">
-            <a:schemeClr val="accent1"/>
-          </a:effectRef>
-          <a:fontRef idx="minor">
-            <a:schemeClr val="lt1"/>
-          </a:fontRef>
-        </p:style>
-        <p:txBody>
-          <a:bodyPr rtlCol="0" anchor="ctr"/>
-          <a:lstStyle/>
-          <a:p>
-            <a:pPr algn="ctr"/>
-          </a:p>
-        </p:txBody>
-      </p:sp>
-      <p:sp>
-        <p:nvSpPr>
-          <p:cNvPr id="21" name="Oval 20"/>
-          <p:cNvSpPr/>
-          <p:nvPr/>
-        </p:nvSpPr>
-        <p:spPr>
-          <a:xfrm>
-            <a:off x="6428232" y="3867912"/>
-            <a:ext cx="457200" cy="457200"/>
-          </a:xfrm>
-          <a:prstGeom prst="ellipse">
-            <a:avLst/>
-          </a:prstGeom>
-          <a:solidFill>
-            <a:srgbClr val="B23A2A"/>
-          </a:solidFill>
-          <a:ln>
-            <a:noFill/>
-          </a:ln>
-          <a:effectLst/>
-        </p:spPr>
-        <p:style>
-          <a:lnRef idx="1">
-            <a:schemeClr val="accent1"/>
-          </a:lnRef>
-          <a:fillRef idx="3">
-            <a:schemeClr val="accent1"/>
-          </a:fillRef>
-          <a:effectRef idx="2">
-            <a:schemeClr val="accent1"/>
-          </a:effectRef>
-          <a:fontRef idx="minor">
-            <a:schemeClr val="lt1"/>
-          </a:fontRef>
-        </p:style>
-        <p:txBody>
-          <a:bodyPr rtlCol="0" anchor="ctr"/>
-          <a:lstStyle/>
-          <a:p>
-            <a:pPr algn="ctr"/>
-          </a:p>
-        </p:txBody>
-      </p:sp>
-      <p:sp>
-        <p:nvSpPr>
-          <p:cNvPr id="22" name="TextBox 21"/>
-          <p:cNvSpPr txBox="1"/>
-          <p:nvPr/>
-        </p:nvSpPr>
-        <p:spPr>
-          <a:xfrm>
-            <a:off x="6428232" y="3922776"/>
-            <a:ext cx="457200" cy="384048"/>
-          </a:xfrm>
-          <a:prstGeom prst="rect">
-            <a:avLst/>
-          </a:prstGeom>
-          <a:noFill/>
-        </p:spPr>
-        <p:txBody>
-          <a:bodyPr wrap="square" anchor="t" lIns="0" rIns="0" tIns="0" bIns="0">
-            <a:spAutoFit/>
-          </a:bodyPr>
-          <a:lstStyle/>
-          <a:p>
-            <a:pPr algn="ctr"/>
-            <a:r>
-              <a:rPr sz="1600" b="1">
-                <a:solidFill>
-                  <a:srgbClr val="FFFFFF"/>
-                </a:solidFill>
-                <a:latin typeface="微软雅黑"/>
-                <a:ea typeface="微软雅黑"/>
-                <a:cs typeface="微软雅黑"/>
-              </a:rPr>
-              <a:t>4</a:t>
-            </a:r>
-          </a:p>
-        </p:txBody>
-      </p:sp>
-      <p:sp>
-        <p:nvSpPr>
-          <p:cNvPr id="23" name="TextBox 22"/>
-          <p:cNvSpPr txBox="1"/>
-          <p:nvPr/>
-        </p:nvSpPr>
-        <p:spPr>
-          <a:xfrm>
-            <a:off x="6995160" y="3813048"/>
-            <a:ext cx="4434840" cy="457200"/>
-          </a:xfrm>
-          <a:prstGeom prst="rect">
-            <a:avLst/>
-          </a:prstGeom>
-          <a:noFill/>
-        </p:spPr>
-        <p:txBody>
-          <a:bodyPr wrap="square" anchor="t" lIns="0" rIns="0" tIns="0" bIns="0">
-            <a:spAutoFit/>
-          </a:bodyPr>
-          <a:lstStyle/>
-          <a:p>
-            <a:pPr algn="l">
-              <a:lnSpc>
-                <a:spcPct val="110000"/>
-              </a:lnSpc>
-            </a:pPr>
-            <a:r>
-              <a:rPr sz="1600" b="1">
-                <a:solidFill>
-                  <a:srgbClr val="1C2A33"/>
-                </a:solidFill>
-                <a:latin typeface="微软雅黑"/>
-                <a:ea typeface="微软雅黑"/>
-                <a:cs typeface="微软雅黑"/>
-              </a:rPr>
-              <a:t>目标</a:t>
-            </a:r>
-          </a:p>
-        </p:txBody>
-      </p:sp>
-      <p:sp>
-        <p:nvSpPr>
-          <p:cNvPr id="24" name="TextBox 23"/>
-          <p:cNvSpPr txBox="1"/>
-          <p:nvPr/>
-        </p:nvSpPr>
-        <p:spPr>
-          <a:xfrm>
-            <a:off x="6995160" y="4251960"/>
-            <a:ext cx="4434840" cy="1417320"/>
-          </a:xfrm>
-          <a:prstGeom prst="rect">
-            <a:avLst/>
-          </a:prstGeom>
-          <a:noFill/>
-        </p:spPr>
-        <p:txBody>
-          <a:bodyPr wrap="square" anchor="t" lIns="0" rIns="0" tIns="0" bIns="0">
-            <a:spAutoFit/>
-          </a:bodyPr>
-          <a:lstStyle/>
-          <a:p>
-            <a:pPr algn="l">
-              <a:lnSpc>
-                <a:spcPct val="128000"/>
-              </a:lnSpc>
-            </a:pPr>
-            <a:r>
-              <a:rPr sz="1400" b="0">
-                <a:solidFill>
-                  <a:srgbClr val="1C2A33"/>
-                </a:solidFill>
-                <a:latin typeface="楷体"/>
-                <a:ea typeface="楷体"/>
-                <a:cs typeface="楷体"/>
-              </a:rPr>
-              <a:t>学习能力：掌握「选点→引文→分析→提升」的文学短评四步法。</a:t>
-            </a:r>
-          </a:p>
-        </p:txBody>
-      </p:sp>
-      <p:sp>
-        <p:nvSpPr>
-          <p:cNvPr id="25" name="TextBox 24"/>
           <p:cNvSpPr txBox="1"/>
           <p:nvPr/>
         </p:nvSpPr>
@@ -4533,13 +4473,13 @@
             <a:r>
               <a:rPr sz="1300" b="1">
                 <a:solidFill>
-                  <a:srgbClr val="2E7D6B"/>
+                  <a:srgbClr val="B23A2A"/>
                 </a:solidFill>
                 <a:latin typeface="微软雅黑"/>
                 <a:ea typeface="微软雅黑"/>
                 <a:cs typeface="微软雅黑"/>
               </a:rPr>
-              <a:t>课文背景</a:t>
+              <a:t>背景 · 权威调研</a:t>
             </a:r>
           </a:p>
         </p:txBody>
@@ -4559,7 +4499,7 @@
             <a:avLst/>
           </a:prstGeom>
           <a:solidFill>
-            <a:srgbClr val="2E7D6B"/>
+            <a:srgbClr val="B23A2A"/>
           </a:solidFill>
           <a:ln>
             <a:noFill/>
@@ -4596,8 +4536,52 @@
         </p:nvSpPr>
         <p:spPr>
           <a:xfrm>
-            <a:off x="640080" y="1508760"/>
-            <a:ext cx="6766560" cy="4572000"/>
+            <a:off x="640080" y="1325880"/>
+            <a:ext cx="10911535" cy="548640"/>
+          </a:xfrm>
+          <a:prstGeom prst="rect">
+            <a:avLst/>
+          </a:prstGeom>
+          <a:noFill/>
+        </p:spPr>
+        <p:txBody>
+          <a:bodyPr wrap="square" anchor="t" lIns="0" rIns="0" tIns="0" bIns="0">
+            <a:spAutoFit/>
+          </a:bodyPr>
+          <a:lstStyle/>
+          <a:p>
+            <a:pPr algn="l">
+              <a:lnSpc>
+                <a:spcPct val="145000"/>
+              </a:lnSpc>
+              <a:spcAft>
+                <a:spcPts val="400"/>
+              </a:spcAft>
+            </a:pPr>
+            <a:r>
+              <a:rPr sz="2600" b="1">
+                <a:solidFill>
+                  <a:srgbClr val="1C2A33"/>
+                </a:solidFill>
+                <a:latin typeface="楷体"/>
+                <a:ea typeface="楷体"/>
+                <a:cs typeface="楷体"/>
+              </a:rPr>
+              <a:t>课文定位与资料来源</a:t>
+            </a:r>
+          </a:p>
+        </p:txBody>
+      </p:sp>
+      <p:sp>
+        <p:nvSpPr>
+          <p:cNvPr id="6" name="TextBox 5"/>
+          <p:cNvSpPr txBox="1"/>
+          <p:nvPr/>
+        </p:nvSpPr>
+        <p:spPr>
+          <a:xfrm>
+            <a:off x="640080" y="2011680"/>
+            <a:ext cx="5227167" cy="4480560"/>
           </a:xfrm>
           <a:prstGeom prst="rect">
             <a:avLst/>
@@ -4615,11 +4599,11 @@
                 <a:spcPct val="150000"/>
               </a:lnSpc>
               <a:spcAft>
-                <a:spcPts val="600"/>
+                <a:spcPts val="800"/>
               </a:spcAft>
             </a:pPr>
             <a:r>
-              <a:rPr sz="1600" b="0">
+              <a:rPr sz="1300" b="0">
                 <a:solidFill>
                   <a:srgbClr val="1C2A33"/>
                 </a:solidFill>
@@ -4627,46 +4611,146 @@
                 <a:ea typeface="楷体"/>
                 <a:cs typeface="楷体"/>
               </a:rPr>
-              <a:t>本课为第三单元写作任务「学写文学短评」。本单元读了8首诗词，学生已积累细读经验。文学短评与读后感不同：它聚焦文本某一「点」（一句诗/一个意象/一种手法），做有理有据的分析，不求面面俱到。教材提示可从「诗句理解、意象赏析、手法品鉴、情感体悟」任一角度切入，300字左右。核心方法是「选点—引文—分析—提升」四步。</a:t>
-            </a:r>
-          </a:p>
-        </p:txBody>
-      </p:sp>
-      <p:pic>
-        <p:nvPicPr>
-          <p:cNvPr id="6" name="Picture 5" descr="typewriter.jpg"/>
-          <p:cNvPicPr>
-            <a:picLocks noChangeAspect="1"/>
-          </p:cNvPicPr>
-          <p:nvPr/>
-        </p:nvPicPr>
-        <p:blipFill>
-          <a:blip r:embed="rId2"/>
-          <a:srcRect l="5860" r="5860"/>
-          <a:stretch>
-            <a:fillRect/>
-          </a:stretch>
-        </p:blipFill>
-        <p:spPr>
-          <a:xfrm>
-            <a:off x="8046720" y="1508760"/>
-            <a:ext cx="4114800" cy="3108960"/>
-          </a:xfrm>
-          <a:prstGeom prst="rect">
-            <a:avLst/>
-          </a:prstGeom>
-        </p:spPr>
-      </p:pic>
-      <p:sp>
-        <p:nvSpPr>
-          <p:cNvPr id="7" name="TextBox 6"/>
+              <a:t>本课为第三单元写作任务「学写文学短评」。</a:t>
+            </a:r>
+          </a:p>
+          <a:p>
+            <a:pPr algn="l">
+              <a:lnSpc>
+                <a:spcPct val="150000"/>
+              </a:lnSpc>
+              <a:spcAft>
+                <a:spcPts val="800"/>
+              </a:spcAft>
+            </a:pPr>
+            <a:r>
+              <a:rPr sz="1300" b="0">
+                <a:solidFill>
+                  <a:srgbClr val="1C2A33"/>
+                </a:solidFill>
+                <a:latin typeface="楷体"/>
+                <a:ea typeface="楷体"/>
+                <a:cs typeface="楷体"/>
+              </a:rPr>
+              <a:t>本单元读了8首诗词，学生已积累细读经验。</a:t>
+            </a:r>
+          </a:p>
+          <a:p>
+            <a:pPr algn="l">
+              <a:lnSpc>
+                <a:spcPct val="150000"/>
+              </a:lnSpc>
+              <a:spcAft>
+                <a:spcPts val="800"/>
+              </a:spcAft>
+            </a:pPr>
+            <a:r>
+              <a:rPr sz="1300" b="0">
+                <a:solidFill>
+                  <a:srgbClr val="1C2A33"/>
+                </a:solidFill>
+                <a:latin typeface="楷体"/>
+                <a:ea typeface="楷体"/>
+                <a:cs typeface="楷体"/>
+              </a:rPr>
+              <a:t>文学短评与读后感不同：它聚焦文本某一「点」（一句诗/一个意象/一种手法），做有理有据的分析，不求面面俱到。</a:t>
+            </a:r>
+          </a:p>
+          <a:p>
+            <a:pPr algn="l">
+              <a:lnSpc>
+                <a:spcPct val="150000"/>
+              </a:lnSpc>
+              <a:spcAft>
+                <a:spcPts val="800"/>
+              </a:spcAft>
+            </a:pPr>
+            <a:r>
+              <a:rPr sz="1300" b="0">
+                <a:solidFill>
+                  <a:srgbClr val="1C2A33"/>
+                </a:solidFill>
+                <a:latin typeface="楷体"/>
+                <a:ea typeface="楷体"/>
+                <a:cs typeface="楷体"/>
+              </a:rPr>
+              <a:t>教材提示可从「诗句理解、意象赏析、手法品鉴、情感体悟」任一角度切入，300字左右。</a:t>
+            </a:r>
+          </a:p>
+          <a:p>
+            <a:pPr algn="l">
+              <a:lnSpc>
+                <a:spcPct val="150000"/>
+              </a:lnSpc>
+              <a:spcAft>
+                <a:spcPts val="800"/>
+              </a:spcAft>
+            </a:pPr>
+            <a:r>
+              <a:rPr sz="1300" b="0">
+                <a:solidFill>
+                  <a:srgbClr val="1C2A33"/>
+                </a:solidFill>
+                <a:latin typeface="楷体"/>
+                <a:ea typeface="楷体"/>
+                <a:cs typeface="楷体"/>
+              </a:rPr>
+              <a:t>核心方法是「选点—引文—分析—提升」四步。</a:t>
+            </a:r>
+          </a:p>
+        </p:txBody>
+      </p:sp>
+      <p:sp>
+        <p:nvSpPr>
+          <p:cNvPr id="7" name="Rounded Rectangle 6"/>
+          <p:cNvSpPr/>
+          <p:nvPr/>
+        </p:nvSpPr>
+        <p:spPr>
+          <a:xfrm>
+            <a:off x="6324447" y="2011680"/>
+            <a:ext cx="5227167" cy="4480560"/>
+          </a:xfrm>
+          <a:prstGeom prst="roundRect">
+            <a:avLst/>
+          </a:prstGeom>
+          <a:solidFill>
+            <a:srgbClr val="1C2A33"/>
+          </a:solidFill>
+          <a:effectLst/>
+        </p:spPr>
+        <p:style>
+          <a:lnRef idx="1">
+            <a:schemeClr val="accent1"/>
+          </a:lnRef>
+          <a:fillRef idx="3">
+            <a:schemeClr val="accent1"/>
+          </a:fillRef>
+          <a:effectRef idx="2">
+            <a:schemeClr val="accent1"/>
+          </a:effectRef>
+          <a:fontRef idx="minor">
+            <a:schemeClr val="lt1"/>
+          </a:fontRef>
+        </p:style>
+        <p:txBody>
+          <a:bodyPr rtlCol="0" anchor="ctr"/>
+          <a:lstStyle/>
+          <a:p>
+            <a:pPr algn="ctr"/>
+          </a:p>
+        </p:txBody>
+      </p:sp>
+      <p:sp>
+        <p:nvSpPr>
+          <p:cNvPr id="8" name="TextBox 7"/>
           <p:cNvSpPr txBox="1"/>
           <p:nvPr/>
         </p:nvSpPr>
         <p:spPr>
           <a:xfrm>
-            <a:off x="8046720" y="4663440"/>
-            <a:ext cx="4114800" cy="365760"/>
+            <a:off x="6598767" y="2194560"/>
+            <a:ext cx="4678527" cy="457200"/>
           </a:xfrm>
           <a:prstGeom prst="rect">
             <a:avLst/>
@@ -4679,24 +4763,140 @@
           </a:bodyPr>
           <a:lstStyle/>
           <a:p>
-            <a:pPr algn="ctr"/>
-            <a:r>
-              <a:rPr sz="1100" b="0">
-                <a:solidFill>
-                  <a:srgbClr val="6B6258"/>
+            <a:pPr algn="l">
+              <a:lnSpc>
+                <a:spcPct val="145000"/>
+              </a:lnSpc>
+              <a:spcAft>
+                <a:spcPts val="400"/>
+              </a:spcAft>
+            </a:pPr>
+            <a:r>
+              <a:rPr sz="1500" b="1">
+                <a:solidFill>
+                  <a:srgbClr val="C8A86B"/>
+                </a:solidFill>
+                <a:latin typeface="楷体"/>
+                <a:ea typeface="楷体"/>
+                <a:cs typeface="楷体"/>
+              </a:rPr>
+              <a:t>资料来源（WebSearch 核实）</a:t>
+            </a:r>
+          </a:p>
+        </p:txBody>
+      </p:sp>
+      <p:sp>
+        <p:nvSpPr>
+          <p:cNvPr id="9" name="TextBox 8"/>
+          <p:cNvSpPr txBox="1"/>
+          <p:nvPr/>
+        </p:nvSpPr>
+        <p:spPr>
+          <a:xfrm>
+            <a:off x="6598767" y="2697480"/>
+            <a:ext cx="4678527" cy="2743200"/>
+          </a:xfrm>
+          <a:prstGeom prst="rect">
+            <a:avLst/>
+          </a:prstGeom>
+          <a:noFill/>
+        </p:spPr>
+        <p:txBody>
+          <a:bodyPr wrap="square" anchor="t" lIns="0" rIns="0" tIns="0" bIns="0">
+            <a:spAutoFit/>
+          </a:bodyPr>
+          <a:lstStyle/>
+          <a:p>
+            <a:pPr algn="l">
+              <a:lnSpc>
+                <a:spcPct val="140000"/>
+              </a:lnSpc>
+              <a:spcAft>
+                <a:spcPts val="900"/>
+              </a:spcAft>
+            </a:pPr>
+            <a:r>
+              <a:rPr sz="1250" b="0">
+                <a:solidFill>
+                  <a:srgbClr val="FFFFFF"/>
+                </a:solidFill>
+                <a:latin typeface="楷体"/>
+                <a:ea typeface="楷体"/>
+                <a:cs typeface="楷体"/>
+              </a:rPr>
+              <a:t>· 学科网《学写文学短评》教学设计（zxxk.com/soft/55116426）</a:t>
+            </a:r>
+          </a:p>
+          <a:p>
+            <a:pPr algn="l">
+              <a:lnSpc>
+                <a:spcPct val="140000"/>
+              </a:lnSpc>
+              <a:spcAft>
+                <a:spcPts val="900"/>
+              </a:spcAft>
+            </a:pPr>
+            <a:r>
+              <a:rPr sz="1250" b="0">
+                <a:solidFill>
+                  <a:srgbClr val="FFFFFF"/>
+                </a:solidFill>
+                <a:latin typeface="楷体"/>
+                <a:ea typeface="楷体"/>
+                <a:cs typeface="楷体"/>
+              </a:rPr>
+              <a:t>· 朱昌元 张乐《诗意生命的理性表达》（al.xgjy.cn）</a:t>
+            </a:r>
+          </a:p>
+        </p:txBody>
+      </p:sp>
+      <p:sp>
+        <p:nvSpPr>
+          <p:cNvPr id="10" name="TextBox 9"/>
+          <p:cNvSpPr txBox="1"/>
+          <p:nvPr/>
+        </p:nvSpPr>
+        <p:spPr>
+          <a:xfrm>
+            <a:off x="6598767" y="5715000"/>
+            <a:ext cx="4678527" cy="640080"/>
+          </a:xfrm>
+          <a:prstGeom prst="rect">
+            <a:avLst/>
+          </a:prstGeom>
+          <a:noFill/>
+        </p:spPr>
+        <p:txBody>
+          <a:bodyPr wrap="square" anchor="t" lIns="0" rIns="0" tIns="0" bIns="0">
+            <a:spAutoFit/>
+          </a:bodyPr>
+          <a:lstStyle/>
+          <a:p>
+            <a:pPr algn="l">
+              <a:lnSpc>
+                <a:spcPct val="145000"/>
+              </a:lnSpc>
+              <a:spcAft>
+                <a:spcPts val="400"/>
+              </a:spcAft>
+            </a:pPr>
+            <a:r>
+              <a:rPr sz="1200" b="0">
+                <a:solidFill>
+                  <a:srgbClr val="E7DFD2"/>
                 </a:solidFill>
                 <a:latin typeface="微软雅黑"/>
                 <a:ea typeface="微软雅黑"/>
                 <a:cs typeface="微软雅黑"/>
               </a:rPr>
-              <a:t>资料图（自由授权，复用 typewriter.jpg）</a:t>
-            </a:r>
-          </a:p>
-        </p:txBody>
-      </p:sp>
-      <p:sp>
-        <p:nvSpPr>
-          <p:cNvPr id="8" name="TextBox 7"/>
+              <a:t>本课件未使用无关配图 · 学科色块兜底</a:t>
+            </a:r>
+          </a:p>
+        </p:txBody>
+      </p:sp>
+      <p:sp>
+        <p:nvSpPr>
+          <p:cNvPr id="11" name="TextBox 10"/>
           <p:cNvSpPr txBox="1"/>
           <p:nvPr/>
         </p:nvSpPr>
@@ -4829,7 +5029,7 @@
                 <a:ea typeface="微软雅黑"/>
                 <a:cs typeface="微软雅黑"/>
               </a:rPr>
-              <a:t>学习重点</a:t>
+              <a:t>重点</a:t>
             </a:r>
           </a:p>
         </p:txBody>
@@ -4880,14 +5080,58 @@
       </p:sp>
       <p:sp>
         <p:nvSpPr>
-          <p:cNvPr id="5" name="Rounded Rectangle 4"/>
+          <p:cNvPr id="5" name="TextBox 4"/>
+          <p:cNvSpPr txBox="1"/>
+          <p:nvPr/>
+        </p:nvSpPr>
+        <p:spPr>
+          <a:xfrm>
+            <a:off x="640080" y="1325880"/>
+            <a:ext cx="10911535" cy="548640"/>
+          </a:xfrm>
+          <a:prstGeom prst="rect">
+            <a:avLst/>
+          </a:prstGeom>
+          <a:noFill/>
+        </p:spPr>
+        <p:txBody>
+          <a:bodyPr wrap="square" anchor="t" lIns="0" rIns="0" tIns="0" bIns="0">
+            <a:spAutoFit/>
+          </a:bodyPr>
+          <a:lstStyle/>
+          <a:p>
+            <a:pPr algn="l">
+              <a:lnSpc>
+                <a:spcPct val="145000"/>
+              </a:lnSpc>
+              <a:spcAft>
+                <a:spcPts val="400"/>
+              </a:spcAft>
+            </a:pPr>
+            <a:r>
+              <a:rPr sz="2600" b="1">
+                <a:solidFill>
+                  <a:srgbClr val="1C2A33"/>
+                </a:solidFill>
+                <a:latin typeface="楷体"/>
+                <a:ea typeface="楷体"/>
+                <a:cs typeface="楷体"/>
+              </a:rPr>
+              <a:t>本课重点</a:t>
+            </a:r>
+          </a:p>
+        </p:txBody>
+      </p:sp>
+      <p:sp>
+        <p:nvSpPr>
+          <p:cNvPr id="6" name="Rounded Rectangle 5"/>
           <p:cNvSpPr/>
           <p:nvPr/>
         </p:nvSpPr>
         <p:spPr>
           <a:xfrm>
-            <a:off x="640080" y="1371600"/>
-            <a:ext cx="10911535" cy="1170432"/>
+            <a:off x="640080" y="2194560"/>
+            <a:ext cx="2453563" cy="3931920"/>
           </a:xfrm>
           <a:prstGeom prst="roundRect">
             <a:avLst/>
@@ -4895,7 +5139,451 @@
           <a:solidFill>
             <a:srgbClr val="FFFFFF"/>
           </a:solidFill>
-          <a:ln w="22860">
+          <a:ln w="20320">
+            <a:solidFill>
+              <a:srgbClr val="B23A2A"/>
+            </a:solidFill>
+          </a:ln>
+          <a:effectLst/>
+        </p:spPr>
+        <p:style>
+          <a:lnRef idx="1">
+            <a:schemeClr val="accent1"/>
+          </a:lnRef>
+          <a:fillRef idx="3">
+            <a:schemeClr val="accent1"/>
+          </a:fillRef>
+          <a:effectRef idx="2">
+            <a:schemeClr val="accent1"/>
+          </a:effectRef>
+          <a:fontRef idx="minor">
+            <a:schemeClr val="lt1"/>
+          </a:fontRef>
+        </p:style>
+        <p:txBody>
+          <a:bodyPr rtlCol="0" anchor="ctr"/>
+          <a:lstStyle/>
+          <a:p>
+            <a:pPr algn="ctr"/>
+          </a:p>
+        </p:txBody>
+      </p:sp>
+      <p:sp>
+        <p:nvSpPr>
+          <p:cNvPr id="7" name="Oval 6"/>
+          <p:cNvSpPr/>
+          <p:nvPr/>
+        </p:nvSpPr>
+        <p:spPr>
+          <a:xfrm>
+            <a:off x="822960" y="2377440"/>
+            <a:ext cx="502920" cy="502920"/>
+          </a:xfrm>
+          <a:prstGeom prst="ellipse">
+            <a:avLst/>
+          </a:prstGeom>
+          <a:solidFill>
+            <a:srgbClr val="B23A2A"/>
+          </a:solidFill>
+          <a:ln>
+            <a:noFill/>
+          </a:ln>
+          <a:effectLst/>
+        </p:spPr>
+        <p:style>
+          <a:lnRef idx="1">
+            <a:schemeClr val="accent1"/>
+          </a:lnRef>
+          <a:fillRef idx="3">
+            <a:schemeClr val="accent1"/>
+          </a:fillRef>
+          <a:effectRef idx="2">
+            <a:schemeClr val="accent1"/>
+          </a:effectRef>
+          <a:fontRef idx="minor">
+            <a:schemeClr val="lt1"/>
+          </a:fontRef>
+        </p:style>
+        <p:txBody>
+          <a:bodyPr rtlCol="0" anchor="ctr"/>
+          <a:lstStyle/>
+          <a:p>
+            <a:pPr algn="ctr"/>
+          </a:p>
+        </p:txBody>
+      </p:sp>
+      <p:sp>
+        <p:nvSpPr>
+          <p:cNvPr id="8" name="TextBox 7"/>
+          <p:cNvSpPr txBox="1"/>
+          <p:nvPr/>
+        </p:nvSpPr>
+        <p:spPr>
+          <a:xfrm>
+            <a:off x="822960" y="2450592"/>
+            <a:ext cx="502920" cy="384048"/>
+          </a:xfrm>
+          <a:prstGeom prst="rect">
+            <a:avLst/>
+          </a:prstGeom>
+          <a:noFill/>
+        </p:spPr>
+        <p:txBody>
+          <a:bodyPr wrap="square" anchor="t" lIns="0" rIns="0" tIns="0" bIns="0">
+            <a:spAutoFit/>
+          </a:bodyPr>
+          <a:lstStyle/>
+          <a:p>
+            <a:pPr algn="ctr">
+              <a:lnSpc>
+                <a:spcPct val="145000"/>
+              </a:lnSpc>
+              <a:spcAft>
+                <a:spcPts val="400"/>
+              </a:spcAft>
+            </a:pPr>
+            <a:r>
+              <a:rPr sz="1800" b="1">
+                <a:solidFill>
+                  <a:srgbClr val="FFFFFF"/>
+                </a:solidFill>
+                <a:latin typeface="微软雅黑"/>
+                <a:ea typeface="微软雅黑"/>
+                <a:cs typeface="微软雅黑"/>
+              </a:rPr>
+              <a:t>①</a:t>
+            </a:r>
+          </a:p>
+        </p:txBody>
+      </p:sp>
+      <p:sp>
+        <p:nvSpPr>
+          <p:cNvPr id="9" name="TextBox 8"/>
+          <p:cNvSpPr txBox="1"/>
+          <p:nvPr/>
+        </p:nvSpPr>
+        <p:spPr>
+          <a:xfrm>
+            <a:off x="1508760" y="2395728"/>
+            <a:ext cx="1356283" cy="822960"/>
+          </a:xfrm>
+          <a:prstGeom prst="rect">
+            <a:avLst/>
+          </a:prstGeom>
+          <a:noFill/>
+        </p:spPr>
+        <p:txBody>
+          <a:bodyPr wrap="square" anchor="t" lIns="0" rIns="0" tIns="0" bIns="0">
+            <a:spAutoFit/>
+          </a:bodyPr>
+          <a:lstStyle/>
+          <a:p>
+            <a:pPr algn="l">
+              <a:lnSpc>
+                <a:spcPct val="130000"/>
+              </a:lnSpc>
+              <a:spcAft>
+                <a:spcPts val="400"/>
+              </a:spcAft>
+            </a:pPr>
+            <a:r>
+              <a:rPr sz="1500" b="1">
+                <a:solidFill>
+                  <a:srgbClr val="B23A2A"/>
+                </a:solidFill>
+                <a:latin typeface="微软雅黑"/>
+                <a:ea typeface="微软雅黑"/>
+                <a:cs typeface="微软雅黑"/>
+              </a:rPr>
+              <a:t>选点</a:t>
+            </a:r>
+          </a:p>
+        </p:txBody>
+      </p:sp>
+      <p:sp>
+        <p:nvSpPr>
+          <p:cNvPr id="10" name="TextBox 9"/>
+          <p:cNvSpPr txBox="1"/>
+          <p:nvPr/>
+        </p:nvSpPr>
+        <p:spPr>
+          <a:xfrm>
+            <a:off x="868680" y="3154680"/>
+            <a:ext cx="1996363" cy="2788920"/>
+          </a:xfrm>
+          <a:prstGeom prst="rect">
+            <a:avLst/>
+          </a:prstGeom>
+          <a:noFill/>
+        </p:spPr>
+        <p:txBody>
+          <a:bodyPr wrap="square" anchor="t" lIns="0" rIns="0" tIns="0" bIns="0">
+            <a:spAutoFit/>
+          </a:bodyPr>
+          <a:lstStyle/>
+          <a:p>
+            <a:pPr algn="l">
+              <a:lnSpc>
+                <a:spcPct val="145000"/>
+              </a:lnSpc>
+              <a:spcAft>
+                <a:spcPts val="400"/>
+              </a:spcAft>
+            </a:pPr>
+            <a:r>
+              <a:rPr sz="1300" b="0">
+                <a:solidFill>
+                  <a:srgbClr val="1C2A33"/>
+                </a:solidFill>
+                <a:latin typeface="楷体"/>
+                <a:ea typeface="楷体"/>
+                <a:cs typeface="楷体"/>
+              </a:rPr>
+              <a:t>不选「全诗」而选一个聚焦的「点」（如「击」字炼字／七组叠字／人生如梦）。</a:t>
+            </a:r>
+          </a:p>
+        </p:txBody>
+      </p:sp>
+      <p:sp>
+        <p:nvSpPr>
+          <p:cNvPr id="11" name="Rounded Rectangle 10"/>
+          <p:cNvSpPr/>
+          <p:nvPr/>
+        </p:nvSpPr>
+        <p:spPr>
+          <a:xfrm>
+            <a:off x="3459403" y="2194560"/>
+            <a:ext cx="2453563" cy="3931920"/>
+          </a:xfrm>
+          <a:prstGeom prst="roundRect">
+            <a:avLst/>
+          </a:prstGeom>
+          <a:solidFill>
+            <a:srgbClr val="FFFFFF"/>
+          </a:solidFill>
+          <a:ln w="20320">
+            <a:solidFill>
+              <a:srgbClr val="2E7D6B"/>
+            </a:solidFill>
+          </a:ln>
+          <a:effectLst/>
+        </p:spPr>
+        <p:style>
+          <a:lnRef idx="1">
+            <a:schemeClr val="accent1"/>
+          </a:lnRef>
+          <a:fillRef idx="3">
+            <a:schemeClr val="accent1"/>
+          </a:fillRef>
+          <a:effectRef idx="2">
+            <a:schemeClr val="accent1"/>
+          </a:effectRef>
+          <a:fontRef idx="minor">
+            <a:schemeClr val="lt1"/>
+          </a:fontRef>
+        </p:style>
+        <p:txBody>
+          <a:bodyPr rtlCol="0" anchor="ctr"/>
+          <a:lstStyle/>
+          <a:p>
+            <a:pPr algn="ctr"/>
+          </a:p>
+        </p:txBody>
+      </p:sp>
+      <p:sp>
+        <p:nvSpPr>
+          <p:cNvPr id="12" name="Oval 11"/>
+          <p:cNvSpPr/>
+          <p:nvPr/>
+        </p:nvSpPr>
+        <p:spPr>
+          <a:xfrm>
+            <a:off x="3642283" y="2377440"/>
+            <a:ext cx="502920" cy="502920"/>
+          </a:xfrm>
+          <a:prstGeom prst="ellipse">
+            <a:avLst/>
+          </a:prstGeom>
+          <a:solidFill>
+            <a:srgbClr val="2E7D6B"/>
+          </a:solidFill>
+          <a:ln>
+            <a:noFill/>
+          </a:ln>
+          <a:effectLst/>
+        </p:spPr>
+        <p:style>
+          <a:lnRef idx="1">
+            <a:schemeClr val="accent1"/>
+          </a:lnRef>
+          <a:fillRef idx="3">
+            <a:schemeClr val="accent1"/>
+          </a:fillRef>
+          <a:effectRef idx="2">
+            <a:schemeClr val="accent1"/>
+          </a:effectRef>
+          <a:fontRef idx="minor">
+            <a:schemeClr val="lt1"/>
+          </a:fontRef>
+        </p:style>
+        <p:txBody>
+          <a:bodyPr rtlCol="0" anchor="ctr"/>
+          <a:lstStyle/>
+          <a:p>
+            <a:pPr algn="ctr"/>
+          </a:p>
+        </p:txBody>
+      </p:sp>
+      <p:sp>
+        <p:nvSpPr>
+          <p:cNvPr id="13" name="TextBox 12"/>
+          <p:cNvSpPr txBox="1"/>
+          <p:nvPr/>
+        </p:nvSpPr>
+        <p:spPr>
+          <a:xfrm>
+            <a:off x="3642283" y="2450592"/>
+            <a:ext cx="502920" cy="384048"/>
+          </a:xfrm>
+          <a:prstGeom prst="rect">
+            <a:avLst/>
+          </a:prstGeom>
+          <a:noFill/>
+        </p:spPr>
+        <p:txBody>
+          <a:bodyPr wrap="square" anchor="t" lIns="0" rIns="0" tIns="0" bIns="0">
+            <a:spAutoFit/>
+          </a:bodyPr>
+          <a:lstStyle/>
+          <a:p>
+            <a:pPr algn="ctr">
+              <a:lnSpc>
+                <a:spcPct val="145000"/>
+              </a:lnSpc>
+              <a:spcAft>
+                <a:spcPts val="400"/>
+              </a:spcAft>
+            </a:pPr>
+            <a:r>
+              <a:rPr sz="1800" b="1">
+                <a:solidFill>
+                  <a:srgbClr val="FFFFFF"/>
+                </a:solidFill>
+                <a:latin typeface="微软雅黑"/>
+                <a:ea typeface="微软雅黑"/>
+                <a:cs typeface="微软雅黑"/>
+              </a:rPr>
+              <a:t>②</a:t>
+            </a:r>
+          </a:p>
+        </p:txBody>
+      </p:sp>
+      <p:sp>
+        <p:nvSpPr>
+          <p:cNvPr id="14" name="TextBox 13"/>
+          <p:cNvSpPr txBox="1"/>
+          <p:nvPr/>
+        </p:nvSpPr>
+        <p:spPr>
+          <a:xfrm>
+            <a:off x="4328083" y="2395728"/>
+            <a:ext cx="1356283" cy="822960"/>
+          </a:xfrm>
+          <a:prstGeom prst="rect">
+            <a:avLst/>
+          </a:prstGeom>
+          <a:noFill/>
+        </p:spPr>
+        <p:txBody>
+          <a:bodyPr wrap="square" anchor="t" lIns="0" rIns="0" tIns="0" bIns="0">
+            <a:spAutoFit/>
+          </a:bodyPr>
+          <a:lstStyle/>
+          <a:p>
+            <a:pPr algn="l">
+              <a:lnSpc>
+                <a:spcPct val="130000"/>
+              </a:lnSpc>
+              <a:spcAft>
+                <a:spcPts val="400"/>
+              </a:spcAft>
+            </a:pPr>
+            <a:r>
+              <a:rPr sz="1500" b="1">
+                <a:solidFill>
+                  <a:srgbClr val="2E7D6B"/>
+                </a:solidFill>
+                <a:latin typeface="微软雅黑"/>
+                <a:ea typeface="微软雅黑"/>
+                <a:cs typeface="微软雅黑"/>
+              </a:rPr>
+              <a:t>引文</a:t>
+            </a:r>
+          </a:p>
+        </p:txBody>
+      </p:sp>
+      <p:sp>
+        <p:nvSpPr>
+          <p:cNvPr id="15" name="TextBox 14"/>
+          <p:cNvSpPr txBox="1"/>
+          <p:nvPr/>
+        </p:nvSpPr>
+        <p:spPr>
+          <a:xfrm>
+            <a:off x="3688003" y="3154680"/>
+            <a:ext cx="1996363" cy="2788920"/>
+          </a:xfrm>
+          <a:prstGeom prst="rect">
+            <a:avLst/>
+          </a:prstGeom>
+          <a:noFill/>
+        </p:spPr>
+        <p:txBody>
+          <a:bodyPr wrap="square" anchor="t" lIns="0" rIns="0" tIns="0" bIns="0">
+            <a:spAutoFit/>
+          </a:bodyPr>
+          <a:lstStyle/>
+          <a:p>
+            <a:pPr algn="l">
+              <a:lnSpc>
+                <a:spcPct val="145000"/>
+              </a:lnSpc>
+              <a:spcAft>
+                <a:spcPts val="400"/>
+              </a:spcAft>
+            </a:pPr>
+            <a:r>
+              <a:rPr sz="1300" b="0">
+                <a:solidFill>
+                  <a:srgbClr val="1C2A33"/>
+                </a:solidFill>
+                <a:latin typeface="楷体"/>
+                <a:ea typeface="楷体"/>
+                <a:cs typeface="楷体"/>
+              </a:rPr>
+              <a:t>摘引原句并标明出处，作为论据。</a:t>
+            </a:r>
+          </a:p>
+        </p:txBody>
+      </p:sp>
+      <p:sp>
+        <p:nvSpPr>
+          <p:cNvPr id="16" name="Rounded Rectangle 15"/>
+          <p:cNvSpPr/>
+          <p:nvPr/>
+        </p:nvSpPr>
+        <p:spPr>
+          <a:xfrm>
+            <a:off x="6278727" y="2194560"/>
+            <a:ext cx="2453563" cy="3931920"/>
+          </a:xfrm>
+          <a:prstGeom prst="roundRect">
+            <a:avLst/>
+          </a:prstGeom>
+          <a:solidFill>
+            <a:srgbClr val="FFFFFF"/>
+          </a:solidFill>
+          <a:ln w="20320">
             <a:solidFill>
               <a:srgbClr val="C8A86B"/>
             </a:solidFill>
@@ -4926,107 +5614,23 @@
       </p:sp>
       <p:sp>
         <p:nvSpPr>
-          <p:cNvPr id="6" name="TextBox 5"/>
-          <p:cNvSpPr txBox="1"/>
-          <p:nvPr/>
-        </p:nvSpPr>
-        <p:spPr>
-          <a:xfrm>
-            <a:off x="1371600" y="1481328"/>
-            <a:ext cx="9997135" cy="457200"/>
-          </a:xfrm>
-          <a:prstGeom prst="rect">
-            <a:avLst/>
-          </a:prstGeom>
-          <a:noFill/>
-        </p:spPr>
-        <p:txBody>
-          <a:bodyPr wrap="square" anchor="t" lIns="0" rIns="0" tIns="0" bIns="0">
-            <a:spAutoFit/>
-          </a:bodyPr>
-          <a:lstStyle/>
-          <a:p>
-            <a:pPr algn="l">
-              <a:lnSpc>
-                <a:spcPct val="110000"/>
-              </a:lnSpc>
-            </a:pPr>
-            <a:r>
-              <a:rPr sz="1600" b="1">
-                <a:solidFill>
-                  <a:srgbClr val="1C2A33"/>
-                </a:solidFill>
-                <a:latin typeface="微软雅黑"/>
-                <a:ea typeface="微软雅黑"/>
-                <a:cs typeface="微软雅黑"/>
-              </a:rPr>
-              <a:t/>
-            </a:r>
-          </a:p>
-        </p:txBody>
-      </p:sp>
-      <p:sp>
-        <p:nvSpPr>
-          <p:cNvPr id="7" name="TextBox 6"/>
-          <p:cNvSpPr txBox="1"/>
-          <p:nvPr/>
-        </p:nvSpPr>
-        <p:spPr>
-          <a:xfrm>
-            <a:off x="1371600" y="1920240"/>
-            <a:ext cx="9997135" cy="530352"/>
-          </a:xfrm>
-          <a:prstGeom prst="rect">
-            <a:avLst/>
-          </a:prstGeom>
-          <a:noFill/>
-        </p:spPr>
-        <p:txBody>
-          <a:bodyPr wrap="square" anchor="t" lIns="0" rIns="0" tIns="0" bIns="0">
-            <a:spAutoFit/>
-          </a:bodyPr>
-          <a:lstStyle/>
-          <a:p>
-            <a:pPr algn="l">
-              <a:lnSpc>
-                <a:spcPct val="128000"/>
-              </a:lnSpc>
-            </a:pPr>
-            <a:r>
-              <a:rPr sz="1200" b="0">
-                <a:solidFill>
-                  <a:srgbClr val="1C2A33"/>
-                </a:solidFill>
-                <a:latin typeface="楷体"/>
-                <a:ea typeface="楷体"/>
-                <a:cs typeface="楷体"/>
-              </a:rPr>
-              <a:t>① 选点：不选「全诗」而选一个聚焦的「点」（如「击」字炼字／七组叠字／人生如梦）。</a:t>
-            </a:r>
-          </a:p>
-        </p:txBody>
-      </p:sp>
-      <p:sp>
-        <p:nvSpPr>
-          <p:cNvPr id="8" name="Rounded Rectangle 7"/>
+          <p:cNvPr id="17" name="Oval 16"/>
           <p:cNvSpPr/>
           <p:nvPr/>
         </p:nvSpPr>
         <p:spPr>
           <a:xfrm>
-            <a:off x="640080" y="2651760"/>
-            <a:ext cx="10911535" cy="1170432"/>
-          </a:xfrm>
-          <a:prstGeom prst="roundRect">
+            <a:off x="6461607" y="2377440"/>
+            <a:ext cx="502920" cy="502920"/>
+          </a:xfrm>
+          <a:prstGeom prst="ellipse">
             <a:avLst/>
           </a:prstGeom>
           <a:solidFill>
-            <a:srgbClr val="FFFFFF"/>
+            <a:srgbClr val="C8A86B"/>
           </a:solidFill>
-          <a:ln w="22860">
-            <a:solidFill>
-              <a:srgbClr val="C8A86B"/>
-            </a:solidFill>
+          <a:ln>
+            <a:noFill/>
           </a:ln>
           <a:effectLst/>
         </p:spPr>
@@ -5054,14 +5658,14 @@
       </p:sp>
       <p:sp>
         <p:nvSpPr>
-          <p:cNvPr id="9" name="TextBox 8"/>
+          <p:cNvPr id="18" name="TextBox 17"/>
           <p:cNvSpPr txBox="1"/>
           <p:nvPr/>
         </p:nvSpPr>
         <p:spPr>
           <a:xfrm>
-            <a:off x="1371600" y="2761488"/>
-            <a:ext cx="9997135" cy="457200"/>
+            <a:off x="6461607" y="2450592"/>
+            <a:ext cx="502920" cy="384048"/>
           </a:xfrm>
           <a:prstGeom prst="rect">
             <a:avLst/>
@@ -5074,35 +5678,38 @@
           </a:bodyPr>
           <a:lstStyle/>
           <a:p>
-            <a:pPr algn="l">
+            <a:pPr algn="ctr">
               <a:lnSpc>
-                <a:spcPct val="110000"/>
+                <a:spcPct val="145000"/>
               </a:lnSpc>
+              <a:spcAft>
+                <a:spcPts val="400"/>
+              </a:spcAft>
             </a:pPr>
             <a:r>
-              <a:rPr sz="1600" b="1">
-                <a:solidFill>
-                  <a:srgbClr val="1C2A33"/>
+              <a:rPr sz="1800" b="1">
+                <a:solidFill>
+                  <a:srgbClr val="FFFFFF"/>
                 </a:solidFill>
                 <a:latin typeface="微软雅黑"/>
                 <a:ea typeface="微软雅黑"/>
                 <a:cs typeface="微软雅黑"/>
               </a:rPr>
-              <a:t/>
-            </a:r>
-          </a:p>
-        </p:txBody>
-      </p:sp>
-      <p:sp>
-        <p:nvSpPr>
-          <p:cNvPr id="10" name="TextBox 9"/>
+              <a:t>③</a:t>
+            </a:r>
+          </a:p>
+        </p:txBody>
+      </p:sp>
+      <p:sp>
+        <p:nvSpPr>
+          <p:cNvPr id="19" name="TextBox 18"/>
           <p:cNvSpPr txBox="1"/>
           <p:nvPr/>
         </p:nvSpPr>
         <p:spPr>
           <a:xfrm>
-            <a:off x="1371600" y="3200400"/>
-            <a:ext cx="9997135" cy="530352"/>
+            <a:off x="7147407" y="2395728"/>
+            <a:ext cx="1356283" cy="822960"/>
           </a:xfrm>
           <a:prstGeom prst="rect">
             <a:avLst/>
@@ -5117,8 +5724,55 @@
           <a:p>
             <a:pPr algn="l">
               <a:lnSpc>
-                <a:spcPct val="128000"/>
+                <a:spcPct val="130000"/>
               </a:lnSpc>
+              <a:spcAft>
+                <a:spcPts val="400"/>
+              </a:spcAft>
+            </a:pPr>
+            <a:r>
+              <a:rPr sz="1500" b="1">
+                <a:solidFill>
+                  <a:srgbClr val="C8A86B"/>
+                </a:solidFill>
+                <a:latin typeface="微软雅黑"/>
+                <a:ea typeface="微软雅黑"/>
+                <a:cs typeface="微软雅黑"/>
+              </a:rPr>
+              <a:t>分析</a:t>
+            </a:r>
+          </a:p>
+        </p:txBody>
+      </p:sp>
+      <p:sp>
+        <p:nvSpPr>
+          <p:cNvPr id="20" name="TextBox 19"/>
+          <p:cNvSpPr txBox="1"/>
+          <p:nvPr/>
+        </p:nvSpPr>
+        <p:spPr>
+          <a:xfrm>
+            <a:off x="6507327" y="3154680"/>
+            <a:ext cx="1996363" cy="2788920"/>
+          </a:xfrm>
+          <a:prstGeom prst="rect">
+            <a:avLst/>
+          </a:prstGeom>
+          <a:noFill/>
+        </p:spPr>
+        <p:txBody>
+          <a:bodyPr wrap="square" anchor="t" lIns="0" rIns="0" tIns="0" bIns="0">
+            <a:spAutoFit/>
+          </a:bodyPr>
+          <a:lstStyle/>
+          <a:p>
+            <a:pPr algn="l">
+              <a:lnSpc>
+                <a:spcPct val="145000"/>
+              </a:lnSpc>
+              <a:spcAft>
+                <a:spcPts val="400"/>
+              </a:spcAft>
             </a:pPr>
             <a:r>
               <a:rPr sz="1300" b="0">
@@ -5129,21 +5783,21 @@
                 <a:ea typeface="楷体"/>
                 <a:cs typeface="楷体"/>
               </a:rPr>
-              <a:t>② 引文：摘引原句并标明出处，作为论据。</a:t>
-            </a:r>
-          </a:p>
-        </p:txBody>
-      </p:sp>
-      <p:sp>
-        <p:nvSpPr>
-          <p:cNvPr id="11" name="Rounded Rectangle 10"/>
+              <a:t>说明「好在哪里、为什么好」，结合语境不空泛。</a:t>
+            </a:r>
+          </a:p>
+        </p:txBody>
+      </p:sp>
+      <p:sp>
+        <p:nvSpPr>
+          <p:cNvPr id="21" name="Rounded Rectangle 20"/>
           <p:cNvSpPr/>
           <p:nvPr/>
         </p:nvSpPr>
         <p:spPr>
           <a:xfrm>
-            <a:off x="640080" y="3931920"/>
-            <a:ext cx="10911535" cy="1170432"/>
+            <a:off x="9098051" y="2194560"/>
+            <a:ext cx="2453563" cy="3931920"/>
           </a:xfrm>
           <a:prstGeom prst="roundRect">
             <a:avLst/>
@@ -5151,9 +5805,9 @@
           <a:solidFill>
             <a:srgbClr val="FFFFFF"/>
           </a:solidFill>
-          <a:ln w="22860">
+          <a:ln w="20320">
             <a:solidFill>
-              <a:srgbClr val="C8A86B"/>
+              <a:srgbClr val="6B6258"/>
             </a:solidFill>
           </a:ln>
           <a:effectLst/>
@@ -5182,107 +5836,23 @@
       </p:sp>
       <p:sp>
         <p:nvSpPr>
-          <p:cNvPr id="12" name="TextBox 11"/>
-          <p:cNvSpPr txBox="1"/>
-          <p:nvPr/>
-        </p:nvSpPr>
-        <p:spPr>
-          <a:xfrm>
-            <a:off x="1371600" y="4041648"/>
-            <a:ext cx="9997135" cy="457200"/>
-          </a:xfrm>
-          <a:prstGeom prst="rect">
-            <a:avLst/>
-          </a:prstGeom>
-          <a:noFill/>
-        </p:spPr>
-        <p:txBody>
-          <a:bodyPr wrap="square" anchor="t" lIns="0" rIns="0" tIns="0" bIns="0">
-            <a:spAutoFit/>
-          </a:bodyPr>
-          <a:lstStyle/>
-          <a:p>
-            <a:pPr algn="l">
-              <a:lnSpc>
-                <a:spcPct val="110000"/>
-              </a:lnSpc>
-            </a:pPr>
-            <a:r>
-              <a:rPr sz="1600" b="1">
-                <a:solidFill>
-                  <a:srgbClr val="1C2A33"/>
-                </a:solidFill>
-                <a:latin typeface="微软雅黑"/>
-                <a:ea typeface="微软雅黑"/>
-                <a:cs typeface="微软雅黑"/>
-              </a:rPr>
-              <a:t/>
-            </a:r>
-          </a:p>
-        </p:txBody>
-      </p:sp>
-      <p:sp>
-        <p:nvSpPr>
-          <p:cNvPr id="13" name="TextBox 12"/>
-          <p:cNvSpPr txBox="1"/>
-          <p:nvPr/>
-        </p:nvSpPr>
-        <p:spPr>
-          <a:xfrm>
-            <a:off x="1371600" y="4480560"/>
-            <a:ext cx="9997135" cy="530352"/>
-          </a:xfrm>
-          <a:prstGeom prst="rect">
-            <a:avLst/>
-          </a:prstGeom>
-          <a:noFill/>
-        </p:spPr>
-        <p:txBody>
-          <a:bodyPr wrap="square" anchor="t" lIns="0" rIns="0" tIns="0" bIns="0">
-            <a:spAutoFit/>
-          </a:bodyPr>
-          <a:lstStyle/>
-          <a:p>
-            <a:pPr algn="l">
-              <a:lnSpc>
-                <a:spcPct val="128000"/>
-              </a:lnSpc>
-            </a:pPr>
-            <a:r>
-              <a:rPr sz="1300" b="0">
-                <a:solidFill>
-                  <a:srgbClr val="1C2A33"/>
-                </a:solidFill>
-                <a:latin typeface="楷体"/>
-                <a:ea typeface="楷体"/>
-                <a:cs typeface="楷体"/>
-              </a:rPr>
-              <a:t>③ 分析：说明「好在哪里、为什么好」，结合语境不空泛。</a:t>
-            </a:r>
-          </a:p>
-        </p:txBody>
-      </p:sp>
-      <p:sp>
-        <p:nvSpPr>
-          <p:cNvPr id="14" name="Rounded Rectangle 13"/>
+          <p:cNvPr id="22" name="Oval 21"/>
           <p:cNvSpPr/>
           <p:nvPr/>
         </p:nvSpPr>
         <p:spPr>
           <a:xfrm>
-            <a:off x="640080" y="5212080"/>
-            <a:ext cx="10911535" cy="1170432"/>
-          </a:xfrm>
-          <a:prstGeom prst="roundRect">
+            <a:off x="9280931" y="2377440"/>
+            <a:ext cx="502920" cy="502920"/>
+          </a:xfrm>
+          <a:prstGeom prst="ellipse">
             <a:avLst/>
           </a:prstGeom>
           <a:solidFill>
-            <a:srgbClr val="FFFFFF"/>
+            <a:srgbClr val="6B6258"/>
           </a:solidFill>
-          <a:ln w="22860">
-            <a:solidFill>
-              <a:srgbClr val="C8A86B"/>
-            </a:solidFill>
+          <a:ln>
+            <a:noFill/>
           </a:ln>
           <a:effectLst/>
         </p:spPr>
@@ -5310,14 +5880,14 @@
       </p:sp>
       <p:sp>
         <p:nvSpPr>
-          <p:cNvPr id="15" name="TextBox 14"/>
+          <p:cNvPr id="23" name="TextBox 22"/>
           <p:cNvSpPr txBox="1"/>
           <p:nvPr/>
         </p:nvSpPr>
         <p:spPr>
           <a:xfrm>
-            <a:off x="1371600" y="5321808"/>
-            <a:ext cx="9997135" cy="457200"/>
+            <a:off x="9280931" y="2450592"/>
+            <a:ext cx="502920" cy="384048"/>
           </a:xfrm>
           <a:prstGeom prst="rect">
             <a:avLst/>
@@ -5330,35 +5900,38 @@
           </a:bodyPr>
           <a:lstStyle/>
           <a:p>
-            <a:pPr algn="l">
+            <a:pPr algn="ctr">
               <a:lnSpc>
-                <a:spcPct val="110000"/>
+                <a:spcPct val="145000"/>
               </a:lnSpc>
+              <a:spcAft>
+                <a:spcPts val="400"/>
+              </a:spcAft>
             </a:pPr>
             <a:r>
-              <a:rPr sz="1600" b="1">
-                <a:solidFill>
-                  <a:srgbClr val="1C2A33"/>
+              <a:rPr sz="1800" b="1">
+                <a:solidFill>
+                  <a:srgbClr val="FFFFFF"/>
                 </a:solidFill>
                 <a:latin typeface="微软雅黑"/>
                 <a:ea typeface="微软雅黑"/>
                 <a:cs typeface="微软雅黑"/>
               </a:rPr>
-              <a:t/>
-            </a:r>
-          </a:p>
-        </p:txBody>
-      </p:sp>
-      <p:sp>
-        <p:nvSpPr>
-          <p:cNvPr id="16" name="TextBox 15"/>
+              <a:t>④</a:t>
+            </a:r>
+          </a:p>
+        </p:txBody>
+      </p:sp>
+      <p:sp>
+        <p:nvSpPr>
+          <p:cNvPr id="24" name="TextBox 23"/>
           <p:cNvSpPr txBox="1"/>
           <p:nvPr/>
         </p:nvSpPr>
         <p:spPr>
           <a:xfrm>
-            <a:off x="1371600" y="5760720"/>
-            <a:ext cx="9997135" cy="530352"/>
+            <a:off x="9966731" y="2395728"/>
+            <a:ext cx="1356283" cy="822960"/>
           </a:xfrm>
           <a:prstGeom prst="rect">
             <a:avLst/>
@@ -5373,8 +5946,55 @@
           <a:p>
             <a:pPr algn="l">
               <a:lnSpc>
-                <a:spcPct val="128000"/>
+                <a:spcPct val="130000"/>
               </a:lnSpc>
+              <a:spcAft>
+                <a:spcPts val="400"/>
+              </a:spcAft>
+            </a:pPr>
+            <a:r>
+              <a:rPr sz="1500" b="1">
+                <a:solidFill>
+                  <a:srgbClr val="6B6258"/>
+                </a:solidFill>
+                <a:latin typeface="微软雅黑"/>
+                <a:ea typeface="微软雅黑"/>
+                <a:cs typeface="微软雅黑"/>
+              </a:rPr>
+              <a:t>提升</a:t>
+            </a:r>
+          </a:p>
+        </p:txBody>
+      </p:sp>
+      <p:sp>
+        <p:nvSpPr>
+          <p:cNvPr id="25" name="TextBox 24"/>
+          <p:cNvSpPr txBox="1"/>
+          <p:nvPr/>
+        </p:nvSpPr>
+        <p:spPr>
+          <a:xfrm>
+            <a:off x="9326651" y="3154680"/>
+            <a:ext cx="1996363" cy="2788920"/>
+          </a:xfrm>
+          <a:prstGeom prst="rect">
+            <a:avLst/>
+          </a:prstGeom>
+          <a:noFill/>
+        </p:spPr>
+        <p:txBody>
+          <a:bodyPr wrap="square" anchor="t" lIns="0" rIns="0" tIns="0" bIns="0">
+            <a:spAutoFit/>
+          </a:bodyPr>
+          <a:lstStyle/>
+          <a:p>
+            <a:pPr algn="l">
+              <a:lnSpc>
+                <a:spcPct val="145000"/>
+              </a:lnSpc>
+              <a:spcAft>
+                <a:spcPts val="400"/>
+              </a:spcAft>
             </a:pPr>
             <a:r>
               <a:rPr sz="1300" b="0">
@@ -5385,14 +6005,14 @@
                 <a:ea typeface="楷体"/>
                 <a:cs typeface="楷体"/>
               </a:rPr>
-              <a:t>④ 提升：由点及面，点出该点反映的诗人风格或普遍意义。</a:t>
-            </a:r>
-          </a:p>
-        </p:txBody>
-      </p:sp>
-      <p:sp>
-        <p:nvSpPr>
-          <p:cNvPr id="17" name="TextBox 16"/>
+              <a:t>由点及面，点出该点反映的诗人风格或普遍意义。</a:t>
+            </a:r>
+          </a:p>
+        </p:txBody>
+      </p:sp>
+      <p:sp>
+        <p:nvSpPr>
+          <p:cNvPr id="26" name="TextBox 25"/>
           <p:cNvSpPr txBox="1"/>
           <p:nvPr/>
         </p:nvSpPr>
@@ -5519,13 +6139,13 @@
             <a:r>
               <a:rPr sz="1300" b="1">
                 <a:solidFill>
-                  <a:srgbClr val="2E7D6B"/>
+                  <a:srgbClr val="B23A2A"/>
                 </a:solidFill>
                 <a:latin typeface="微软雅黑"/>
                 <a:ea typeface="微软雅黑"/>
                 <a:cs typeface="微软雅黑"/>
               </a:rPr>
-              <a:t>学习路径</a:t>
+              <a:t>方法</a:t>
             </a:r>
           </a:p>
         </p:txBody>
@@ -5542,6 +6162,362 @@
             <a:ext cx="822960" cy="30480"/>
           </a:xfrm>
           <a:prstGeom prst="rect">
+            <a:avLst/>
+          </a:prstGeom>
+          <a:solidFill>
+            <a:srgbClr val="B23A2A"/>
+          </a:solidFill>
+          <a:ln>
+            <a:noFill/>
+          </a:ln>
+          <a:effectLst/>
+        </p:spPr>
+        <p:style>
+          <a:lnRef idx="1">
+            <a:schemeClr val="accent1"/>
+          </a:lnRef>
+          <a:fillRef idx="3">
+            <a:schemeClr val="accent1"/>
+          </a:fillRef>
+          <a:effectRef idx="2">
+            <a:schemeClr val="accent1"/>
+          </a:effectRef>
+          <a:fontRef idx="minor">
+            <a:schemeClr val="lt1"/>
+          </a:fontRef>
+        </p:style>
+        <p:txBody>
+          <a:bodyPr rtlCol="0" anchor="ctr"/>
+          <a:lstStyle/>
+          <a:p>
+            <a:pPr algn="ctr"/>
+          </a:p>
+        </p:txBody>
+      </p:sp>
+      <p:sp>
+        <p:nvSpPr>
+          <p:cNvPr id="5" name="TextBox 4"/>
+          <p:cNvSpPr txBox="1"/>
+          <p:nvPr/>
+        </p:nvSpPr>
+        <p:spPr>
+          <a:xfrm>
+            <a:off x="640080" y="1325880"/>
+            <a:ext cx="10911535" cy="548640"/>
+          </a:xfrm>
+          <a:prstGeom prst="rect">
+            <a:avLst/>
+          </a:prstGeom>
+          <a:noFill/>
+        </p:spPr>
+        <p:txBody>
+          <a:bodyPr wrap="square" anchor="t" lIns="0" rIns="0" tIns="0" bIns="0">
+            <a:spAutoFit/>
+          </a:bodyPr>
+          <a:lstStyle/>
+          <a:p>
+            <a:pPr algn="l">
+              <a:lnSpc>
+                <a:spcPct val="145000"/>
+              </a:lnSpc>
+              <a:spcAft>
+                <a:spcPts val="400"/>
+              </a:spcAft>
+            </a:pPr>
+            <a:r>
+              <a:rPr sz="2600" b="1">
+                <a:solidFill>
+                  <a:srgbClr val="1C2A33"/>
+                </a:solidFill>
+                <a:latin typeface="楷体"/>
+                <a:ea typeface="楷体"/>
+                <a:cs typeface="楷体"/>
+              </a:rPr>
+              <a:t>学习路径 · 方法</a:t>
+            </a:r>
+          </a:p>
+        </p:txBody>
+      </p:sp>
+      <p:sp>
+        <p:nvSpPr>
+          <p:cNvPr id="6" name="Rounded Rectangle 5"/>
+          <p:cNvSpPr/>
+          <p:nvPr/>
+        </p:nvSpPr>
+        <p:spPr>
+          <a:xfrm>
+            <a:off x="640080" y="2194560"/>
+            <a:ext cx="2453563" cy="3931920"/>
+          </a:xfrm>
+          <a:prstGeom prst="roundRect">
+            <a:avLst/>
+          </a:prstGeom>
+          <a:solidFill>
+            <a:srgbClr val="FFFFFF"/>
+          </a:solidFill>
+          <a:ln w="20320">
+            <a:solidFill>
+              <a:srgbClr val="B23A2A"/>
+            </a:solidFill>
+          </a:ln>
+          <a:effectLst/>
+        </p:spPr>
+        <p:style>
+          <a:lnRef idx="1">
+            <a:schemeClr val="accent1"/>
+          </a:lnRef>
+          <a:fillRef idx="3">
+            <a:schemeClr val="accent1"/>
+          </a:fillRef>
+          <a:effectRef idx="2">
+            <a:schemeClr val="accent1"/>
+          </a:effectRef>
+          <a:fontRef idx="minor">
+            <a:schemeClr val="lt1"/>
+          </a:fontRef>
+        </p:style>
+        <p:txBody>
+          <a:bodyPr rtlCol="0" anchor="ctr"/>
+          <a:lstStyle/>
+          <a:p>
+            <a:pPr algn="ctr"/>
+          </a:p>
+        </p:txBody>
+      </p:sp>
+      <p:sp>
+        <p:nvSpPr>
+          <p:cNvPr id="7" name="Oval 6"/>
+          <p:cNvSpPr/>
+          <p:nvPr/>
+        </p:nvSpPr>
+        <p:spPr>
+          <a:xfrm>
+            <a:off x="822960" y="2377440"/>
+            <a:ext cx="502920" cy="502920"/>
+          </a:xfrm>
+          <a:prstGeom prst="ellipse">
+            <a:avLst/>
+          </a:prstGeom>
+          <a:solidFill>
+            <a:srgbClr val="B23A2A"/>
+          </a:solidFill>
+          <a:ln>
+            <a:noFill/>
+          </a:ln>
+          <a:effectLst/>
+        </p:spPr>
+        <p:style>
+          <a:lnRef idx="1">
+            <a:schemeClr val="accent1"/>
+          </a:lnRef>
+          <a:fillRef idx="3">
+            <a:schemeClr val="accent1"/>
+          </a:fillRef>
+          <a:effectRef idx="2">
+            <a:schemeClr val="accent1"/>
+          </a:effectRef>
+          <a:fontRef idx="minor">
+            <a:schemeClr val="lt1"/>
+          </a:fontRef>
+        </p:style>
+        <p:txBody>
+          <a:bodyPr rtlCol="0" anchor="ctr"/>
+          <a:lstStyle/>
+          <a:p>
+            <a:pPr algn="ctr"/>
+          </a:p>
+        </p:txBody>
+      </p:sp>
+      <p:sp>
+        <p:nvSpPr>
+          <p:cNvPr id="8" name="TextBox 7"/>
+          <p:cNvSpPr txBox="1"/>
+          <p:nvPr/>
+        </p:nvSpPr>
+        <p:spPr>
+          <a:xfrm>
+            <a:off x="822960" y="2450592"/>
+            <a:ext cx="502920" cy="384048"/>
+          </a:xfrm>
+          <a:prstGeom prst="rect">
+            <a:avLst/>
+          </a:prstGeom>
+          <a:noFill/>
+        </p:spPr>
+        <p:txBody>
+          <a:bodyPr wrap="square" anchor="t" lIns="0" rIns="0" tIns="0" bIns="0">
+            <a:spAutoFit/>
+          </a:bodyPr>
+          <a:lstStyle/>
+          <a:p>
+            <a:pPr algn="ctr">
+              <a:lnSpc>
+                <a:spcPct val="145000"/>
+              </a:lnSpc>
+              <a:spcAft>
+                <a:spcPts val="400"/>
+              </a:spcAft>
+            </a:pPr>
+            <a:r>
+              <a:rPr sz="1800" b="1">
+                <a:solidFill>
+                  <a:srgbClr val="FFFFFF"/>
+                </a:solidFill>
+                <a:latin typeface="微软雅黑"/>
+                <a:ea typeface="微软雅黑"/>
+                <a:cs typeface="微软雅黑"/>
+              </a:rPr>
+              <a:t>①</a:t>
+            </a:r>
+          </a:p>
+        </p:txBody>
+      </p:sp>
+      <p:sp>
+        <p:nvSpPr>
+          <p:cNvPr id="9" name="TextBox 8"/>
+          <p:cNvSpPr txBox="1"/>
+          <p:nvPr/>
+        </p:nvSpPr>
+        <p:spPr>
+          <a:xfrm>
+            <a:off x="1508760" y="2395728"/>
+            <a:ext cx="1356283" cy="822960"/>
+          </a:xfrm>
+          <a:prstGeom prst="rect">
+            <a:avLst/>
+          </a:prstGeom>
+          <a:noFill/>
+        </p:spPr>
+        <p:txBody>
+          <a:bodyPr wrap="square" anchor="t" lIns="0" rIns="0" tIns="0" bIns="0">
+            <a:spAutoFit/>
+          </a:bodyPr>
+          <a:lstStyle/>
+          <a:p>
+            <a:pPr algn="l">
+              <a:lnSpc>
+                <a:spcPct val="130000"/>
+              </a:lnSpc>
+              <a:spcAft>
+                <a:spcPts val="400"/>
+              </a:spcAft>
+            </a:pPr>
+            <a:r>
+              <a:rPr sz="1500" b="1">
+                <a:solidFill>
+                  <a:srgbClr val="B23A2A"/>
+                </a:solidFill>
+                <a:latin typeface="微软雅黑"/>
+                <a:ea typeface="微软雅黑"/>
+                <a:cs typeface="微软雅黑"/>
+              </a:rPr>
+              <a:t>例文对比法</a:t>
+            </a:r>
+          </a:p>
+        </p:txBody>
+      </p:sp>
+      <p:sp>
+        <p:nvSpPr>
+          <p:cNvPr id="10" name="TextBox 9"/>
+          <p:cNvSpPr txBox="1"/>
+          <p:nvPr/>
+        </p:nvSpPr>
+        <p:spPr>
+          <a:xfrm>
+            <a:off x="868680" y="3154680"/>
+            <a:ext cx="1996363" cy="2788920"/>
+          </a:xfrm>
+          <a:prstGeom prst="rect">
+            <a:avLst/>
+          </a:prstGeom>
+          <a:noFill/>
+        </p:spPr>
+        <p:txBody>
+          <a:bodyPr wrap="square" anchor="t" lIns="0" rIns="0" tIns="0" bIns="0">
+            <a:spAutoFit/>
+          </a:bodyPr>
+          <a:lstStyle/>
+          <a:p>
+            <a:pPr algn="l">
+              <a:lnSpc>
+                <a:spcPct val="145000"/>
+              </a:lnSpc>
+              <a:spcAft>
+                <a:spcPts val="400"/>
+              </a:spcAft>
+            </a:pPr>
+            <a:r>
+              <a:rPr sz="1300" b="0">
+                <a:solidFill>
+                  <a:srgbClr val="1C2A33"/>
+                </a:solidFill>
+                <a:latin typeface="楷体"/>
+                <a:ea typeface="楷体"/>
+                <a:cs typeface="楷体"/>
+              </a:rPr>
+              <a:t>展示「读后感」与「文学短评」各一篇，辨差异。</a:t>
+            </a:r>
+          </a:p>
+        </p:txBody>
+      </p:sp>
+      <p:sp>
+        <p:nvSpPr>
+          <p:cNvPr id="11" name="Rounded Rectangle 10"/>
+          <p:cNvSpPr/>
+          <p:nvPr/>
+        </p:nvSpPr>
+        <p:spPr>
+          <a:xfrm>
+            <a:off x="3459403" y="2194560"/>
+            <a:ext cx="2453563" cy="3931920"/>
+          </a:xfrm>
+          <a:prstGeom prst="roundRect">
+            <a:avLst/>
+          </a:prstGeom>
+          <a:solidFill>
+            <a:srgbClr val="FFFFFF"/>
+          </a:solidFill>
+          <a:ln w="20320">
+            <a:solidFill>
+              <a:srgbClr val="2E7D6B"/>
+            </a:solidFill>
+          </a:ln>
+          <a:effectLst/>
+        </p:spPr>
+        <p:style>
+          <a:lnRef idx="1">
+            <a:schemeClr val="accent1"/>
+          </a:lnRef>
+          <a:fillRef idx="3">
+            <a:schemeClr val="accent1"/>
+          </a:fillRef>
+          <a:effectRef idx="2">
+            <a:schemeClr val="accent1"/>
+          </a:effectRef>
+          <a:fontRef idx="minor">
+            <a:schemeClr val="lt1"/>
+          </a:fontRef>
+        </p:style>
+        <p:txBody>
+          <a:bodyPr rtlCol="0" anchor="ctr"/>
+          <a:lstStyle/>
+          <a:p>
+            <a:pPr algn="ctr"/>
+          </a:p>
+        </p:txBody>
+      </p:sp>
+      <p:sp>
+        <p:nvSpPr>
+          <p:cNvPr id="12" name="Oval 11"/>
+          <p:cNvSpPr/>
+          <p:nvPr/>
+        </p:nvSpPr>
+        <p:spPr>
+          <a:xfrm>
+            <a:off x="3642283" y="2377440"/>
+            <a:ext cx="502920" cy="502920"/>
+          </a:xfrm>
+          <a:prstGeom prst="ellipse">
             <a:avLst/>
           </a:prstGeom>
           <a:solidFill>
@@ -5576,14 +6552,146 @@
       </p:sp>
       <p:sp>
         <p:nvSpPr>
-          <p:cNvPr id="5" name="Rounded Rectangle 4"/>
+          <p:cNvPr id="13" name="TextBox 12"/>
+          <p:cNvSpPr txBox="1"/>
+          <p:nvPr/>
+        </p:nvSpPr>
+        <p:spPr>
+          <a:xfrm>
+            <a:off x="3642283" y="2450592"/>
+            <a:ext cx="502920" cy="384048"/>
+          </a:xfrm>
+          <a:prstGeom prst="rect">
+            <a:avLst/>
+          </a:prstGeom>
+          <a:noFill/>
+        </p:spPr>
+        <p:txBody>
+          <a:bodyPr wrap="square" anchor="t" lIns="0" rIns="0" tIns="0" bIns="0">
+            <a:spAutoFit/>
+          </a:bodyPr>
+          <a:lstStyle/>
+          <a:p>
+            <a:pPr algn="ctr">
+              <a:lnSpc>
+                <a:spcPct val="145000"/>
+              </a:lnSpc>
+              <a:spcAft>
+                <a:spcPts val="400"/>
+              </a:spcAft>
+            </a:pPr>
+            <a:r>
+              <a:rPr sz="1800" b="1">
+                <a:solidFill>
+                  <a:srgbClr val="FFFFFF"/>
+                </a:solidFill>
+                <a:latin typeface="微软雅黑"/>
+                <a:ea typeface="微软雅黑"/>
+                <a:cs typeface="微软雅黑"/>
+              </a:rPr>
+              <a:t>②</a:t>
+            </a:r>
+          </a:p>
+        </p:txBody>
+      </p:sp>
+      <p:sp>
+        <p:nvSpPr>
+          <p:cNvPr id="14" name="TextBox 13"/>
+          <p:cNvSpPr txBox="1"/>
+          <p:nvPr/>
+        </p:nvSpPr>
+        <p:spPr>
+          <a:xfrm>
+            <a:off x="4328083" y="2395728"/>
+            <a:ext cx="1356283" cy="822960"/>
+          </a:xfrm>
+          <a:prstGeom prst="rect">
+            <a:avLst/>
+          </a:prstGeom>
+          <a:noFill/>
+        </p:spPr>
+        <p:txBody>
+          <a:bodyPr wrap="square" anchor="t" lIns="0" rIns="0" tIns="0" bIns="0">
+            <a:spAutoFit/>
+          </a:bodyPr>
+          <a:lstStyle/>
+          <a:p>
+            <a:pPr algn="l">
+              <a:lnSpc>
+                <a:spcPct val="130000"/>
+              </a:lnSpc>
+              <a:spcAft>
+                <a:spcPts val="400"/>
+              </a:spcAft>
+            </a:pPr>
+            <a:r>
+              <a:rPr sz="1500" b="1">
+                <a:solidFill>
+                  <a:srgbClr val="2E7D6B"/>
+                </a:solidFill>
+                <a:latin typeface="微软雅黑"/>
+                <a:ea typeface="微软雅黑"/>
+                <a:cs typeface="微软雅黑"/>
+              </a:rPr>
+              <a:t>支架法</a:t>
+            </a:r>
+          </a:p>
+        </p:txBody>
+      </p:sp>
+      <p:sp>
+        <p:nvSpPr>
+          <p:cNvPr id="15" name="TextBox 14"/>
+          <p:cNvSpPr txBox="1"/>
+          <p:nvPr/>
+        </p:nvSpPr>
+        <p:spPr>
+          <a:xfrm>
+            <a:off x="3688003" y="3154680"/>
+            <a:ext cx="1996363" cy="2788920"/>
+          </a:xfrm>
+          <a:prstGeom prst="rect">
+            <a:avLst/>
+          </a:prstGeom>
+          <a:noFill/>
+        </p:spPr>
+        <p:txBody>
+          <a:bodyPr wrap="square" anchor="t" lIns="0" rIns="0" tIns="0" bIns="0">
+            <a:spAutoFit/>
+          </a:bodyPr>
+          <a:lstStyle/>
+          <a:p>
+            <a:pPr algn="l">
+              <a:lnSpc>
+                <a:spcPct val="145000"/>
+              </a:lnSpc>
+              <a:spcAft>
+                <a:spcPts val="400"/>
+              </a:spcAft>
+            </a:pPr>
+            <a:r>
+              <a:rPr sz="1300" b="0">
+                <a:solidFill>
+                  <a:srgbClr val="1C2A33"/>
+                </a:solidFill>
+                <a:latin typeface="楷体"/>
+                <a:ea typeface="楷体"/>
+                <a:cs typeface="楷体"/>
+              </a:rPr>
+              <a:t>给「分析句式」模板降低起步难度。</a:t>
+            </a:r>
+          </a:p>
+        </p:txBody>
+      </p:sp>
+      <p:sp>
+        <p:nvSpPr>
+          <p:cNvPr id="16" name="Rounded Rectangle 15"/>
           <p:cNvSpPr/>
           <p:nvPr/>
         </p:nvSpPr>
         <p:spPr>
           <a:xfrm>
-            <a:off x="640080" y="1371600"/>
-            <a:ext cx="10911535" cy="685800"/>
+            <a:off x="6278727" y="2194560"/>
+            <a:ext cx="2453563" cy="3931920"/>
           </a:xfrm>
           <a:prstGeom prst="roundRect">
             <a:avLst/>
@@ -5591,9 +6699,9 @@
           <a:solidFill>
             <a:srgbClr val="FFFFFF"/>
           </a:solidFill>
-          <a:ln w="22860">
+          <a:ln w="20320">
             <a:solidFill>
-              <a:srgbClr val="2E7D6B"/>
+              <a:srgbClr val="C8A86B"/>
             </a:solidFill>
           </a:ln>
           <a:effectLst/>
@@ -5622,20 +6730,20 @@
       </p:sp>
       <p:sp>
         <p:nvSpPr>
-          <p:cNvPr id="6" name="Oval 5"/>
+          <p:cNvPr id="17" name="Oval 16"/>
           <p:cNvSpPr/>
           <p:nvPr/>
         </p:nvSpPr>
         <p:spPr>
           <a:xfrm>
-            <a:off x="804672" y="1536192"/>
-            <a:ext cx="457200" cy="457200"/>
+            <a:off x="6461607" y="2377440"/>
+            <a:ext cx="502920" cy="502920"/>
           </a:xfrm>
           <a:prstGeom prst="ellipse">
             <a:avLst/>
           </a:prstGeom>
           <a:solidFill>
-            <a:srgbClr val="2E7D6B"/>
+            <a:srgbClr val="C8A86B"/>
           </a:solidFill>
           <a:ln>
             <a:noFill/>
@@ -5666,14 +6774,14 @@
       </p:sp>
       <p:sp>
         <p:nvSpPr>
-          <p:cNvPr id="7" name="TextBox 6"/>
+          <p:cNvPr id="18" name="TextBox 17"/>
           <p:cNvSpPr txBox="1"/>
           <p:nvPr/>
         </p:nvSpPr>
         <p:spPr>
           <a:xfrm>
-            <a:off x="804672" y="1591056"/>
-            <a:ext cx="457200" cy="384048"/>
+            <a:off x="6461607" y="2450592"/>
+            <a:ext cx="502920" cy="384048"/>
           </a:xfrm>
           <a:prstGeom prst="rect">
             <a:avLst/>
@@ -5686,9 +6794,16 @@
           </a:bodyPr>
           <a:lstStyle/>
           <a:p>
-            <a:pPr algn="ctr"/>
-            <a:r>
-              <a:rPr sz="1600" b="1">
+            <a:pPr algn="ctr">
+              <a:lnSpc>
+                <a:spcPct val="145000"/>
+              </a:lnSpc>
+              <a:spcAft>
+                <a:spcPts val="400"/>
+              </a:spcAft>
+            </a:pPr>
+            <a:r>
+              <a:rPr sz="1800" b="1">
                 <a:solidFill>
                   <a:srgbClr val="FFFFFF"/>
                 </a:solidFill>
@@ -5696,21 +6811,21 @@
                 <a:ea typeface="微软雅黑"/>
                 <a:cs typeface="微软雅黑"/>
               </a:rPr>
-              <a:t>1</a:t>
-            </a:r>
-          </a:p>
-        </p:txBody>
-      </p:sp>
-      <p:sp>
-        <p:nvSpPr>
-          <p:cNvPr id="8" name="TextBox 7"/>
+              <a:t>③</a:t>
+            </a:r>
+          </a:p>
+        </p:txBody>
+      </p:sp>
+      <p:sp>
+        <p:nvSpPr>
+          <p:cNvPr id="19" name="TextBox 18"/>
           <p:cNvSpPr txBox="1"/>
           <p:nvPr/>
         </p:nvSpPr>
         <p:spPr>
           <a:xfrm>
-            <a:off x="1371600" y="1481328"/>
-            <a:ext cx="9997135" cy="484632"/>
+            <a:off x="7147407" y="2395728"/>
+            <a:ext cx="1356283" cy="822960"/>
           </a:xfrm>
           <a:prstGeom prst="rect">
             <a:avLst/>
@@ -5725,33 +6840,80 @@
           <a:p>
             <a:pPr algn="l">
               <a:lnSpc>
-                <a:spcPct val="110000"/>
+                <a:spcPct val="130000"/>
               </a:lnSpc>
+              <a:spcAft>
+                <a:spcPts val="400"/>
+              </a:spcAft>
             </a:pPr>
             <a:r>
-              <a:rPr sz="1600" b="1">
-                <a:solidFill>
-                  <a:srgbClr val="1C2A33"/>
+              <a:rPr sz="1500" b="1">
+                <a:solidFill>
+                  <a:srgbClr val="C8A86B"/>
                 </a:solidFill>
                 <a:latin typeface="微软雅黑"/>
                 <a:ea typeface="微软雅黑"/>
                 <a:cs typeface="微软雅黑"/>
               </a:rPr>
-              <a:t>Step 1 导入</a:t>
-            </a:r>
-          </a:p>
-        </p:txBody>
-      </p:sp>
-      <p:sp>
-        <p:nvSpPr>
-          <p:cNvPr id="9" name="Rounded Rectangle 8"/>
+              <a:t>工作坊法</a:t>
+            </a:r>
+          </a:p>
+        </p:txBody>
+      </p:sp>
+      <p:sp>
+        <p:nvSpPr>
+          <p:cNvPr id="20" name="TextBox 19"/>
+          <p:cNvSpPr txBox="1"/>
+          <p:nvPr/>
+        </p:nvSpPr>
+        <p:spPr>
+          <a:xfrm>
+            <a:off x="6507327" y="3154680"/>
+            <a:ext cx="1996363" cy="2788920"/>
+          </a:xfrm>
+          <a:prstGeom prst="rect">
+            <a:avLst/>
+          </a:prstGeom>
+          <a:noFill/>
+        </p:spPr>
+        <p:txBody>
+          <a:bodyPr wrap="square" anchor="t" lIns="0" rIns="0" tIns="0" bIns="0">
+            <a:spAutoFit/>
+          </a:bodyPr>
+          <a:lstStyle/>
+          <a:p>
+            <a:pPr algn="l">
+              <a:lnSpc>
+                <a:spcPct val="145000"/>
+              </a:lnSpc>
+              <a:spcAft>
+                <a:spcPts val="400"/>
+              </a:spcAft>
+            </a:pPr>
+            <a:r>
+              <a:rPr sz="1300" b="0">
+                <a:solidFill>
+                  <a:srgbClr val="1C2A33"/>
+                </a:solidFill>
+                <a:latin typeface="楷体"/>
+                <a:ea typeface="楷体"/>
+                <a:cs typeface="楷体"/>
+              </a:rPr>
+              <a:t>选点→写初稿→互评→修改。</a:t>
+            </a:r>
+          </a:p>
+        </p:txBody>
+      </p:sp>
+      <p:sp>
+        <p:nvSpPr>
+          <p:cNvPr id="21" name="Rounded Rectangle 20"/>
           <p:cNvSpPr/>
           <p:nvPr/>
         </p:nvSpPr>
         <p:spPr>
           <a:xfrm>
-            <a:off x="640080" y="2194560"/>
-            <a:ext cx="10911535" cy="685800"/>
+            <a:off x="9098051" y="2194560"/>
+            <a:ext cx="2453563" cy="3931920"/>
           </a:xfrm>
           <a:prstGeom prst="roundRect">
             <a:avLst/>
@@ -5759,9 +6921,9 @@
           <a:solidFill>
             <a:srgbClr val="FFFFFF"/>
           </a:solidFill>
-          <a:ln w="22860">
+          <a:ln w="20320">
             <a:solidFill>
-              <a:srgbClr val="2E7D6B"/>
+              <a:srgbClr val="6B6258"/>
             </a:solidFill>
           </a:ln>
           <a:effectLst/>
@@ -5790,20 +6952,20 @@
       </p:sp>
       <p:sp>
         <p:nvSpPr>
-          <p:cNvPr id="10" name="Oval 9"/>
+          <p:cNvPr id="22" name="Oval 21"/>
           <p:cNvSpPr/>
           <p:nvPr/>
         </p:nvSpPr>
         <p:spPr>
           <a:xfrm>
-            <a:off x="804672" y="2359152"/>
-            <a:ext cx="457200" cy="457200"/>
+            <a:off x="9280931" y="2377440"/>
+            <a:ext cx="502920" cy="502920"/>
           </a:xfrm>
           <a:prstGeom prst="ellipse">
             <a:avLst/>
           </a:prstGeom>
           <a:solidFill>
-            <a:srgbClr val="2E7D6B"/>
+            <a:srgbClr val="6B6258"/>
           </a:solidFill>
           <a:ln>
             <a:noFill/>
@@ -5834,14 +6996,14 @@
       </p:sp>
       <p:sp>
         <p:nvSpPr>
-          <p:cNvPr id="11" name="TextBox 10"/>
+          <p:cNvPr id="23" name="TextBox 22"/>
           <p:cNvSpPr txBox="1"/>
           <p:nvPr/>
         </p:nvSpPr>
         <p:spPr>
           <a:xfrm>
-            <a:off x="804672" y="2414016"/>
-            <a:ext cx="457200" cy="384048"/>
+            <a:off x="9280931" y="2450592"/>
+            <a:ext cx="502920" cy="384048"/>
           </a:xfrm>
           <a:prstGeom prst="rect">
             <a:avLst/>
@@ -5854,9 +7016,16 @@
           </a:bodyPr>
           <a:lstStyle/>
           <a:p>
-            <a:pPr algn="ctr"/>
-            <a:r>
-              <a:rPr sz="1600" b="1">
+            <a:pPr algn="ctr">
+              <a:lnSpc>
+                <a:spcPct val="145000"/>
+              </a:lnSpc>
+              <a:spcAft>
+                <a:spcPts val="400"/>
+              </a:spcAft>
+            </a:pPr>
+            <a:r>
+              <a:rPr sz="1800" b="1">
                 <a:solidFill>
                   <a:srgbClr val="FFFFFF"/>
                 </a:solidFill>
@@ -5864,21 +7033,21 @@
                 <a:ea typeface="微软雅黑"/>
                 <a:cs typeface="微软雅黑"/>
               </a:rPr>
-              <a:t>2</a:t>
-            </a:r>
-          </a:p>
-        </p:txBody>
-      </p:sp>
-      <p:sp>
-        <p:nvSpPr>
-          <p:cNvPr id="12" name="TextBox 11"/>
+              <a:t>④</a:t>
+            </a:r>
+          </a:p>
+        </p:txBody>
+      </p:sp>
+      <p:sp>
+        <p:nvSpPr>
+          <p:cNvPr id="24" name="TextBox 23"/>
           <p:cNvSpPr txBox="1"/>
           <p:nvPr/>
         </p:nvSpPr>
         <p:spPr>
           <a:xfrm>
-            <a:off x="1371600" y="2304288"/>
-            <a:ext cx="9997135" cy="484632"/>
+            <a:off x="9966731" y="2395728"/>
+            <a:ext cx="1356283" cy="822960"/>
           </a:xfrm>
           <a:prstGeom prst="rect">
             <a:avLst/>
@@ -5893,123 +7062,36 @@
           <a:p>
             <a:pPr algn="l">
               <a:lnSpc>
-                <a:spcPct val="110000"/>
+                <a:spcPct val="130000"/>
               </a:lnSpc>
+              <a:spcAft>
+                <a:spcPts val="400"/>
+              </a:spcAft>
             </a:pPr>
             <a:r>
-              <a:rPr sz="1600" b="1">
-                <a:solidFill>
-                  <a:srgbClr val="1C2A33"/>
+              <a:rPr sz="1500" b="1">
+                <a:solidFill>
+                  <a:srgbClr val="6B6258"/>
                 </a:solidFill>
                 <a:latin typeface="微软雅黑"/>
                 <a:ea typeface="微软雅黑"/>
                 <a:cs typeface="微软雅黑"/>
               </a:rPr>
-              <a:t>Step 2 四步法讲解</a:t>
-            </a:r>
-          </a:p>
-        </p:txBody>
-      </p:sp>
-      <p:sp>
-        <p:nvSpPr>
-          <p:cNvPr id="13" name="Rounded Rectangle 12"/>
-          <p:cNvSpPr/>
-          <p:nvPr/>
-        </p:nvSpPr>
-        <p:spPr>
-          <a:xfrm>
-            <a:off x="640080" y="3017520"/>
-            <a:ext cx="10911535" cy="685800"/>
-          </a:xfrm>
-          <a:prstGeom prst="roundRect">
-            <a:avLst/>
-          </a:prstGeom>
-          <a:solidFill>
-            <a:srgbClr val="FFFFFF"/>
-          </a:solidFill>
-          <a:ln w="22860">
-            <a:solidFill>
-              <a:srgbClr val="2E7D6B"/>
-            </a:solidFill>
-          </a:ln>
-          <a:effectLst/>
-        </p:spPr>
-        <p:style>
-          <a:lnRef idx="1">
-            <a:schemeClr val="accent1"/>
-          </a:lnRef>
-          <a:fillRef idx="3">
-            <a:schemeClr val="accent1"/>
-          </a:fillRef>
-          <a:effectRef idx="2">
-            <a:schemeClr val="accent1"/>
-          </a:effectRef>
-          <a:fontRef idx="minor">
-            <a:schemeClr val="lt1"/>
-          </a:fontRef>
-        </p:style>
-        <p:txBody>
-          <a:bodyPr rtlCol="0" anchor="ctr"/>
-          <a:lstStyle/>
-          <a:p>
-            <a:pPr algn="ctr"/>
-          </a:p>
-        </p:txBody>
-      </p:sp>
-      <p:sp>
-        <p:nvSpPr>
-          <p:cNvPr id="14" name="Oval 13"/>
-          <p:cNvSpPr/>
-          <p:nvPr/>
-        </p:nvSpPr>
-        <p:spPr>
-          <a:xfrm>
-            <a:off x="804672" y="3182112"/>
-            <a:ext cx="457200" cy="457200"/>
-          </a:xfrm>
-          <a:prstGeom prst="ellipse">
-            <a:avLst/>
-          </a:prstGeom>
-          <a:solidFill>
-            <a:srgbClr val="2E7D6B"/>
-          </a:solidFill>
-          <a:ln>
-            <a:noFill/>
-          </a:ln>
-          <a:effectLst/>
-        </p:spPr>
-        <p:style>
-          <a:lnRef idx="1">
-            <a:schemeClr val="accent1"/>
-          </a:lnRef>
-          <a:fillRef idx="3">
-            <a:schemeClr val="accent1"/>
-          </a:fillRef>
-          <a:effectRef idx="2">
-            <a:schemeClr val="accent1"/>
-          </a:effectRef>
-          <a:fontRef idx="minor">
-            <a:schemeClr val="lt1"/>
-          </a:fontRef>
-        </p:style>
-        <p:txBody>
-          <a:bodyPr rtlCol="0" anchor="ctr"/>
-          <a:lstStyle/>
-          <a:p>
-            <a:pPr algn="ctr"/>
-          </a:p>
-        </p:txBody>
-      </p:sp>
-      <p:sp>
-        <p:nvSpPr>
-          <p:cNvPr id="15" name="TextBox 14"/>
+              <a:t>示范法</a:t>
+            </a:r>
+          </a:p>
+        </p:txBody>
+      </p:sp>
+      <p:sp>
+        <p:nvSpPr>
+          <p:cNvPr id="25" name="TextBox 24"/>
           <p:cNvSpPr txBox="1"/>
           <p:nvPr/>
         </p:nvSpPr>
         <p:spPr>
           <a:xfrm>
-            <a:off x="804672" y="3236976"/>
-            <a:ext cx="457200" cy="384048"/>
+            <a:off x="9326651" y="3154680"/>
+            <a:ext cx="1996363" cy="2788920"/>
           </a:xfrm>
           <a:prstGeom prst="rect">
             <a:avLst/>
@@ -6022,569 +7104,31 @@
           </a:bodyPr>
           <a:lstStyle/>
           <a:p>
-            <a:pPr algn="ctr"/>
-            <a:r>
-              <a:rPr sz="1600" b="1">
-                <a:solidFill>
-                  <a:srgbClr val="FFFFFF"/>
-                </a:solidFill>
-                <a:latin typeface="微软雅黑"/>
-                <a:ea typeface="微软雅黑"/>
-                <a:cs typeface="微软雅黑"/>
-              </a:rPr>
-              <a:t>3</a:t>
-            </a:r>
-          </a:p>
-        </p:txBody>
-      </p:sp>
-      <p:sp>
-        <p:nvSpPr>
-          <p:cNvPr id="16" name="TextBox 15"/>
-          <p:cNvSpPr txBox="1"/>
-          <p:nvPr/>
-        </p:nvSpPr>
-        <p:spPr>
-          <a:xfrm>
-            <a:off x="1371600" y="3127248"/>
-            <a:ext cx="9997135" cy="484632"/>
-          </a:xfrm>
-          <a:prstGeom prst="rect">
-            <a:avLst/>
-          </a:prstGeom>
-          <a:noFill/>
-        </p:spPr>
-        <p:txBody>
-          <a:bodyPr wrap="square" anchor="t" lIns="0" rIns="0" tIns="0" bIns="0">
-            <a:spAutoFit/>
-          </a:bodyPr>
-          <a:lstStyle/>
-          <a:p>
             <a:pPr algn="l">
               <a:lnSpc>
-                <a:spcPct val="110000"/>
+                <a:spcPct val="145000"/>
               </a:lnSpc>
+              <a:spcAft>
+                <a:spcPts val="400"/>
+              </a:spcAft>
             </a:pPr>
             <a:r>
-              <a:rPr sz="1600" b="1">
+              <a:rPr sz="1300" b="0">
                 <a:solidFill>
                   <a:srgbClr val="1C2A33"/>
                 </a:solidFill>
-                <a:latin typeface="微软雅黑"/>
-                <a:ea typeface="微软雅黑"/>
-                <a:cs typeface="微软雅黑"/>
-              </a:rPr>
-              <a:t>Step 3 选点练习</a:t>
-            </a:r>
-          </a:p>
-        </p:txBody>
-      </p:sp>
-      <p:sp>
-        <p:nvSpPr>
-          <p:cNvPr id="17" name="Rounded Rectangle 16"/>
-          <p:cNvSpPr/>
-          <p:nvPr/>
-        </p:nvSpPr>
-        <p:spPr>
-          <a:xfrm>
-            <a:off x="640080" y="3840480"/>
-            <a:ext cx="10911535" cy="685800"/>
-          </a:xfrm>
-          <a:prstGeom prst="roundRect">
-            <a:avLst/>
-          </a:prstGeom>
-          <a:solidFill>
-            <a:srgbClr val="FFFFFF"/>
-          </a:solidFill>
-          <a:ln w="22860">
-            <a:solidFill>
-              <a:srgbClr val="2E7D6B"/>
-            </a:solidFill>
-          </a:ln>
-          <a:effectLst/>
-        </p:spPr>
-        <p:style>
-          <a:lnRef idx="1">
-            <a:schemeClr val="accent1"/>
-          </a:lnRef>
-          <a:fillRef idx="3">
-            <a:schemeClr val="accent1"/>
-          </a:fillRef>
-          <a:effectRef idx="2">
-            <a:schemeClr val="accent1"/>
-          </a:effectRef>
-          <a:fontRef idx="minor">
-            <a:schemeClr val="lt1"/>
-          </a:fontRef>
-        </p:style>
-        <p:txBody>
-          <a:bodyPr rtlCol="0" anchor="ctr"/>
-          <a:lstStyle/>
-          <a:p>
-            <a:pPr algn="ctr"/>
-          </a:p>
-        </p:txBody>
-      </p:sp>
-      <p:sp>
-        <p:nvSpPr>
-          <p:cNvPr id="18" name="Oval 17"/>
-          <p:cNvSpPr/>
-          <p:nvPr/>
-        </p:nvSpPr>
-        <p:spPr>
-          <a:xfrm>
-            <a:off x="804672" y="4005072"/>
-            <a:ext cx="457200" cy="457200"/>
-          </a:xfrm>
-          <a:prstGeom prst="ellipse">
-            <a:avLst/>
-          </a:prstGeom>
-          <a:solidFill>
-            <a:srgbClr val="2E7D6B"/>
-          </a:solidFill>
-          <a:ln>
-            <a:noFill/>
-          </a:ln>
-          <a:effectLst/>
-        </p:spPr>
-        <p:style>
-          <a:lnRef idx="1">
-            <a:schemeClr val="accent1"/>
-          </a:lnRef>
-          <a:fillRef idx="3">
-            <a:schemeClr val="accent1"/>
-          </a:fillRef>
-          <a:effectRef idx="2">
-            <a:schemeClr val="accent1"/>
-          </a:effectRef>
-          <a:fontRef idx="minor">
-            <a:schemeClr val="lt1"/>
-          </a:fontRef>
-        </p:style>
-        <p:txBody>
-          <a:bodyPr rtlCol="0" anchor="ctr"/>
-          <a:lstStyle/>
-          <a:p>
-            <a:pPr algn="ctr"/>
-          </a:p>
-        </p:txBody>
-      </p:sp>
-      <p:sp>
-        <p:nvSpPr>
-          <p:cNvPr id="19" name="TextBox 18"/>
-          <p:cNvSpPr txBox="1"/>
-          <p:nvPr/>
-        </p:nvSpPr>
-        <p:spPr>
-          <a:xfrm>
-            <a:off x="804672" y="4059936"/>
-            <a:ext cx="457200" cy="384048"/>
-          </a:xfrm>
-          <a:prstGeom prst="rect">
-            <a:avLst/>
-          </a:prstGeom>
-          <a:noFill/>
-        </p:spPr>
-        <p:txBody>
-          <a:bodyPr wrap="square" anchor="t" lIns="0" rIns="0" tIns="0" bIns="0">
-            <a:spAutoFit/>
-          </a:bodyPr>
-          <a:lstStyle/>
-          <a:p>
-            <a:pPr algn="ctr"/>
-            <a:r>
-              <a:rPr sz="1600" b="1">
-                <a:solidFill>
-                  <a:srgbClr val="FFFFFF"/>
-                </a:solidFill>
-                <a:latin typeface="微软雅黑"/>
-                <a:ea typeface="微软雅黑"/>
-                <a:cs typeface="微软雅黑"/>
-              </a:rPr>
-              <a:t>4</a:t>
-            </a:r>
-          </a:p>
-        </p:txBody>
-      </p:sp>
-      <p:sp>
-        <p:nvSpPr>
-          <p:cNvPr id="20" name="TextBox 19"/>
-          <p:cNvSpPr txBox="1"/>
-          <p:nvPr/>
-        </p:nvSpPr>
-        <p:spPr>
-          <a:xfrm>
-            <a:off x="1371600" y="3950208"/>
-            <a:ext cx="9997135" cy="484632"/>
-          </a:xfrm>
-          <a:prstGeom prst="rect">
-            <a:avLst/>
-          </a:prstGeom>
-          <a:noFill/>
-        </p:spPr>
-        <p:txBody>
-          <a:bodyPr wrap="square" anchor="t" lIns="0" rIns="0" tIns="0" bIns="0">
-            <a:spAutoFit/>
-          </a:bodyPr>
-          <a:lstStyle/>
-          <a:p>
-            <a:pPr algn="l">
-              <a:lnSpc>
-                <a:spcPct val="110000"/>
-              </a:lnSpc>
-            </a:pPr>
-            <a:r>
-              <a:rPr sz="1600" b="1">
-                <a:solidFill>
-                  <a:srgbClr val="1C2A33"/>
-                </a:solidFill>
-                <a:latin typeface="微软雅黑"/>
-                <a:ea typeface="微软雅黑"/>
-                <a:cs typeface="微软雅黑"/>
-              </a:rPr>
-              <a:t>Step 4 写初稿</a:t>
-            </a:r>
-          </a:p>
-        </p:txBody>
-      </p:sp>
-      <p:sp>
-        <p:nvSpPr>
-          <p:cNvPr id="21" name="Rounded Rectangle 20"/>
-          <p:cNvSpPr/>
-          <p:nvPr/>
-        </p:nvSpPr>
-        <p:spPr>
-          <a:xfrm>
-            <a:off x="640080" y="4663440"/>
-            <a:ext cx="10911535" cy="685800"/>
-          </a:xfrm>
-          <a:prstGeom prst="roundRect">
-            <a:avLst/>
-          </a:prstGeom>
-          <a:solidFill>
-            <a:srgbClr val="FFFFFF"/>
-          </a:solidFill>
-          <a:ln w="22860">
-            <a:solidFill>
-              <a:srgbClr val="2E7D6B"/>
-            </a:solidFill>
-          </a:ln>
-          <a:effectLst/>
-        </p:spPr>
-        <p:style>
-          <a:lnRef idx="1">
-            <a:schemeClr val="accent1"/>
-          </a:lnRef>
-          <a:fillRef idx="3">
-            <a:schemeClr val="accent1"/>
-          </a:fillRef>
-          <a:effectRef idx="2">
-            <a:schemeClr val="accent1"/>
-          </a:effectRef>
-          <a:fontRef idx="minor">
-            <a:schemeClr val="lt1"/>
-          </a:fontRef>
-        </p:style>
-        <p:txBody>
-          <a:bodyPr rtlCol="0" anchor="ctr"/>
-          <a:lstStyle/>
-          <a:p>
-            <a:pPr algn="ctr"/>
-          </a:p>
-        </p:txBody>
-      </p:sp>
-      <p:sp>
-        <p:nvSpPr>
-          <p:cNvPr id="22" name="Oval 21"/>
-          <p:cNvSpPr/>
-          <p:nvPr/>
-        </p:nvSpPr>
-        <p:spPr>
-          <a:xfrm>
-            <a:off x="804672" y="4828032"/>
-            <a:ext cx="457200" cy="457200"/>
-          </a:xfrm>
-          <a:prstGeom prst="ellipse">
-            <a:avLst/>
-          </a:prstGeom>
-          <a:solidFill>
-            <a:srgbClr val="2E7D6B"/>
-          </a:solidFill>
-          <a:ln>
-            <a:noFill/>
-          </a:ln>
-          <a:effectLst/>
-        </p:spPr>
-        <p:style>
-          <a:lnRef idx="1">
-            <a:schemeClr val="accent1"/>
-          </a:lnRef>
-          <a:fillRef idx="3">
-            <a:schemeClr val="accent1"/>
-          </a:fillRef>
-          <a:effectRef idx="2">
-            <a:schemeClr val="accent1"/>
-          </a:effectRef>
-          <a:fontRef idx="minor">
-            <a:schemeClr val="lt1"/>
-          </a:fontRef>
-        </p:style>
-        <p:txBody>
-          <a:bodyPr rtlCol="0" anchor="ctr"/>
-          <a:lstStyle/>
-          <a:p>
-            <a:pPr algn="ctr"/>
-          </a:p>
-        </p:txBody>
-      </p:sp>
-      <p:sp>
-        <p:nvSpPr>
-          <p:cNvPr id="23" name="TextBox 22"/>
-          <p:cNvSpPr txBox="1"/>
-          <p:nvPr/>
-        </p:nvSpPr>
-        <p:spPr>
-          <a:xfrm>
-            <a:off x="804672" y="4882896"/>
-            <a:ext cx="457200" cy="384048"/>
-          </a:xfrm>
-          <a:prstGeom prst="rect">
-            <a:avLst/>
-          </a:prstGeom>
-          <a:noFill/>
-        </p:spPr>
-        <p:txBody>
-          <a:bodyPr wrap="square" anchor="t" lIns="0" rIns="0" tIns="0" bIns="0">
-            <a:spAutoFit/>
-          </a:bodyPr>
-          <a:lstStyle/>
-          <a:p>
-            <a:pPr algn="ctr"/>
-            <a:r>
-              <a:rPr sz="1600" b="1">
-                <a:solidFill>
-                  <a:srgbClr val="FFFFFF"/>
-                </a:solidFill>
-                <a:latin typeface="微软雅黑"/>
-                <a:ea typeface="微软雅黑"/>
-                <a:cs typeface="微软雅黑"/>
-              </a:rPr>
-              <a:t>5</a:t>
-            </a:r>
-          </a:p>
-        </p:txBody>
-      </p:sp>
-      <p:sp>
-        <p:nvSpPr>
-          <p:cNvPr id="24" name="TextBox 23"/>
-          <p:cNvSpPr txBox="1"/>
-          <p:nvPr/>
-        </p:nvSpPr>
-        <p:spPr>
-          <a:xfrm>
-            <a:off x="1371600" y="4773168"/>
-            <a:ext cx="9997135" cy="484632"/>
-          </a:xfrm>
-          <a:prstGeom prst="rect">
-            <a:avLst/>
-          </a:prstGeom>
-          <a:noFill/>
-        </p:spPr>
-        <p:txBody>
-          <a:bodyPr wrap="square" anchor="t" lIns="0" rIns="0" tIns="0" bIns="0">
-            <a:spAutoFit/>
-          </a:bodyPr>
-          <a:lstStyle/>
-          <a:p>
-            <a:pPr algn="l">
-              <a:lnSpc>
-                <a:spcPct val="110000"/>
-              </a:lnSpc>
-            </a:pPr>
-            <a:r>
-              <a:rPr sz="1600" b="1">
-                <a:solidFill>
-                  <a:srgbClr val="1C2A33"/>
-                </a:solidFill>
-                <a:latin typeface="微软雅黑"/>
-                <a:ea typeface="微软雅黑"/>
-                <a:cs typeface="微软雅黑"/>
-              </a:rPr>
-              <a:t>Step 5 互评</a:t>
-            </a:r>
-          </a:p>
-        </p:txBody>
-      </p:sp>
-      <p:sp>
-        <p:nvSpPr>
-          <p:cNvPr id="25" name="Rounded Rectangle 24"/>
-          <p:cNvSpPr/>
-          <p:nvPr/>
-        </p:nvSpPr>
-        <p:spPr>
-          <a:xfrm>
-            <a:off x="640080" y="5486400"/>
-            <a:ext cx="10911535" cy="685800"/>
-          </a:xfrm>
-          <a:prstGeom prst="roundRect">
-            <a:avLst/>
-          </a:prstGeom>
-          <a:solidFill>
-            <a:srgbClr val="FFFFFF"/>
-          </a:solidFill>
-          <a:ln w="22860">
-            <a:solidFill>
-              <a:srgbClr val="2E7D6B"/>
-            </a:solidFill>
-          </a:ln>
-          <a:effectLst/>
-        </p:spPr>
-        <p:style>
-          <a:lnRef idx="1">
-            <a:schemeClr val="accent1"/>
-          </a:lnRef>
-          <a:fillRef idx="3">
-            <a:schemeClr val="accent1"/>
-          </a:fillRef>
-          <a:effectRef idx="2">
-            <a:schemeClr val="accent1"/>
-          </a:effectRef>
-          <a:fontRef idx="minor">
-            <a:schemeClr val="lt1"/>
-          </a:fontRef>
-        </p:style>
-        <p:txBody>
-          <a:bodyPr rtlCol="0" anchor="ctr"/>
-          <a:lstStyle/>
-          <a:p>
-            <a:pPr algn="ctr"/>
-          </a:p>
-        </p:txBody>
-      </p:sp>
-      <p:sp>
-        <p:nvSpPr>
-          <p:cNvPr id="26" name="Oval 25"/>
-          <p:cNvSpPr/>
-          <p:nvPr/>
-        </p:nvSpPr>
-        <p:spPr>
-          <a:xfrm>
-            <a:off x="804672" y="5650992"/>
-            <a:ext cx="457200" cy="457200"/>
-          </a:xfrm>
-          <a:prstGeom prst="ellipse">
-            <a:avLst/>
-          </a:prstGeom>
-          <a:solidFill>
-            <a:srgbClr val="2E7D6B"/>
-          </a:solidFill>
-          <a:ln>
-            <a:noFill/>
-          </a:ln>
-          <a:effectLst/>
-        </p:spPr>
-        <p:style>
-          <a:lnRef idx="1">
-            <a:schemeClr val="accent1"/>
-          </a:lnRef>
-          <a:fillRef idx="3">
-            <a:schemeClr val="accent1"/>
-          </a:fillRef>
-          <a:effectRef idx="2">
-            <a:schemeClr val="accent1"/>
-          </a:effectRef>
-          <a:fontRef idx="minor">
-            <a:schemeClr val="lt1"/>
-          </a:fontRef>
-        </p:style>
-        <p:txBody>
-          <a:bodyPr rtlCol="0" anchor="ctr"/>
-          <a:lstStyle/>
-          <a:p>
-            <a:pPr algn="ctr"/>
-          </a:p>
-        </p:txBody>
-      </p:sp>
-      <p:sp>
-        <p:nvSpPr>
-          <p:cNvPr id="27" name="TextBox 26"/>
-          <p:cNvSpPr txBox="1"/>
-          <p:nvPr/>
-        </p:nvSpPr>
-        <p:spPr>
-          <a:xfrm>
-            <a:off x="804672" y="5705856"/>
-            <a:ext cx="457200" cy="384048"/>
-          </a:xfrm>
-          <a:prstGeom prst="rect">
-            <a:avLst/>
-          </a:prstGeom>
-          <a:noFill/>
-        </p:spPr>
-        <p:txBody>
-          <a:bodyPr wrap="square" anchor="t" lIns="0" rIns="0" tIns="0" bIns="0">
-            <a:spAutoFit/>
-          </a:bodyPr>
-          <a:lstStyle/>
-          <a:p>
-            <a:pPr algn="ctr"/>
-            <a:r>
-              <a:rPr sz="1600" b="1">
-                <a:solidFill>
-                  <a:srgbClr val="FFFFFF"/>
-                </a:solidFill>
-                <a:latin typeface="微软雅黑"/>
-                <a:ea typeface="微软雅黑"/>
-                <a:cs typeface="微软雅黑"/>
-              </a:rPr>
-              <a:t>6</a:t>
-            </a:r>
-          </a:p>
-        </p:txBody>
-      </p:sp>
-      <p:sp>
-        <p:nvSpPr>
-          <p:cNvPr id="28" name="TextBox 27"/>
-          <p:cNvSpPr txBox="1"/>
-          <p:nvPr/>
-        </p:nvSpPr>
-        <p:spPr>
-          <a:xfrm>
-            <a:off x="1371600" y="5596128"/>
-            <a:ext cx="9997135" cy="484632"/>
-          </a:xfrm>
-          <a:prstGeom prst="rect">
-            <a:avLst/>
-          </a:prstGeom>
-          <a:noFill/>
-        </p:spPr>
-        <p:txBody>
-          <a:bodyPr wrap="square" anchor="t" lIns="0" rIns="0" tIns="0" bIns="0">
-            <a:spAutoFit/>
-          </a:bodyPr>
-          <a:lstStyle/>
-          <a:p>
-            <a:pPr algn="l">
-              <a:lnSpc>
-                <a:spcPct val="110000"/>
-              </a:lnSpc>
-            </a:pPr>
-            <a:r>
-              <a:rPr sz="1600" b="1">
-                <a:solidFill>
-                  <a:srgbClr val="1C2A33"/>
-                </a:solidFill>
-                <a:latin typeface="微软雅黑"/>
-                <a:ea typeface="微软雅黑"/>
-                <a:cs typeface="微软雅黑"/>
-              </a:rPr>
-              <a:t>Step 6 小结+作业</a:t>
-            </a:r>
-          </a:p>
-        </p:txBody>
-      </p:sp>
-      <p:sp>
-        <p:nvSpPr>
-          <p:cNvPr id="29" name="TextBox 28"/>
+                <a:latin typeface="楷体"/>
+                <a:ea typeface="楷体"/>
+                <a:cs typeface="楷体"/>
+              </a:rPr>
+              <a:t>当场就「击」字写一段短评示范。</a:t>
+            </a:r>
+          </a:p>
+        </p:txBody>
+      </p:sp>
+      <p:sp>
+        <p:nvSpPr>
+          <p:cNvPr id="26" name="TextBox 25"/>
           <p:cNvSpPr txBox="1"/>
           <p:nvPr/>
         </p:nvSpPr>
@@ -6717,7 +7261,7 @@
                 <a:ea typeface="微软雅黑"/>
                 <a:cs typeface="微软雅黑"/>
               </a:rPr>
-              <a:t>易混易错</a:t>
+              <a:t>难点</a:t>
             </a:r>
           </a:p>
         </p:txBody>
@@ -6768,14 +7312,58 @@
       </p:sp>
       <p:sp>
         <p:nvSpPr>
-          <p:cNvPr id="5" name="Rounded Rectangle 4"/>
+          <p:cNvPr id="5" name="TextBox 4"/>
+          <p:cNvSpPr txBox="1"/>
+          <p:nvPr/>
+        </p:nvSpPr>
+        <p:spPr>
+          <a:xfrm>
+            <a:off x="640080" y="1325880"/>
+            <a:ext cx="10911535" cy="548640"/>
+          </a:xfrm>
+          <a:prstGeom prst="rect">
+            <a:avLst/>
+          </a:prstGeom>
+          <a:noFill/>
+        </p:spPr>
+        <p:txBody>
+          <a:bodyPr wrap="square" anchor="t" lIns="0" rIns="0" tIns="0" bIns="0">
+            <a:spAutoFit/>
+          </a:bodyPr>
+          <a:lstStyle/>
+          <a:p>
+            <a:pPr algn="l">
+              <a:lnSpc>
+                <a:spcPct val="145000"/>
+              </a:lnSpc>
+              <a:spcAft>
+                <a:spcPts val="400"/>
+              </a:spcAft>
+            </a:pPr>
+            <a:r>
+              <a:rPr sz="2600" b="1">
+                <a:solidFill>
+                  <a:srgbClr val="1C2A33"/>
+                </a:solidFill>
+                <a:latin typeface="楷体"/>
+                <a:ea typeface="楷体"/>
+                <a:cs typeface="楷体"/>
+              </a:rPr>
+              <a:t>本课难点 · 怎么破</a:t>
+            </a:r>
+          </a:p>
+        </p:txBody>
+      </p:sp>
+      <p:sp>
+        <p:nvSpPr>
+          <p:cNvPr id="6" name="Rounded Rectangle 5"/>
           <p:cNvSpPr/>
           <p:nvPr/>
         </p:nvSpPr>
         <p:spPr>
           <a:xfrm>
-            <a:off x="640080" y="1417320"/>
-            <a:ext cx="5349240" cy="2057400"/>
+            <a:off x="640080" y="2194560"/>
+            <a:ext cx="3393338" cy="3931920"/>
           </a:xfrm>
           <a:prstGeom prst="roundRect">
             <a:avLst/>
@@ -6783,7 +7371,7 @@
           <a:solidFill>
             <a:srgbClr val="FFFFFF"/>
           </a:solidFill>
-          <a:ln w="22860">
+          <a:ln w="20320">
             <a:solidFill>
               <a:srgbClr val="B23A2A"/>
             </a:solidFill>
@@ -6814,14 +7402,14 @@
       </p:sp>
       <p:sp>
         <p:nvSpPr>
-          <p:cNvPr id="6" name="Oval 5"/>
+          <p:cNvPr id="7" name="Oval 6"/>
           <p:cNvSpPr/>
           <p:nvPr/>
         </p:nvSpPr>
         <p:spPr>
           <a:xfrm>
-            <a:off x="804672" y="1581912"/>
-            <a:ext cx="457200" cy="457200"/>
+            <a:off x="822960" y="2377440"/>
+            <a:ext cx="502920" cy="502920"/>
           </a:xfrm>
           <a:prstGeom prst="ellipse">
             <a:avLst/>
@@ -6858,14 +7446,14 @@
       </p:sp>
       <p:sp>
         <p:nvSpPr>
-          <p:cNvPr id="7" name="TextBox 6"/>
+          <p:cNvPr id="8" name="TextBox 7"/>
           <p:cNvSpPr txBox="1"/>
           <p:nvPr/>
         </p:nvSpPr>
         <p:spPr>
           <a:xfrm>
-            <a:off x="804672" y="1636776"/>
-            <a:ext cx="457200" cy="384048"/>
+            <a:off x="822960" y="2450592"/>
+            <a:ext cx="502920" cy="384048"/>
           </a:xfrm>
           <a:prstGeom prst="rect">
             <a:avLst/>
@@ -6878,9 +7466,16 @@
           </a:bodyPr>
           <a:lstStyle/>
           <a:p>
-            <a:pPr algn="ctr"/>
-            <a:r>
-              <a:rPr sz="1600" b="1">
+            <a:pPr algn="ctr">
+              <a:lnSpc>
+                <a:spcPct val="145000"/>
+              </a:lnSpc>
+              <a:spcAft>
+                <a:spcPts val="400"/>
+              </a:spcAft>
+            </a:pPr>
+            <a:r>
+              <a:rPr sz="1800" b="1">
                 <a:solidFill>
                   <a:srgbClr val="FFFFFF"/>
                 </a:solidFill>
@@ -6888,21 +7483,21 @@
                 <a:ea typeface="微软雅黑"/>
                 <a:cs typeface="微软雅黑"/>
               </a:rPr>
-              <a:t>!</a:t>
-            </a:r>
-          </a:p>
-        </p:txBody>
-      </p:sp>
-      <p:sp>
-        <p:nvSpPr>
-          <p:cNvPr id="8" name="TextBox 7"/>
+              <a:t>①</a:t>
+            </a:r>
+          </a:p>
+        </p:txBody>
+      </p:sp>
+      <p:sp>
+        <p:nvSpPr>
+          <p:cNvPr id="9" name="TextBox 8"/>
           <p:cNvSpPr txBox="1"/>
           <p:nvPr/>
         </p:nvSpPr>
         <p:spPr>
           <a:xfrm>
-            <a:off x="1371600" y="1527048"/>
-            <a:ext cx="4434840" cy="457200"/>
+            <a:off x="1508760" y="2395728"/>
+            <a:ext cx="2296058" cy="822960"/>
           </a:xfrm>
           <a:prstGeom prst="rect">
             <a:avLst/>
@@ -6917,33 +7512,36 @@
           <a:p>
             <a:pPr algn="l">
               <a:lnSpc>
-                <a:spcPct val="110000"/>
+                <a:spcPct val="130000"/>
               </a:lnSpc>
+              <a:spcAft>
+                <a:spcPts val="400"/>
+              </a:spcAft>
             </a:pPr>
             <a:r>
               <a:rPr sz="1600" b="1">
                 <a:solidFill>
-                  <a:srgbClr val="1C2A33"/>
+                  <a:srgbClr val="B23A2A"/>
                 </a:solidFill>
                 <a:latin typeface="微软雅黑"/>
                 <a:ea typeface="微软雅黑"/>
                 <a:cs typeface="微软雅黑"/>
               </a:rPr>
-              <a:t/>
-            </a:r>
-          </a:p>
-        </p:txBody>
-      </p:sp>
-      <p:sp>
-        <p:nvSpPr>
-          <p:cNvPr id="9" name="TextBox 8"/>
+              <a:t>从「感」到「评」的转换</a:t>
+            </a:r>
+          </a:p>
+        </p:txBody>
+      </p:sp>
+      <p:sp>
+        <p:nvSpPr>
+          <p:cNvPr id="10" name="TextBox 9"/>
           <p:cNvSpPr txBox="1"/>
           <p:nvPr/>
         </p:nvSpPr>
         <p:spPr>
           <a:xfrm>
-            <a:off x="1371600" y="1965960"/>
-            <a:ext cx="4434840" cy="1417320"/>
+            <a:off x="868680" y="3154680"/>
+            <a:ext cx="2936138" cy="2788920"/>
           </a:xfrm>
           <a:prstGeom prst="rect">
             <a:avLst/>
@@ -6958,11 +7556,14 @@
           <a:p>
             <a:pPr algn="l">
               <a:lnSpc>
-                <a:spcPct val="128000"/>
+                <a:spcPct val="145000"/>
               </a:lnSpc>
+              <a:spcAft>
+                <a:spcPts val="400"/>
+              </a:spcAft>
             </a:pPr>
             <a:r>
-              <a:rPr sz="1200" b="0">
+              <a:rPr sz="1350" b="0">
                 <a:solidFill>
                   <a:srgbClr val="1C2A33"/>
                 </a:solidFill>
@@ -6970,21 +7571,21 @@
                 <a:ea typeface="楷体"/>
                 <a:cs typeface="楷体"/>
               </a:rPr>
-              <a:t>① 从「感」到「评」的转换。原因：学生习惯读后感，需用例文对比「感」与「评」的差异。</a:t>
-            </a:r>
-          </a:p>
-        </p:txBody>
-      </p:sp>
-      <p:sp>
-        <p:nvSpPr>
-          <p:cNvPr id="10" name="Rounded Rectangle 9"/>
+              <a:t>从「感」到「评」的转换。原因：学生习惯读后感，需用例文对比「感」与「评」的差异。</a:t>
+            </a:r>
+          </a:p>
+        </p:txBody>
+      </p:sp>
+      <p:sp>
+        <p:nvSpPr>
+          <p:cNvPr id="11" name="Rounded Rectangle 10"/>
           <p:cNvSpPr/>
           <p:nvPr/>
         </p:nvSpPr>
         <p:spPr>
           <a:xfrm>
-            <a:off x="6263640" y="1417320"/>
-            <a:ext cx="5349240" cy="2057400"/>
+            <a:off x="4399178" y="2194560"/>
+            <a:ext cx="3393338" cy="3931920"/>
           </a:xfrm>
           <a:prstGeom prst="roundRect">
             <a:avLst/>
@@ -6992,9 +7593,9 @@
           <a:solidFill>
             <a:srgbClr val="FFFFFF"/>
           </a:solidFill>
-          <a:ln w="22860">
+          <a:ln w="20320">
             <a:solidFill>
-              <a:srgbClr val="B23A2A"/>
+              <a:srgbClr val="2E7D6B"/>
             </a:solidFill>
           </a:ln>
           <a:effectLst/>
@@ -7023,20 +7624,20 @@
       </p:sp>
       <p:sp>
         <p:nvSpPr>
-          <p:cNvPr id="11" name="Oval 10"/>
+          <p:cNvPr id="12" name="Oval 11"/>
           <p:cNvSpPr/>
           <p:nvPr/>
         </p:nvSpPr>
         <p:spPr>
           <a:xfrm>
-            <a:off x="6428232" y="1581912"/>
-            <a:ext cx="457200" cy="457200"/>
+            <a:off x="4582058" y="2377440"/>
+            <a:ext cx="502920" cy="502920"/>
           </a:xfrm>
           <a:prstGeom prst="ellipse">
             <a:avLst/>
           </a:prstGeom>
           <a:solidFill>
-            <a:srgbClr val="B23A2A"/>
+            <a:srgbClr val="2E7D6B"/>
           </a:solidFill>
           <a:ln>
             <a:noFill/>
@@ -7067,14 +7668,14 @@
       </p:sp>
       <p:sp>
         <p:nvSpPr>
-          <p:cNvPr id="12" name="TextBox 11"/>
+          <p:cNvPr id="13" name="TextBox 12"/>
           <p:cNvSpPr txBox="1"/>
           <p:nvPr/>
         </p:nvSpPr>
         <p:spPr>
           <a:xfrm>
-            <a:off x="6428232" y="1636776"/>
-            <a:ext cx="457200" cy="384048"/>
+            <a:off x="4582058" y="2450592"/>
+            <a:ext cx="502920" cy="384048"/>
           </a:xfrm>
           <a:prstGeom prst="rect">
             <a:avLst/>
@@ -7087,9 +7688,16 @@
           </a:bodyPr>
           <a:lstStyle/>
           <a:p>
-            <a:pPr algn="ctr"/>
-            <a:r>
-              <a:rPr sz="1600" b="1">
+            <a:pPr algn="ctr">
+              <a:lnSpc>
+                <a:spcPct val="145000"/>
+              </a:lnSpc>
+              <a:spcAft>
+                <a:spcPts val="400"/>
+              </a:spcAft>
+            </a:pPr>
+            <a:r>
+              <a:rPr sz="1800" b="1">
                 <a:solidFill>
                   <a:srgbClr val="FFFFFF"/>
                 </a:solidFill>
@@ -7097,21 +7705,21 @@
                 <a:ea typeface="微软雅黑"/>
                 <a:cs typeface="微软雅黑"/>
               </a:rPr>
-              <a:t>!</a:t>
-            </a:r>
-          </a:p>
-        </p:txBody>
-      </p:sp>
-      <p:sp>
-        <p:nvSpPr>
-          <p:cNvPr id="13" name="TextBox 12"/>
+              <a:t>②</a:t>
+            </a:r>
+          </a:p>
+        </p:txBody>
+      </p:sp>
+      <p:sp>
+        <p:nvSpPr>
+          <p:cNvPr id="14" name="TextBox 13"/>
           <p:cNvSpPr txBox="1"/>
           <p:nvPr/>
         </p:nvSpPr>
         <p:spPr>
           <a:xfrm>
-            <a:off x="6995160" y="1527048"/>
-            <a:ext cx="4434840" cy="457200"/>
+            <a:off x="5267858" y="2395728"/>
+            <a:ext cx="2296058" cy="822960"/>
           </a:xfrm>
           <a:prstGeom prst="rect">
             <a:avLst/>
@@ -7126,33 +7734,36 @@
           <a:p>
             <a:pPr algn="l">
               <a:lnSpc>
-                <a:spcPct val="110000"/>
+                <a:spcPct val="130000"/>
               </a:lnSpc>
+              <a:spcAft>
+                <a:spcPts val="400"/>
+              </a:spcAft>
             </a:pPr>
             <a:r>
               <a:rPr sz="1600" b="1">
                 <a:solidFill>
-                  <a:srgbClr val="1C2A33"/>
+                  <a:srgbClr val="2E7D6B"/>
                 </a:solidFill>
                 <a:latin typeface="微软雅黑"/>
                 <a:ea typeface="微软雅黑"/>
                 <a:cs typeface="微软雅黑"/>
               </a:rPr>
-              <a:t/>
-            </a:r>
-          </a:p>
-        </p:txBody>
-      </p:sp>
-      <p:sp>
-        <p:nvSpPr>
-          <p:cNvPr id="14" name="TextBox 13"/>
+              <a:t>选点聚焦。原因</a:t>
+            </a:r>
+          </a:p>
+        </p:txBody>
+      </p:sp>
+      <p:sp>
+        <p:nvSpPr>
+          <p:cNvPr id="15" name="TextBox 14"/>
           <p:cNvSpPr txBox="1"/>
           <p:nvPr/>
         </p:nvSpPr>
         <p:spPr>
           <a:xfrm>
-            <a:off x="6995160" y="1965960"/>
-            <a:ext cx="4434840" cy="1417320"/>
+            <a:off x="4627778" y="3154680"/>
+            <a:ext cx="2936138" cy="2788920"/>
           </a:xfrm>
           <a:prstGeom prst="rect">
             <a:avLst/>
@@ -7167,11 +7778,14 @@
           <a:p>
             <a:pPr algn="l">
               <a:lnSpc>
-                <a:spcPct val="128000"/>
+                <a:spcPct val="145000"/>
               </a:lnSpc>
+              <a:spcAft>
+                <a:spcPts val="400"/>
+              </a:spcAft>
             </a:pPr>
             <a:r>
-              <a:rPr sz="1400" b="0">
+              <a:rPr sz="1350" b="0">
                 <a:solidFill>
                   <a:srgbClr val="1C2A33"/>
                 </a:solidFill>
@@ -7179,21 +7793,21 @@
                 <a:ea typeface="楷体"/>
                 <a:cs typeface="楷体"/>
               </a:rPr>
-              <a:t>② 选点聚焦。原因：学生爱写「全诗赏析」，需约束「只写一个词/一句」。</a:t>
-            </a:r>
-          </a:p>
-        </p:txBody>
-      </p:sp>
-      <p:sp>
-        <p:nvSpPr>
-          <p:cNvPr id="15" name="Rounded Rectangle 14"/>
+              <a:t>学生爱写「全诗赏析」，需约束「只写一个词/一句」。</a:t>
+            </a:r>
+          </a:p>
+        </p:txBody>
+      </p:sp>
+      <p:sp>
+        <p:nvSpPr>
+          <p:cNvPr id="16" name="Rounded Rectangle 15"/>
           <p:cNvSpPr/>
           <p:nvPr/>
         </p:nvSpPr>
         <p:spPr>
           <a:xfrm>
-            <a:off x="640080" y="3703320"/>
-            <a:ext cx="5349240" cy="2057400"/>
+            <a:off x="8158276" y="2194560"/>
+            <a:ext cx="3393338" cy="3931920"/>
           </a:xfrm>
           <a:prstGeom prst="roundRect">
             <a:avLst/>
@@ -7201,9 +7815,9 @@
           <a:solidFill>
             <a:srgbClr val="FFFFFF"/>
           </a:solidFill>
-          <a:ln w="22860">
+          <a:ln w="20320">
             <a:solidFill>
-              <a:srgbClr val="B23A2A"/>
+              <a:srgbClr val="C8A86B"/>
             </a:solidFill>
           </a:ln>
           <a:effectLst/>
@@ -7232,20 +7846,20 @@
       </p:sp>
       <p:sp>
         <p:nvSpPr>
-          <p:cNvPr id="16" name="Oval 15"/>
+          <p:cNvPr id="17" name="Oval 16"/>
           <p:cNvSpPr/>
           <p:nvPr/>
         </p:nvSpPr>
         <p:spPr>
           <a:xfrm>
-            <a:off x="804672" y="3867912"/>
-            <a:ext cx="457200" cy="457200"/>
+            <a:off x="8341156" y="2377440"/>
+            <a:ext cx="502920" cy="502920"/>
           </a:xfrm>
           <a:prstGeom prst="ellipse">
             <a:avLst/>
           </a:prstGeom>
           <a:solidFill>
-            <a:srgbClr val="B23A2A"/>
+            <a:srgbClr val="C8A86B"/>
           </a:solidFill>
           <a:ln>
             <a:noFill/>
@@ -7276,14 +7890,14 @@
       </p:sp>
       <p:sp>
         <p:nvSpPr>
-          <p:cNvPr id="17" name="TextBox 16"/>
+          <p:cNvPr id="18" name="TextBox 17"/>
           <p:cNvSpPr txBox="1"/>
           <p:nvPr/>
         </p:nvSpPr>
         <p:spPr>
           <a:xfrm>
-            <a:off x="804672" y="3922776"/>
-            <a:ext cx="457200" cy="384048"/>
+            <a:off x="8341156" y="2450592"/>
+            <a:ext cx="502920" cy="384048"/>
           </a:xfrm>
           <a:prstGeom prst="rect">
             <a:avLst/>
@@ -7296,9 +7910,16 @@
           </a:bodyPr>
           <a:lstStyle/>
           <a:p>
-            <a:pPr algn="ctr"/>
-            <a:r>
-              <a:rPr sz="1600" b="1">
+            <a:pPr algn="ctr">
+              <a:lnSpc>
+                <a:spcPct val="145000"/>
+              </a:lnSpc>
+              <a:spcAft>
+                <a:spcPts val="400"/>
+              </a:spcAft>
+            </a:pPr>
+            <a:r>
+              <a:rPr sz="1800" b="1">
                 <a:solidFill>
                   <a:srgbClr val="FFFFFF"/>
                 </a:solidFill>
@@ -7306,21 +7927,21 @@
                 <a:ea typeface="微软雅黑"/>
                 <a:cs typeface="微软雅黑"/>
               </a:rPr>
-              <a:t>!</a:t>
-            </a:r>
-          </a:p>
-        </p:txBody>
-      </p:sp>
-      <p:sp>
-        <p:nvSpPr>
-          <p:cNvPr id="18" name="TextBox 17"/>
+              <a:t>③</a:t>
+            </a:r>
+          </a:p>
+        </p:txBody>
+      </p:sp>
+      <p:sp>
+        <p:nvSpPr>
+          <p:cNvPr id="19" name="TextBox 18"/>
           <p:cNvSpPr txBox="1"/>
           <p:nvPr/>
         </p:nvSpPr>
         <p:spPr>
           <a:xfrm>
-            <a:off x="1371600" y="3813048"/>
-            <a:ext cx="4434840" cy="457200"/>
+            <a:off x="9026956" y="2395728"/>
+            <a:ext cx="2296058" cy="822960"/>
           </a:xfrm>
           <a:prstGeom prst="rect">
             <a:avLst/>
@@ -7335,33 +7956,36 @@
           <a:p>
             <a:pPr algn="l">
               <a:lnSpc>
-                <a:spcPct val="110000"/>
+                <a:spcPct val="130000"/>
               </a:lnSpc>
+              <a:spcAft>
+                <a:spcPts val="400"/>
+              </a:spcAft>
             </a:pPr>
             <a:r>
               <a:rPr sz="1600" b="1">
                 <a:solidFill>
-                  <a:srgbClr val="1C2A33"/>
+                  <a:srgbClr val="C8A86B"/>
                 </a:solidFill>
                 <a:latin typeface="微软雅黑"/>
                 <a:ea typeface="微软雅黑"/>
                 <a:cs typeface="微软雅黑"/>
               </a:rPr>
-              <a:t/>
-            </a:r>
-          </a:p>
-        </p:txBody>
-      </p:sp>
-      <p:sp>
-        <p:nvSpPr>
-          <p:cNvPr id="19" name="TextBox 18"/>
+              <a:t>分析不空泛。原因</a:t>
+            </a:r>
+          </a:p>
+        </p:txBody>
+      </p:sp>
+      <p:sp>
+        <p:nvSpPr>
+          <p:cNvPr id="20" name="TextBox 19"/>
           <p:cNvSpPr txBox="1"/>
           <p:nvPr/>
         </p:nvSpPr>
         <p:spPr>
           <a:xfrm>
-            <a:off x="1371600" y="4251960"/>
-            <a:ext cx="4434840" cy="1417320"/>
+            <a:off x="8386876" y="3154680"/>
+            <a:ext cx="2936138" cy="2788920"/>
           </a:xfrm>
           <a:prstGeom prst="rect">
             <a:avLst/>
@@ -7376,11 +8000,14 @@
           <a:p>
             <a:pPr algn="l">
               <a:lnSpc>
-                <a:spcPct val="128000"/>
+                <a:spcPct val="145000"/>
               </a:lnSpc>
+              <a:spcAft>
+                <a:spcPts val="400"/>
+              </a:spcAft>
             </a:pPr>
             <a:r>
-              <a:rPr sz="1200" b="0">
+              <a:rPr sz="1350" b="0">
                 <a:solidFill>
                   <a:srgbClr val="1C2A33"/>
                 </a:solidFill>
@@ -7388,14 +8015,14 @@
                 <a:ea typeface="楷体"/>
                 <a:cs typeface="楷体"/>
               </a:rPr>
-              <a:t>③ 分析不空泛。原因：需提供「分析句式支架」（如「此处X手法，营造Y效果，传达Z情感」）。</a:t>
-            </a:r>
-          </a:p>
-        </p:txBody>
-      </p:sp>
-      <p:sp>
-        <p:nvSpPr>
-          <p:cNvPr id="20" name="TextBox 19"/>
+              <a:t>需提供「分析句式支架」（如「此处X手法，营造Y效果，传达Z情感」）。</a:t>
+            </a:r>
+          </a:p>
+        </p:txBody>
+      </p:sp>
+      <p:sp>
+        <p:nvSpPr>
+          <p:cNvPr id="21" name="TextBox 20"/>
           <p:cNvSpPr txBox="1"/>
           <p:nvPr/>
         </p:nvSpPr>
@@ -7522,13 +8149,13 @@
             <a:r>
               <a:rPr sz="1300" b="1">
                 <a:solidFill>
-                  <a:srgbClr val="C8A86B"/>
+                  <a:srgbClr val="B23A2A"/>
                 </a:solidFill>
                 <a:latin typeface="微软雅黑"/>
                 <a:ea typeface="微软雅黑"/>
                 <a:cs typeface="微软雅黑"/>
               </a:rPr>
-              <a:t>要点板书</a:t>
+              <a:t>板书精华</a:t>
             </a:r>
           </a:p>
         </p:txBody>
@@ -7548,7 +8175,7 @@
             <a:avLst/>
           </a:prstGeom>
           <a:solidFill>
-            <a:srgbClr val="C8A86B"/>
+            <a:srgbClr val="B23A2A"/>
           </a:solidFill>
           <a:ln>
             <a:noFill/>
@@ -7579,24 +8206,68 @@
       </p:sp>
       <p:sp>
         <p:nvSpPr>
-          <p:cNvPr id="5" name="Rounded Rectangle 4"/>
+          <p:cNvPr id="5" name="TextBox 4"/>
+          <p:cNvSpPr txBox="1"/>
+          <p:nvPr/>
+        </p:nvSpPr>
+        <p:spPr>
+          <a:xfrm>
+            <a:off x="640080" y="1325880"/>
+            <a:ext cx="10911535" cy="548640"/>
+          </a:xfrm>
+          <a:prstGeom prst="rect">
+            <a:avLst/>
+          </a:prstGeom>
+          <a:noFill/>
+        </p:spPr>
+        <p:txBody>
+          <a:bodyPr wrap="square" anchor="t" lIns="0" rIns="0" tIns="0" bIns="0">
+            <a:spAutoFit/>
+          </a:bodyPr>
+          <a:lstStyle/>
+          <a:p>
+            <a:pPr algn="l">
+              <a:lnSpc>
+                <a:spcPct val="145000"/>
+              </a:lnSpc>
+              <a:spcAft>
+                <a:spcPts val="400"/>
+              </a:spcAft>
+            </a:pPr>
+            <a:r>
+              <a:rPr sz="2600" b="1">
+                <a:solidFill>
+                  <a:srgbClr val="1C2A33"/>
+                </a:solidFill>
+                <a:latin typeface="楷体"/>
+                <a:ea typeface="楷体"/>
+                <a:cs typeface="楷体"/>
+              </a:rPr>
+              <a:t>本课结构精华</a:t>
+            </a:r>
+          </a:p>
+        </p:txBody>
+      </p:sp>
+      <p:sp>
+        <p:nvSpPr>
+          <p:cNvPr id="6" name="Rounded Rectangle 5"/>
           <p:cNvSpPr/>
           <p:nvPr/>
         </p:nvSpPr>
         <p:spPr>
           <a:xfrm>
-            <a:off x="640080" y="1417320"/>
-            <a:ext cx="10911535" cy="5394960"/>
+            <a:off x="640080" y="2011680"/>
+            <a:ext cx="10911535" cy="4480560"/>
           </a:xfrm>
           <a:prstGeom prst="roundRect">
             <a:avLst/>
           </a:prstGeom>
           <a:solidFill>
-            <a:srgbClr val="FFFFFF"/>
+            <a:srgbClr val="E7DFD2"/>
           </a:solidFill>
-          <a:ln w="25400">
+          <a:ln w="12700">
             <a:solidFill>
-              <a:srgbClr val="C8A86B"/>
+              <a:srgbClr val="6B6258"/>
             </a:solidFill>
           </a:ln>
           <a:effectLst/>
@@ -7625,14 +8296,14 @@
       </p:sp>
       <p:sp>
         <p:nvSpPr>
-          <p:cNvPr id="6" name="TextBox 5"/>
+          <p:cNvPr id="7" name="TextBox 6"/>
           <p:cNvSpPr txBox="1"/>
           <p:nvPr/>
         </p:nvSpPr>
         <p:spPr>
           <a:xfrm>
-            <a:off x="914400" y="1554480"/>
-            <a:ext cx="10362895" cy="5120640"/>
+            <a:off x="914400" y="2148840"/>
+            <a:ext cx="4907127" cy="4206240"/>
           </a:xfrm>
           <a:prstGeom prst="rect">
             <a:avLst/>
@@ -7647,49 +8318,388 @@
           <a:p>
             <a:pPr algn="l">
               <a:lnSpc>
-                <a:spcPct val="110000"/>
+                <a:spcPct val="135000"/>
               </a:lnSpc>
               <a:spcAft>
-                <a:spcPts val="100"/>
+                <a:spcPts val="300"/>
               </a:spcAft>
             </a:pPr>
             <a:r>
-              <a:rPr sz="1300" b="0">
+              <a:rPr sz="1250" b="0">
                 <a:solidFill>
                   <a:srgbClr val="1C2A33"/>
                 </a:solidFill>
-                <a:latin typeface="微软雅黑"/>
-                <a:ea typeface="微软雅黑"/>
-                <a:cs typeface="微软雅黑"/>
-              </a:rPr>
-              <a:t>┌── 学写文学短评 ──┐
-│ 读后感(谈我) │
-│ 短评 (析文) │
-│ │
-│ 【四步法】 │
-│ ①选点(小) │
-│ ②引文(标出处) │
-│ ③分析(为何好) │
-│ ④提升(风格/普遍) │
-│ │
-│ 示范: │
-│ 点=击字 │
-│ 引=鹰击长空 │
-│ 析=显力度 │
-│ 升=炼字见雄健 │
-│ │
-│ 【句式支架】 │
-│ 此处X手法, │
-│ 营造Y效果, │
-│ 传达Z情感 │
-└──────────────────┘</a:t>
-            </a:r>
-          </a:p>
-        </p:txBody>
-      </p:sp>
-      <p:sp>
-        <p:nvSpPr>
-          <p:cNvPr id="7" name="TextBox 6"/>
+                <a:latin typeface="楷体"/>
+                <a:ea typeface="楷体"/>
+                <a:cs typeface="楷体"/>
+              </a:rPr>
+              <a:t>学写文学短评</a:t>
+            </a:r>
+          </a:p>
+          <a:p>
+            <a:pPr algn="l">
+              <a:lnSpc>
+                <a:spcPct val="135000"/>
+              </a:lnSpc>
+              <a:spcAft>
+                <a:spcPts val="300"/>
+              </a:spcAft>
+            </a:pPr>
+            <a:r>
+              <a:rPr sz="1250" b="0">
+                <a:solidFill>
+                  <a:srgbClr val="1C2A33"/>
+                </a:solidFill>
+                <a:latin typeface="楷体"/>
+                <a:ea typeface="楷体"/>
+                <a:cs typeface="楷体"/>
+              </a:rPr>
+              <a:t>读后感(谈我)</a:t>
+            </a:r>
+          </a:p>
+          <a:p>
+            <a:pPr algn="l">
+              <a:lnSpc>
+                <a:spcPct val="135000"/>
+              </a:lnSpc>
+              <a:spcAft>
+                <a:spcPts val="300"/>
+              </a:spcAft>
+            </a:pPr>
+            <a:r>
+              <a:rPr sz="1250" b="0">
+                <a:solidFill>
+                  <a:srgbClr val="1C2A33"/>
+                </a:solidFill>
+                <a:latin typeface="楷体"/>
+                <a:ea typeface="楷体"/>
+                <a:cs typeface="楷体"/>
+              </a:rPr>
+              <a:t>短评 (析文)</a:t>
+            </a:r>
+          </a:p>
+          <a:p>
+            <a:pPr algn="l">
+              <a:lnSpc>
+                <a:spcPct val="135000"/>
+              </a:lnSpc>
+              <a:spcAft>
+                <a:spcPts val="300"/>
+              </a:spcAft>
+            </a:pPr>
+            <a:r>
+              <a:rPr sz="1250" b="0">
+                <a:solidFill>
+                  <a:srgbClr val="1C2A33"/>
+                </a:solidFill>
+                <a:latin typeface="楷体"/>
+                <a:ea typeface="楷体"/>
+                <a:cs typeface="楷体"/>
+              </a:rPr>
+              <a:t>【四步法】</a:t>
+            </a:r>
+          </a:p>
+          <a:p>
+            <a:pPr algn="l">
+              <a:lnSpc>
+                <a:spcPct val="135000"/>
+              </a:lnSpc>
+              <a:spcAft>
+                <a:spcPts val="300"/>
+              </a:spcAft>
+            </a:pPr>
+            <a:r>
+              <a:rPr sz="1250" b="0">
+                <a:solidFill>
+                  <a:srgbClr val="1C2A33"/>
+                </a:solidFill>
+                <a:latin typeface="楷体"/>
+                <a:ea typeface="楷体"/>
+                <a:cs typeface="楷体"/>
+              </a:rPr>
+              <a:t>①选点(小)</a:t>
+            </a:r>
+          </a:p>
+          <a:p>
+            <a:pPr algn="l">
+              <a:lnSpc>
+                <a:spcPct val="135000"/>
+              </a:lnSpc>
+              <a:spcAft>
+                <a:spcPts val="300"/>
+              </a:spcAft>
+            </a:pPr>
+            <a:r>
+              <a:rPr sz="1250" b="0">
+                <a:solidFill>
+                  <a:srgbClr val="1C2A33"/>
+                </a:solidFill>
+                <a:latin typeface="楷体"/>
+                <a:ea typeface="楷体"/>
+                <a:cs typeface="楷体"/>
+              </a:rPr>
+              <a:t>②引文(标出处)</a:t>
+            </a:r>
+          </a:p>
+          <a:p>
+            <a:pPr algn="l">
+              <a:lnSpc>
+                <a:spcPct val="135000"/>
+              </a:lnSpc>
+              <a:spcAft>
+                <a:spcPts val="300"/>
+              </a:spcAft>
+            </a:pPr>
+            <a:r>
+              <a:rPr sz="1250" b="0">
+                <a:solidFill>
+                  <a:srgbClr val="1C2A33"/>
+                </a:solidFill>
+                <a:latin typeface="楷体"/>
+                <a:ea typeface="楷体"/>
+                <a:cs typeface="楷体"/>
+              </a:rPr>
+              <a:t>③分析(为何好)</a:t>
+            </a:r>
+          </a:p>
+          <a:p>
+            <a:pPr algn="l">
+              <a:lnSpc>
+                <a:spcPct val="135000"/>
+              </a:lnSpc>
+              <a:spcAft>
+                <a:spcPts val="300"/>
+              </a:spcAft>
+            </a:pPr>
+            <a:r>
+              <a:rPr sz="1250" b="0">
+                <a:solidFill>
+                  <a:srgbClr val="1C2A33"/>
+                </a:solidFill>
+                <a:latin typeface="楷体"/>
+                <a:ea typeface="楷体"/>
+                <a:cs typeface="楷体"/>
+              </a:rPr>
+              <a:t>④提升(风格/普遍)</a:t>
+            </a:r>
+          </a:p>
+          <a:p>
+            <a:pPr algn="l">
+              <a:lnSpc>
+                <a:spcPct val="135000"/>
+              </a:lnSpc>
+              <a:spcAft>
+                <a:spcPts val="300"/>
+              </a:spcAft>
+            </a:pPr>
+            <a:r>
+              <a:rPr sz="1250" b="0">
+                <a:solidFill>
+                  <a:srgbClr val="1C2A33"/>
+                </a:solidFill>
+                <a:latin typeface="楷体"/>
+                <a:ea typeface="楷体"/>
+                <a:cs typeface="楷体"/>
+              </a:rPr>
+              <a:t>示范:</a:t>
+            </a:r>
+          </a:p>
+        </p:txBody>
+      </p:sp>
+      <p:sp>
+        <p:nvSpPr>
+          <p:cNvPr id="8" name="TextBox 7"/>
+          <p:cNvSpPr txBox="1"/>
+          <p:nvPr/>
+        </p:nvSpPr>
+        <p:spPr>
+          <a:xfrm>
+            <a:off x="6095847" y="2148840"/>
+            <a:ext cx="4907127" cy="4206240"/>
+          </a:xfrm>
+          <a:prstGeom prst="rect">
+            <a:avLst/>
+          </a:prstGeom>
+          <a:noFill/>
+        </p:spPr>
+        <p:txBody>
+          <a:bodyPr wrap="square" anchor="t" lIns="0" rIns="0" tIns="0" bIns="0">
+            <a:spAutoFit/>
+          </a:bodyPr>
+          <a:lstStyle/>
+          <a:p>
+            <a:pPr algn="l">
+              <a:lnSpc>
+                <a:spcPct val="135000"/>
+              </a:lnSpc>
+              <a:spcAft>
+                <a:spcPts val="300"/>
+              </a:spcAft>
+            </a:pPr>
+            <a:r>
+              <a:rPr sz="1250" b="0">
+                <a:solidFill>
+                  <a:srgbClr val="1C2A33"/>
+                </a:solidFill>
+                <a:latin typeface="楷体"/>
+                <a:ea typeface="楷体"/>
+                <a:cs typeface="楷体"/>
+              </a:rPr>
+              <a:t>点=击字</a:t>
+            </a:r>
+          </a:p>
+          <a:p>
+            <a:pPr algn="l">
+              <a:lnSpc>
+                <a:spcPct val="135000"/>
+              </a:lnSpc>
+              <a:spcAft>
+                <a:spcPts val="300"/>
+              </a:spcAft>
+            </a:pPr>
+            <a:r>
+              <a:rPr sz="1250" b="0">
+                <a:solidFill>
+                  <a:srgbClr val="1C2A33"/>
+                </a:solidFill>
+                <a:latin typeface="楷体"/>
+                <a:ea typeface="楷体"/>
+                <a:cs typeface="楷体"/>
+              </a:rPr>
+              <a:t>引=鹰击长空</a:t>
+            </a:r>
+          </a:p>
+          <a:p>
+            <a:pPr algn="l">
+              <a:lnSpc>
+                <a:spcPct val="135000"/>
+              </a:lnSpc>
+              <a:spcAft>
+                <a:spcPts val="300"/>
+              </a:spcAft>
+            </a:pPr>
+            <a:r>
+              <a:rPr sz="1250" b="0">
+                <a:solidFill>
+                  <a:srgbClr val="1C2A33"/>
+                </a:solidFill>
+                <a:latin typeface="楷体"/>
+                <a:ea typeface="楷体"/>
+                <a:cs typeface="楷体"/>
+              </a:rPr>
+              <a:t>析=显力度</a:t>
+            </a:r>
+          </a:p>
+          <a:p>
+            <a:pPr algn="l">
+              <a:lnSpc>
+                <a:spcPct val="135000"/>
+              </a:lnSpc>
+              <a:spcAft>
+                <a:spcPts val="300"/>
+              </a:spcAft>
+            </a:pPr>
+            <a:r>
+              <a:rPr sz="1250" b="0">
+                <a:solidFill>
+                  <a:srgbClr val="1C2A33"/>
+                </a:solidFill>
+                <a:latin typeface="楷体"/>
+                <a:ea typeface="楷体"/>
+                <a:cs typeface="楷体"/>
+              </a:rPr>
+              <a:t>升=炼字见雄健</a:t>
+            </a:r>
+          </a:p>
+          <a:p>
+            <a:pPr algn="l">
+              <a:lnSpc>
+                <a:spcPct val="135000"/>
+              </a:lnSpc>
+              <a:spcAft>
+                <a:spcPts val="300"/>
+              </a:spcAft>
+            </a:pPr>
+            <a:r>
+              <a:rPr sz="1250" b="0">
+                <a:solidFill>
+                  <a:srgbClr val="1C2A33"/>
+                </a:solidFill>
+                <a:latin typeface="楷体"/>
+                <a:ea typeface="楷体"/>
+                <a:cs typeface="楷体"/>
+              </a:rPr>
+              <a:t>【句式支架】</a:t>
+            </a:r>
+          </a:p>
+          <a:p>
+            <a:pPr algn="l">
+              <a:lnSpc>
+                <a:spcPct val="135000"/>
+              </a:lnSpc>
+              <a:spcAft>
+                <a:spcPts val="300"/>
+              </a:spcAft>
+            </a:pPr>
+            <a:r>
+              <a:rPr sz="1250" b="0">
+                <a:solidFill>
+                  <a:srgbClr val="1C2A33"/>
+                </a:solidFill>
+                <a:latin typeface="楷体"/>
+                <a:ea typeface="楷体"/>
+                <a:cs typeface="楷体"/>
+              </a:rPr>
+              <a:t>此处X手法,</a:t>
+            </a:r>
+          </a:p>
+          <a:p>
+            <a:pPr algn="l">
+              <a:lnSpc>
+                <a:spcPct val="135000"/>
+              </a:lnSpc>
+              <a:spcAft>
+                <a:spcPts val="300"/>
+              </a:spcAft>
+            </a:pPr>
+            <a:r>
+              <a:rPr sz="1250" b="0">
+                <a:solidFill>
+                  <a:srgbClr val="1C2A33"/>
+                </a:solidFill>
+                <a:latin typeface="楷体"/>
+                <a:ea typeface="楷体"/>
+                <a:cs typeface="楷体"/>
+              </a:rPr>
+              <a:t>营造Y效果,</a:t>
+            </a:r>
+          </a:p>
+          <a:p>
+            <a:pPr algn="l">
+              <a:lnSpc>
+                <a:spcPct val="135000"/>
+              </a:lnSpc>
+              <a:spcAft>
+                <a:spcPts val="300"/>
+              </a:spcAft>
+            </a:pPr>
+            <a:r>
+              <a:rPr sz="1250" b="0">
+                <a:solidFill>
+                  <a:srgbClr val="1C2A33"/>
+                </a:solidFill>
+                <a:latin typeface="楷体"/>
+                <a:ea typeface="楷体"/>
+                <a:cs typeface="楷体"/>
+              </a:rPr>
+              <a:t>传达Z情感</a:t>
+            </a:r>
+          </a:p>
+        </p:txBody>
+      </p:sp>
+      <p:sp>
+        <p:nvSpPr>
+          <p:cNvPr id="9" name="TextBox 8"/>
           <p:cNvSpPr txBox="1"/>
           <p:nvPr/>
         </p:nvSpPr>
@@ -7816,13 +8826,13 @@
             <a:r>
               <a:rPr sz="1300" b="1">
                 <a:solidFill>
-                  <a:srgbClr val="2E7D6B"/>
+                  <a:srgbClr val="B23A2A"/>
                 </a:solidFill>
                 <a:latin typeface="微软雅黑"/>
                 <a:ea typeface="微软雅黑"/>
                 <a:cs typeface="微软雅黑"/>
               </a:rPr>
-              <a:t>分层作业</a:t>
+              <a:t>作业 · 分层</a:t>
             </a:r>
           </a:p>
         </p:txBody>
@@ -7837,6 +8847,318 @@
           <a:xfrm>
             <a:off x="640080" y="1097280"/>
             <a:ext cx="822960" cy="30480"/>
+          </a:xfrm>
+          <a:prstGeom prst="rect">
+            <a:avLst/>
+          </a:prstGeom>
+          <a:solidFill>
+            <a:srgbClr val="B23A2A"/>
+          </a:solidFill>
+          <a:ln>
+            <a:noFill/>
+          </a:ln>
+          <a:effectLst/>
+        </p:spPr>
+        <p:style>
+          <a:lnRef idx="1">
+            <a:schemeClr val="accent1"/>
+          </a:lnRef>
+          <a:fillRef idx="3">
+            <a:schemeClr val="accent1"/>
+          </a:fillRef>
+          <a:effectRef idx="2">
+            <a:schemeClr val="accent1"/>
+          </a:effectRef>
+          <a:fontRef idx="minor">
+            <a:schemeClr val="lt1"/>
+          </a:fontRef>
+        </p:style>
+        <p:txBody>
+          <a:bodyPr rtlCol="0" anchor="ctr"/>
+          <a:lstStyle/>
+          <a:p>
+            <a:pPr algn="ctr"/>
+          </a:p>
+        </p:txBody>
+      </p:sp>
+      <p:sp>
+        <p:nvSpPr>
+          <p:cNvPr id="5" name="TextBox 4"/>
+          <p:cNvSpPr txBox="1"/>
+          <p:nvPr/>
+        </p:nvSpPr>
+        <p:spPr>
+          <a:xfrm>
+            <a:off x="640080" y="1325880"/>
+            <a:ext cx="10911535" cy="548640"/>
+          </a:xfrm>
+          <a:prstGeom prst="rect">
+            <a:avLst/>
+          </a:prstGeom>
+          <a:noFill/>
+        </p:spPr>
+        <p:txBody>
+          <a:bodyPr wrap="square" anchor="t" lIns="0" rIns="0" tIns="0" bIns="0">
+            <a:spAutoFit/>
+          </a:bodyPr>
+          <a:lstStyle/>
+          <a:p>
+            <a:pPr algn="l">
+              <a:lnSpc>
+                <a:spcPct val="145000"/>
+              </a:lnSpc>
+              <a:spcAft>
+                <a:spcPts val="400"/>
+              </a:spcAft>
+            </a:pPr>
+            <a:r>
+              <a:rPr sz="2600" b="1">
+                <a:solidFill>
+                  <a:srgbClr val="1C2A33"/>
+                </a:solidFill>
+                <a:latin typeface="楷体"/>
+                <a:ea typeface="楷体"/>
+                <a:cs typeface="楷体"/>
+              </a:rPr>
+              <a:t>基础 · 提升</a:t>
+            </a:r>
+          </a:p>
+        </p:txBody>
+      </p:sp>
+      <p:sp>
+        <p:nvSpPr>
+          <p:cNvPr id="6" name="Rounded Rectangle 5"/>
+          <p:cNvSpPr/>
+          <p:nvPr/>
+        </p:nvSpPr>
+        <p:spPr>
+          <a:xfrm>
+            <a:off x="640080" y="2194560"/>
+            <a:ext cx="5272887" cy="4023360"/>
+          </a:xfrm>
+          <a:prstGeom prst="roundRect">
+            <a:avLst/>
+          </a:prstGeom>
+          <a:solidFill>
+            <a:srgbClr val="FFFFFF"/>
+          </a:solidFill>
+          <a:ln w="20320">
+            <a:solidFill>
+              <a:srgbClr val="B23A2A"/>
+            </a:solidFill>
+          </a:ln>
+          <a:effectLst/>
+        </p:spPr>
+        <p:style>
+          <a:lnRef idx="1">
+            <a:schemeClr val="accent1"/>
+          </a:lnRef>
+          <a:fillRef idx="3">
+            <a:schemeClr val="accent1"/>
+          </a:fillRef>
+          <a:effectRef idx="2">
+            <a:schemeClr val="accent1"/>
+          </a:effectRef>
+          <a:fontRef idx="minor">
+            <a:schemeClr val="lt1"/>
+          </a:fontRef>
+        </p:style>
+        <p:txBody>
+          <a:bodyPr rtlCol="0" anchor="ctr"/>
+          <a:lstStyle/>
+          <a:p>
+            <a:pPr algn="ctr"/>
+          </a:p>
+        </p:txBody>
+      </p:sp>
+      <p:sp>
+        <p:nvSpPr>
+          <p:cNvPr id="7" name="Rectangle 6"/>
+          <p:cNvSpPr/>
+          <p:nvPr/>
+        </p:nvSpPr>
+        <p:spPr>
+          <a:xfrm>
+            <a:off x="640080" y="2194560"/>
+            <a:ext cx="5272887" cy="548640"/>
+          </a:xfrm>
+          <a:prstGeom prst="rect">
+            <a:avLst/>
+          </a:prstGeom>
+          <a:solidFill>
+            <a:srgbClr val="B23A2A"/>
+          </a:solidFill>
+          <a:ln>
+            <a:noFill/>
+          </a:ln>
+          <a:effectLst/>
+        </p:spPr>
+        <p:style>
+          <a:lnRef idx="1">
+            <a:schemeClr val="accent1"/>
+          </a:lnRef>
+          <a:fillRef idx="3">
+            <a:schemeClr val="accent1"/>
+          </a:fillRef>
+          <a:effectRef idx="2">
+            <a:schemeClr val="accent1"/>
+          </a:effectRef>
+          <a:fontRef idx="minor">
+            <a:schemeClr val="lt1"/>
+          </a:fontRef>
+        </p:style>
+        <p:txBody>
+          <a:bodyPr rtlCol="0" anchor="ctr"/>
+          <a:lstStyle/>
+          <a:p>
+            <a:pPr algn="ctr"/>
+          </a:p>
+        </p:txBody>
+      </p:sp>
+      <p:sp>
+        <p:nvSpPr>
+          <p:cNvPr id="8" name="TextBox 7"/>
+          <p:cNvSpPr txBox="1"/>
+          <p:nvPr/>
+        </p:nvSpPr>
+        <p:spPr>
+          <a:xfrm>
+            <a:off x="640080" y="2304288"/>
+            <a:ext cx="5272887" cy="365760"/>
+          </a:xfrm>
+          <a:prstGeom prst="rect">
+            <a:avLst/>
+          </a:prstGeom>
+          <a:noFill/>
+        </p:spPr>
+        <p:txBody>
+          <a:bodyPr wrap="square" anchor="t" lIns="0" rIns="0" tIns="0" bIns="0">
+            <a:spAutoFit/>
+          </a:bodyPr>
+          <a:lstStyle/>
+          <a:p>
+            <a:pPr algn="ctr">
+              <a:lnSpc>
+                <a:spcPct val="145000"/>
+              </a:lnSpc>
+              <a:spcAft>
+                <a:spcPts val="400"/>
+              </a:spcAft>
+            </a:pPr>
+            <a:r>
+              <a:rPr sz="1600" b="1">
+                <a:solidFill>
+                  <a:srgbClr val="FFFFFF"/>
+                </a:solidFill>
+                <a:latin typeface="微软雅黑"/>
+                <a:ea typeface="微软雅黑"/>
+                <a:cs typeface="微软雅黑"/>
+              </a:rPr>
+              <a:t>基础 · 必做</a:t>
+            </a:r>
+          </a:p>
+        </p:txBody>
+      </p:sp>
+      <p:sp>
+        <p:nvSpPr>
+          <p:cNvPr id="9" name="TextBox 8"/>
+          <p:cNvSpPr txBox="1"/>
+          <p:nvPr/>
+        </p:nvSpPr>
+        <p:spPr>
+          <a:xfrm>
+            <a:off x="914400" y="2971800"/>
+            <a:ext cx="4724247" cy="3063240"/>
+          </a:xfrm>
+          <a:prstGeom prst="rect">
+            <a:avLst/>
+          </a:prstGeom>
+          <a:noFill/>
+        </p:spPr>
+        <p:txBody>
+          <a:bodyPr wrap="square" anchor="t" lIns="0" rIns="0" tIns="0" bIns="0">
+            <a:spAutoFit/>
+          </a:bodyPr>
+          <a:lstStyle/>
+          <a:p>
+            <a:pPr algn="l">
+              <a:lnSpc>
+                <a:spcPct val="150000"/>
+              </a:lnSpc>
+              <a:spcAft>
+                <a:spcPts val="400"/>
+              </a:spcAft>
+            </a:pPr>
+            <a:r>
+              <a:rPr sz="1300" b="0">
+                <a:solidFill>
+                  <a:srgbClr val="1C2A33"/>
+                </a:solidFill>
+                <a:latin typeface="楷体"/>
+                <a:ea typeface="楷体"/>
+                <a:cs typeface="楷体"/>
+              </a:rPr>
+              <a:t>1. 据互评修改短评终稿（300字左右），引文标出处。2. 在稿下方用一句话写你选的「点」和「为什么选它」。</a:t>
+            </a:r>
+          </a:p>
+        </p:txBody>
+      </p:sp>
+      <p:sp>
+        <p:nvSpPr>
+          <p:cNvPr id="10" name="Rounded Rectangle 9"/>
+          <p:cNvSpPr/>
+          <p:nvPr/>
+        </p:nvSpPr>
+        <p:spPr>
+          <a:xfrm>
+            <a:off x="6278727" y="2194560"/>
+            <a:ext cx="5272887" cy="4023360"/>
+          </a:xfrm>
+          <a:prstGeom prst="roundRect">
+            <a:avLst/>
+          </a:prstGeom>
+          <a:solidFill>
+            <a:srgbClr val="FFFFFF"/>
+          </a:solidFill>
+          <a:ln w="20320">
+            <a:solidFill>
+              <a:srgbClr val="2E7D6B"/>
+            </a:solidFill>
+          </a:ln>
+          <a:effectLst/>
+        </p:spPr>
+        <p:style>
+          <a:lnRef idx="1">
+            <a:schemeClr val="accent1"/>
+          </a:lnRef>
+          <a:fillRef idx="3">
+            <a:schemeClr val="accent1"/>
+          </a:fillRef>
+          <a:effectRef idx="2">
+            <a:schemeClr val="accent1"/>
+          </a:effectRef>
+          <a:fontRef idx="minor">
+            <a:schemeClr val="lt1"/>
+          </a:fontRef>
+        </p:style>
+        <p:txBody>
+          <a:bodyPr rtlCol="0" anchor="ctr"/>
+          <a:lstStyle/>
+          <a:p>
+            <a:pPr algn="ctr"/>
+          </a:p>
+        </p:txBody>
+      </p:sp>
+      <p:sp>
+        <p:nvSpPr>
+          <p:cNvPr id="11" name="Rectangle 10"/>
+          <p:cNvSpPr/>
+          <p:nvPr/>
+        </p:nvSpPr>
+        <p:spPr>
+          <a:xfrm>
+            <a:off x="6278727" y="2194560"/>
+            <a:ext cx="5272887" cy="548640"/>
           </a:xfrm>
           <a:prstGeom prst="rect">
             <a:avLst/>
@@ -7873,60 +9195,14 @@
       </p:sp>
       <p:sp>
         <p:nvSpPr>
-          <p:cNvPr id="5" name="Rounded Rectangle 4"/>
-          <p:cNvSpPr/>
-          <p:nvPr/>
-        </p:nvSpPr>
-        <p:spPr>
-          <a:xfrm>
-            <a:off x="640080" y="1417320"/>
-            <a:ext cx="10911535" cy="1417320"/>
-          </a:xfrm>
-          <a:prstGeom prst="roundRect">
-            <a:avLst/>
-          </a:prstGeom>
-          <a:solidFill>
-            <a:srgbClr val="FFFFFF"/>
-          </a:solidFill>
-          <a:ln w="22860">
-            <a:solidFill>
-              <a:srgbClr val="2E7D6B"/>
-            </a:solidFill>
-          </a:ln>
-          <a:effectLst/>
-        </p:spPr>
-        <p:style>
-          <a:lnRef idx="1">
-            <a:schemeClr val="accent1"/>
-          </a:lnRef>
-          <a:fillRef idx="3">
-            <a:schemeClr val="accent1"/>
-          </a:fillRef>
-          <a:effectRef idx="2">
-            <a:schemeClr val="accent1"/>
-          </a:effectRef>
-          <a:fontRef idx="minor">
-            <a:schemeClr val="lt1"/>
-          </a:fontRef>
-        </p:style>
-        <p:txBody>
-          <a:bodyPr rtlCol="0" anchor="ctr"/>
-          <a:lstStyle/>
-          <a:p>
-            <a:pPr algn="ctr"/>
-          </a:p>
-        </p:txBody>
-      </p:sp>
-      <p:sp>
-        <p:nvSpPr>
-          <p:cNvPr id="6" name="TextBox 5"/>
+          <p:cNvPr id="12" name="TextBox 11"/>
           <p:cNvSpPr txBox="1"/>
           <p:nvPr/>
         </p:nvSpPr>
         <p:spPr>
           <a:xfrm>
-            <a:off x="1371600" y="1527048"/>
-            <a:ext cx="9997135" cy="457200"/>
+            <a:off x="6278727" y="2304288"/>
+            <a:ext cx="5272887" cy="365760"/>
           </a:xfrm>
           <a:prstGeom prst="rect">
             <a:avLst/>
@@ -7939,35 +9215,38 @@
           </a:bodyPr>
           <a:lstStyle/>
           <a:p>
-            <a:pPr algn="l">
+            <a:pPr algn="ctr">
               <a:lnSpc>
-                <a:spcPct val="110000"/>
+                <a:spcPct val="145000"/>
               </a:lnSpc>
+              <a:spcAft>
+                <a:spcPts val="400"/>
+              </a:spcAft>
             </a:pPr>
             <a:r>
               <a:rPr sz="1600" b="1">
                 <a:solidFill>
-                  <a:srgbClr val="1C2A33"/>
+                  <a:srgbClr val="FFFFFF"/>
                 </a:solidFill>
                 <a:latin typeface="微软雅黑"/>
                 <a:ea typeface="微软雅黑"/>
                 <a:cs typeface="微软雅黑"/>
               </a:rPr>
-              <a:t/>
-            </a:r>
-          </a:p>
-        </p:txBody>
-      </p:sp>
-      <p:sp>
-        <p:nvSpPr>
-          <p:cNvPr id="7" name="TextBox 6"/>
+              <a:t>提升 · 选做</a:t>
+            </a:r>
+          </a:p>
+        </p:txBody>
+      </p:sp>
+      <p:sp>
+        <p:nvSpPr>
+          <p:cNvPr id="13" name="TextBox 12"/>
           <p:cNvSpPr txBox="1"/>
           <p:nvPr/>
         </p:nvSpPr>
         <p:spPr>
           <a:xfrm>
-            <a:off x="1371600" y="1965960"/>
-            <a:ext cx="9997135" cy="777240"/>
+            <a:off x="6553047" y="2971800"/>
+            <a:ext cx="4724247" cy="3063240"/>
           </a:xfrm>
           <a:prstGeom prst="rect">
             <a:avLst/>
@@ -7982,11 +9261,14 @@
           <a:p>
             <a:pPr algn="l">
               <a:lnSpc>
-                <a:spcPct val="128000"/>
+                <a:spcPct val="150000"/>
               </a:lnSpc>
+              <a:spcAft>
+                <a:spcPts val="400"/>
+              </a:spcAft>
             </a:pPr>
             <a:r>
-              <a:rPr sz="1200" b="0">
+              <a:rPr sz="1300" b="0">
                 <a:solidFill>
                   <a:srgbClr val="1C2A33"/>
                 </a:solidFill>
@@ -7994,142 +9276,14 @@
                 <a:ea typeface="楷体"/>
                 <a:cs typeface="楷体"/>
               </a:rPr>
-              <a:t>【基础作业】1. 据互评修改短评终稿（300字左右），引文标出处。2. 在稿下方用一句话写你选的「点」和「为什么选它」。</a:t>
-            </a:r>
-          </a:p>
-        </p:txBody>
-      </p:sp>
-      <p:sp>
-        <p:nvSpPr>
-          <p:cNvPr id="8" name="Rounded Rectangle 7"/>
-          <p:cNvSpPr/>
-          <p:nvPr/>
-        </p:nvSpPr>
-        <p:spPr>
-          <a:xfrm>
-            <a:off x="640080" y="2971800"/>
-            <a:ext cx="10911535" cy="1417320"/>
-          </a:xfrm>
-          <a:prstGeom prst="roundRect">
-            <a:avLst/>
-          </a:prstGeom>
-          <a:solidFill>
-            <a:srgbClr val="FFFFFF"/>
-          </a:solidFill>
-          <a:ln w="22860">
-            <a:solidFill>
-              <a:srgbClr val="2E7D6B"/>
-            </a:solidFill>
-          </a:ln>
-          <a:effectLst/>
-        </p:spPr>
-        <p:style>
-          <a:lnRef idx="1">
-            <a:schemeClr val="accent1"/>
-          </a:lnRef>
-          <a:fillRef idx="3">
-            <a:schemeClr val="accent1"/>
-          </a:fillRef>
-          <a:effectRef idx="2">
-            <a:schemeClr val="accent1"/>
-          </a:effectRef>
-          <a:fontRef idx="minor">
-            <a:schemeClr val="lt1"/>
-          </a:fontRef>
-        </p:style>
-        <p:txBody>
-          <a:bodyPr rtlCol="0" anchor="ctr"/>
-          <a:lstStyle/>
-          <a:p>
-            <a:pPr algn="ctr"/>
-          </a:p>
-        </p:txBody>
-      </p:sp>
-      <p:sp>
-        <p:nvSpPr>
-          <p:cNvPr id="9" name="TextBox 8"/>
-          <p:cNvSpPr txBox="1"/>
-          <p:nvPr/>
-        </p:nvSpPr>
-        <p:spPr>
-          <a:xfrm>
-            <a:off x="1371600" y="3081528"/>
-            <a:ext cx="9997135" cy="457200"/>
-          </a:xfrm>
-          <a:prstGeom prst="rect">
-            <a:avLst/>
-          </a:prstGeom>
-          <a:noFill/>
-        </p:spPr>
-        <p:txBody>
-          <a:bodyPr wrap="square" anchor="t" lIns="0" rIns="0" tIns="0" bIns="0">
-            <a:spAutoFit/>
-          </a:bodyPr>
-          <a:lstStyle/>
-          <a:p>
-            <a:pPr algn="l">
-              <a:lnSpc>
-                <a:spcPct val="110000"/>
-              </a:lnSpc>
-            </a:pPr>
-            <a:r>
-              <a:rPr sz="1600" b="1">
-                <a:solidFill>
-                  <a:srgbClr val="1C2A33"/>
-                </a:solidFill>
-                <a:latin typeface="微软雅黑"/>
-                <a:ea typeface="微软雅黑"/>
-                <a:cs typeface="微软雅黑"/>
-              </a:rPr>
-              <a:t/>
-            </a:r>
-          </a:p>
-        </p:txBody>
-      </p:sp>
-      <p:sp>
-        <p:nvSpPr>
-          <p:cNvPr id="10" name="TextBox 9"/>
-          <p:cNvSpPr txBox="1"/>
-          <p:nvPr/>
-        </p:nvSpPr>
-        <p:spPr>
-          <a:xfrm>
-            <a:off x="1371600" y="3520440"/>
-            <a:ext cx="9997135" cy="777240"/>
-          </a:xfrm>
-          <a:prstGeom prst="rect">
-            <a:avLst/>
-          </a:prstGeom>
-          <a:noFill/>
-        </p:spPr>
-        <p:txBody>
-          <a:bodyPr wrap="square" anchor="t" lIns="0" rIns="0" tIns="0" bIns="0">
-            <a:spAutoFit/>
-          </a:bodyPr>
-          <a:lstStyle/>
-          <a:p>
-            <a:pPr algn="l">
-              <a:lnSpc>
-                <a:spcPct val="128000"/>
-              </a:lnSpc>
-            </a:pPr>
-            <a:r>
-              <a:rPr sz="1200" b="0">
-                <a:solidFill>
-                  <a:srgbClr val="1C2A33"/>
-                </a:solidFill>
-                <a:latin typeface="楷体"/>
-                <a:ea typeface="楷体"/>
-                <a:cs typeface="楷体"/>
-              </a:rPr>
-              <a:t>【提高作业】换一首本单元诗词，再写一篇不同角度的短评（如第一稿写炼字，第二稿写意象或情感），对比两稿切入点差异。</a:t>
-            </a:r>
-          </a:p>
-        </p:txBody>
-      </p:sp>
-      <p:sp>
-        <p:nvSpPr>
-          <p:cNvPr id="11" name="TextBox 10"/>
+              <a:t>换一首本单元诗词，再写一篇不同角度的短评（如第一稿写炼字，第二稿写意象或情感），对比两稿切入点差异。 【——用】终稿评价：有聚焦选点+引文准确+分析有据=合格；分析深入+有提升=良好；选点巧妙+分析有个人洞见=优秀。基础2评价：能说明选点理由=合格。</a:t>
+            </a:r>
+          </a:p>
+        </p:txBody>
+      </p:sp>
+      <p:sp>
+        <p:nvSpPr>
+          <p:cNvPr id="14" name="TextBox 13"/>
           <p:cNvSpPr txBox="1"/>
           <p:nvPr/>
         </p:nvSpPr>
@@ -8256,13 +9410,13 @@
             <a:r>
               <a:rPr sz="1300" b="1">
                 <a:solidFill>
-                  <a:srgbClr val="C8A86B"/>
+                  <a:srgbClr val="B23A2A"/>
                 </a:solidFill>
                 <a:latin typeface="微软雅黑"/>
                 <a:ea typeface="微软雅黑"/>
                 <a:cs typeface="微软雅黑"/>
               </a:rPr>
-              <a:t>本课小结</a:t>
+              <a:t>单元小结 · 反思引导</a:t>
             </a:r>
           </a:p>
         </p:txBody>
@@ -8277,6 +9431,550 @@
           <a:xfrm>
             <a:off x="640080" y="1097280"/>
             <a:ext cx="822960" cy="30480"/>
+          </a:xfrm>
+          <a:prstGeom prst="rect">
+            <a:avLst/>
+          </a:prstGeom>
+          <a:solidFill>
+            <a:srgbClr val="B23A2A"/>
+          </a:solidFill>
+          <a:ln>
+            <a:noFill/>
+          </a:ln>
+          <a:effectLst/>
+        </p:spPr>
+        <p:style>
+          <a:lnRef idx="1">
+            <a:schemeClr val="accent1"/>
+          </a:lnRef>
+          <a:fillRef idx="3">
+            <a:schemeClr val="accent1"/>
+          </a:fillRef>
+          <a:effectRef idx="2">
+            <a:schemeClr val="accent1"/>
+          </a:effectRef>
+          <a:fontRef idx="minor">
+            <a:schemeClr val="lt1"/>
+          </a:fontRef>
+        </p:style>
+        <p:txBody>
+          <a:bodyPr rtlCol="0" anchor="ctr"/>
+          <a:lstStyle/>
+          <a:p>
+            <a:pPr algn="ctr"/>
+          </a:p>
+        </p:txBody>
+      </p:sp>
+      <p:sp>
+        <p:nvSpPr>
+          <p:cNvPr id="5" name="TextBox 4"/>
+          <p:cNvSpPr txBox="1"/>
+          <p:nvPr/>
+        </p:nvSpPr>
+        <p:spPr>
+          <a:xfrm>
+            <a:off x="640080" y="1325880"/>
+            <a:ext cx="10911535" cy="640080"/>
+          </a:xfrm>
+          <a:prstGeom prst="rect">
+            <a:avLst/>
+          </a:prstGeom>
+          <a:noFill/>
+        </p:spPr>
+        <p:txBody>
+          <a:bodyPr wrap="square" anchor="t" lIns="0" rIns="0" tIns="0" bIns="0">
+            <a:spAutoFit/>
+          </a:bodyPr>
+          <a:lstStyle/>
+          <a:p>
+            <a:pPr algn="l">
+              <a:lnSpc>
+                <a:spcPct val="145000"/>
+              </a:lnSpc>
+              <a:spcAft>
+                <a:spcPts val="400"/>
+              </a:spcAft>
+            </a:pPr>
+            <a:r>
+              <a:rPr sz="2600" b="1">
+                <a:solidFill>
+                  <a:srgbClr val="1C2A33"/>
+                </a:solidFill>
+                <a:latin typeface="楷体"/>
+                <a:ea typeface="楷体"/>
+                <a:cs typeface="楷体"/>
+              </a:rPr>
+              <a:t>回望本单元：生命的诗意</a:t>
+            </a:r>
+          </a:p>
+        </p:txBody>
+      </p:sp>
+      <p:sp>
+        <p:nvSpPr>
+          <p:cNvPr id="6" name="Rounded Rectangle 5"/>
+          <p:cNvSpPr/>
+          <p:nvPr/>
+        </p:nvSpPr>
+        <p:spPr>
+          <a:xfrm>
+            <a:off x="640080" y="2057400"/>
+            <a:ext cx="5227167" cy="4206240"/>
+          </a:xfrm>
+          <a:prstGeom prst="roundRect">
+            <a:avLst/>
+          </a:prstGeom>
+          <a:solidFill>
+            <a:srgbClr val="FFFFFF"/>
+          </a:solidFill>
+          <a:ln w="20320">
+            <a:solidFill>
+              <a:srgbClr val="2E7D6B"/>
+            </a:solidFill>
+          </a:ln>
+          <a:effectLst/>
+        </p:spPr>
+        <p:style>
+          <a:lnRef idx="1">
+            <a:schemeClr val="accent1"/>
+          </a:lnRef>
+          <a:fillRef idx="3">
+            <a:schemeClr val="accent1"/>
+          </a:fillRef>
+          <a:effectRef idx="2">
+            <a:schemeClr val="accent1"/>
+          </a:effectRef>
+          <a:fontRef idx="minor">
+            <a:schemeClr val="lt1"/>
+          </a:fontRef>
+        </p:style>
+        <p:txBody>
+          <a:bodyPr rtlCol="0" anchor="ctr"/>
+          <a:lstStyle/>
+          <a:p>
+            <a:pPr algn="ctr"/>
+          </a:p>
+        </p:txBody>
+      </p:sp>
+      <p:sp>
+        <p:nvSpPr>
+          <p:cNvPr id="7" name="TextBox 6"/>
+          <p:cNvSpPr txBox="1"/>
+          <p:nvPr/>
+        </p:nvSpPr>
+        <p:spPr>
+          <a:xfrm>
+            <a:off x="914400" y="2212848"/>
+            <a:ext cx="4678527" cy="457200"/>
+          </a:xfrm>
+          <a:prstGeom prst="rect">
+            <a:avLst/>
+          </a:prstGeom>
+          <a:noFill/>
+        </p:spPr>
+        <p:txBody>
+          <a:bodyPr wrap="square" anchor="t" lIns="0" rIns="0" tIns="0" bIns="0">
+            <a:spAutoFit/>
+          </a:bodyPr>
+          <a:lstStyle/>
+          <a:p>
+            <a:pPr algn="l">
+              <a:lnSpc>
+                <a:spcPct val="145000"/>
+              </a:lnSpc>
+              <a:spcAft>
+                <a:spcPts val="400"/>
+              </a:spcAft>
+            </a:pPr>
+            <a:r>
+              <a:rPr sz="1600" b="1">
+                <a:solidFill>
+                  <a:srgbClr val="2E7D6B"/>
+                </a:solidFill>
+                <a:latin typeface="楷体"/>
+                <a:ea typeface="楷体"/>
+                <a:cs typeface="楷体"/>
+              </a:rPr>
+              <a:t>反思引导</a:t>
+            </a:r>
+          </a:p>
+        </p:txBody>
+      </p:sp>
+      <p:sp>
+        <p:nvSpPr>
+          <p:cNvPr id="8" name="TextBox 7"/>
+          <p:cNvSpPr txBox="1"/>
+          <p:nvPr/>
+        </p:nvSpPr>
+        <p:spPr>
+          <a:xfrm>
+            <a:off x="914400" y="2743200"/>
+            <a:ext cx="4678527" cy="3383280"/>
+          </a:xfrm>
+          <a:prstGeom prst="rect">
+            <a:avLst/>
+          </a:prstGeom>
+          <a:noFill/>
+        </p:spPr>
+        <p:txBody>
+          <a:bodyPr wrap="square" anchor="t" lIns="0" rIns="0" tIns="0" bIns="0">
+            <a:spAutoFit/>
+          </a:bodyPr>
+          <a:lstStyle/>
+          <a:p>
+            <a:pPr algn="l">
+              <a:lnSpc>
+                <a:spcPct val="150000"/>
+              </a:lnSpc>
+              <a:spcAft>
+                <a:spcPts val="1200"/>
+              </a:spcAft>
+            </a:pPr>
+            <a:r>
+              <a:rPr sz="1450" b="0">
+                <a:solidFill>
+                  <a:srgbClr val="1C2A33"/>
+                </a:solidFill>
+                <a:latin typeface="楷体"/>
+                <a:ea typeface="楷体"/>
+                <a:cs typeface="楷体"/>
+              </a:rPr>
+              <a:t>八首诗词里，哪一种生命姿态最让你共鸣？为什么？</a:t>
+            </a:r>
+          </a:p>
+          <a:p>
+            <a:pPr algn="l">
+              <a:lnSpc>
+                <a:spcPct val="150000"/>
+              </a:lnSpc>
+              <a:spcAft>
+                <a:spcPts val="1200"/>
+              </a:spcAft>
+            </a:pPr>
+            <a:r>
+              <a:rPr sz="1450" b="0">
+                <a:solidFill>
+                  <a:srgbClr val="1C2A33"/>
+                </a:solidFill>
+                <a:latin typeface="楷体"/>
+                <a:ea typeface="楷体"/>
+                <a:cs typeface="楷体"/>
+              </a:rPr>
+              <a:t>选一句原诗，说说它如何写尽一种心境。</a:t>
+            </a:r>
+          </a:p>
+          <a:p>
+            <a:pPr algn="l">
+              <a:lnSpc>
+                <a:spcPct val="150000"/>
+              </a:lnSpc>
+              <a:spcAft>
+                <a:spcPts val="1200"/>
+              </a:spcAft>
+            </a:pPr>
+            <a:r>
+              <a:rPr sz="1450" b="0">
+                <a:solidFill>
+                  <a:srgbClr val="1C2A33"/>
+                </a:solidFill>
+                <a:latin typeface="楷体"/>
+                <a:ea typeface="楷体"/>
+                <a:cs typeface="楷体"/>
+              </a:rPr>
+              <a:t>把「知人论世」的方法，用到课外的古诗词里。</a:t>
+            </a:r>
+          </a:p>
+        </p:txBody>
+      </p:sp>
+      <p:sp>
+        <p:nvSpPr>
+          <p:cNvPr id="9" name="Rounded Rectangle 8"/>
+          <p:cNvSpPr/>
+          <p:nvPr/>
+        </p:nvSpPr>
+        <p:spPr>
+          <a:xfrm>
+            <a:off x="6324447" y="2057400"/>
+            <a:ext cx="5227167" cy="4206240"/>
+          </a:xfrm>
+          <a:prstGeom prst="roundRect">
+            <a:avLst/>
+          </a:prstGeom>
+          <a:solidFill>
+            <a:srgbClr val="FFFFFF"/>
+          </a:solidFill>
+          <a:ln w="20320">
+            <a:solidFill>
+              <a:srgbClr val="C8A86B"/>
+            </a:solidFill>
+          </a:ln>
+          <a:effectLst/>
+        </p:spPr>
+        <p:style>
+          <a:lnRef idx="1">
+            <a:schemeClr val="accent1"/>
+          </a:lnRef>
+          <a:fillRef idx="3">
+            <a:schemeClr val="accent1"/>
+          </a:fillRef>
+          <a:effectRef idx="2">
+            <a:schemeClr val="accent1"/>
+          </a:effectRef>
+          <a:fontRef idx="minor">
+            <a:schemeClr val="lt1"/>
+          </a:fontRef>
+        </p:style>
+        <p:txBody>
+          <a:bodyPr rtlCol="0" anchor="ctr"/>
+          <a:lstStyle/>
+          <a:p>
+            <a:pPr algn="ctr"/>
+          </a:p>
+        </p:txBody>
+      </p:sp>
+      <p:sp>
+        <p:nvSpPr>
+          <p:cNvPr id="10" name="TextBox 9"/>
+          <p:cNvSpPr txBox="1"/>
+          <p:nvPr/>
+        </p:nvSpPr>
+        <p:spPr>
+          <a:xfrm>
+            <a:off x="6598767" y="2212848"/>
+            <a:ext cx="4678527" cy="457200"/>
+          </a:xfrm>
+          <a:prstGeom prst="rect">
+            <a:avLst/>
+          </a:prstGeom>
+          <a:noFill/>
+        </p:spPr>
+        <p:txBody>
+          <a:bodyPr wrap="square" anchor="t" lIns="0" rIns="0" tIns="0" bIns="0">
+            <a:spAutoFit/>
+          </a:bodyPr>
+          <a:lstStyle/>
+          <a:p>
+            <a:pPr algn="l">
+              <a:lnSpc>
+                <a:spcPct val="145000"/>
+              </a:lnSpc>
+              <a:spcAft>
+                <a:spcPts val="400"/>
+              </a:spcAft>
+            </a:pPr>
+            <a:r>
+              <a:rPr sz="1600" b="1">
+                <a:solidFill>
+                  <a:srgbClr val="C8A86B"/>
+                </a:solidFill>
+                <a:latin typeface="楷体"/>
+                <a:ea typeface="楷体"/>
+                <a:cs typeface="楷体"/>
+              </a:rPr>
+              <a:t>本单元核心</a:t>
+            </a:r>
+          </a:p>
+        </p:txBody>
+      </p:sp>
+      <p:sp>
+        <p:nvSpPr>
+          <p:cNvPr id="11" name="TextBox 10"/>
+          <p:cNvSpPr txBox="1"/>
+          <p:nvPr/>
+        </p:nvSpPr>
+        <p:spPr>
+          <a:xfrm>
+            <a:off x="6598767" y="2743200"/>
+            <a:ext cx="4678527" cy="3383280"/>
+          </a:xfrm>
+          <a:prstGeom prst="rect">
+            <a:avLst/>
+          </a:prstGeom>
+          <a:noFill/>
+        </p:spPr>
+        <p:txBody>
+          <a:bodyPr wrap="square" anchor="t" lIns="0" rIns="0" tIns="0" bIns="0">
+            <a:spAutoFit/>
+          </a:bodyPr>
+          <a:lstStyle/>
+          <a:p>
+            <a:pPr algn="l">
+              <a:lnSpc>
+                <a:spcPct val="140000"/>
+              </a:lnSpc>
+              <a:spcAft>
+                <a:spcPts val="200"/>
+              </a:spcAft>
+            </a:pPr>
+            <a:r>
+              <a:rPr sz="1450" b="1">
+                <a:solidFill>
+                  <a:srgbClr val="B23A2A"/>
+                </a:solidFill>
+                <a:latin typeface="微软雅黑"/>
+                <a:ea typeface="微软雅黑"/>
+                <a:cs typeface="微软雅黑"/>
+              </a:rPr>
+              <a:t>① 选点</a:t>
+            </a:r>
+          </a:p>
+          <a:p>
+            <a:pPr algn="l">
+              <a:lnSpc>
+                <a:spcPct val="140000"/>
+              </a:lnSpc>
+              <a:spcAft>
+                <a:spcPts val="1000"/>
+              </a:spcAft>
+            </a:pPr>
+            <a:r>
+              <a:rPr sz="1300" b="0">
+                <a:solidFill>
+                  <a:srgbClr val="1C2A33"/>
+                </a:solidFill>
+                <a:latin typeface="楷体"/>
+                <a:ea typeface="楷体"/>
+                <a:cs typeface="楷体"/>
+              </a:rPr>
+              <a:t>不选「全诗」而选一个聚焦的「点」（如「击」字炼字／七组叠字／人生如梦）。</a:t>
+            </a:r>
+          </a:p>
+          <a:p>
+            <a:pPr algn="l">
+              <a:lnSpc>
+                <a:spcPct val="140000"/>
+              </a:lnSpc>
+              <a:spcAft>
+                <a:spcPts val="200"/>
+              </a:spcAft>
+            </a:pPr>
+            <a:r>
+              <a:rPr sz="1450" b="1">
+                <a:solidFill>
+                  <a:srgbClr val="B23A2A"/>
+                </a:solidFill>
+                <a:latin typeface="微软雅黑"/>
+                <a:ea typeface="微软雅黑"/>
+                <a:cs typeface="微软雅黑"/>
+              </a:rPr>
+              <a:t>② 引文</a:t>
+            </a:r>
+          </a:p>
+          <a:p>
+            <a:pPr algn="l">
+              <a:lnSpc>
+                <a:spcPct val="140000"/>
+              </a:lnSpc>
+              <a:spcAft>
+                <a:spcPts val="1000"/>
+              </a:spcAft>
+            </a:pPr>
+            <a:r>
+              <a:rPr sz="1300" b="0">
+                <a:solidFill>
+                  <a:srgbClr val="1C2A33"/>
+                </a:solidFill>
+                <a:latin typeface="楷体"/>
+                <a:ea typeface="楷体"/>
+                <a:cs typeface="楷体"/>
+              </a:rPr>
+              <a:t>摘引原句并标明出处，作为论据。</a:t>
+            </a:r>
+          </a:p>
+          <a:p>
+            <a:pPr algn="l">
+              <a:lnSpc>
+                <a:spcPct val="140000"/>
+              </a:lnSpc>
+              <a:spcAft>
+                <a:spcPts val="200"/>
+              </a:spcAft>
+            </a:pPr>
+            <a:r>
+              <a:rPr sz="1450" b="1">
+                <a:solidFill>
+                  <a:srgbClr val="B23A2A"/>
+                </a:solidFill>
+                <a:latin typeface="微软雅黑"/>
+                <a:ea typeface="微软雅黑"/>
+                <a:cs typeface="微软雅黑"/>
+              </a:rPr>
+              <a:t>③ 分析</a:t>
+            </a:r>
+          </a:p>
+          <a:p>
+            <a:pPr algn="l">
+              <a:lnSpc>
+                <a:spcPct val="140000"/>
+              </a:lnSpc>
+              <a:spcAft>
+                <a:spcPts val="1000"/>
+              </a:spcAft>
+            </a:pPr>
+            <a:r>
+              <a:rPr sz="1300" b="0">
+                <a:solidFill>
+                  <a:srgbClr val="1C2A33"/>
+                </a:solidFill>
+                <a:latin typeface="楷体"/>
+                <a:ea typeface="楷体"/>
+                <a:cs typeface="楷体"/>
+              </a:rPr>
+              <a:t>说明「好在哪里、为什么好」，结合语境不空泛。</a:t>
+            </a:r>
+          </a:p>
+        </p:txBody>
+      </p:sp>
+      <p:sp>
+        <p:nvSpPr>
+          <p:cNvPr id="12" name="Rounded Rectangle 11"/>
+          <p:cNvSpPr/>
+          <p:nvPr/>
+        </p:nvSpPr>
+        <p:spPr>
+          <a:xfrm>
+            <a:off x="640080" y="5806440"/>
+            <a:ext cx="10911535" cy="640080"/>
+          </a:xfrm>
+          <a:prstGeom prst="roundRect">
+            <a:avLst/>
+          </a:prstGeom>
+          <a:solidFill>
+            <a:srgbClr val="1C2A33"/>
+          </a:solidFill>
+          <a:effectLst/>
+        </p:spPr>
+        <p:style>
+          <a:lnRef idx="1">
+            <a:schemeClr val="accent1"/>
+          </a:lnRef>
+          <a:fillRef idx="3">
+            <a:schemeClr val="accent1"/>
+          </a:fillRef>
+          <a:effectRef idx="2">
+            <a:schemeClr val="accent1"/>
+          </a:effectRef>
+          <a:fontRef idx="minor">
+            <a:schemeClr val="lt1"/>
+          </a:fontRef>
+        </p:style>
+        <p:txBody>
+          <a:bodyPr rtlCol="0" anchor="ctr"/>
+          <a:lstStyle/>
+          <a:p>
+            <a:pPr algn="ctr"/>
+          </a:p>
+        </p:txBody>
+      </p:sp>
+      <p:sp>
+        <p:nvSpPr>
+          <p:cNvPr id="13" name="Rectangle 12"/>
+          <p:cNvSpPr/>
+          <p:nvPr/>
+        </p:nvSpPr>
+        <p:spPr>
+          <a:xfrm>
+            <a:off x="914400" y="6035040"/>
+            <a:ext cx="54864" cy="279400"/>
           </a:xfrm>
           <a:prstGeom prst="rect">
             <a:avLst/>
@@ -8313,58 +10011,14 @@
       </p:sp>
       <p:sp>
         <p:nvSpPr>
-          <p:cNvPr id="5" name="Rectangle 4"/>
-          <p:cNvSpPr/>
-          <p:nvPr/>
-        </p:nvSpPr>
-        <p:spPr>
-          <a:xfrm>
-            <a:off x="640080" y="1737360"/>
-            <a:ext cx="54864" cy="431800"/>
-          </a:xfrm>
-          <a:prstGeom prst="rect">
-            <a:avLst/>
-          </a:prstGeom>
-          <a:solidFill>
-            <a:srgbClr val="C8A86B"/>
-          </a:solidFill>
-          <a:ln>
-            <a:noFill/>
-          </a:ln>
-          <a:effectLst/>
-        </p:spPr>
-        <p:style>
-          <a:lnRef idx="1">
-            <a:schemeClr val="accent1"/>
-          </a:lnRef>
-          <a:fillRef idx="3">
-            <a:schemeClr val="accent1"/>
-          </a:fillRef>
-          <a:effectRef idx="2">
-            <a:schemeClr val="accent1"/>
-          </a:effectRef>
-          <a:fontRef idx="minor">
-            <a:schemeClr val="lt1"/>
-          </a:fontRef>
-        </p:style>
-        <p:txBody>
-          <a:bodyPr rtlCol="0" anchor="ctr"/>
-          <a:lstStyle/>
-          <a:p>
-            <a:pPr algn="ctr"/>
-          </a:p>
-        </p:txBody>
-      </p:sp>
-      <p:sp>
-        <p:nvSpPr>
-          <p:cNvPr id="6" name="TextBox 5"/>
+          <p:cNvPr id="14" name="TextBox 13"/>
           <p:cNvSpPr txBox="1"/>
           <p:nvPr/>
         </p:nvSpPr>
         <p:spPr>
           <a:xfrm>
-            <a:off x="868680" y="1645920"/>
-            <a:ext cx="10682935" cy="2194560"/>
+            <a:off x="1143000" y="5943600"/>
+            <a:ext cx="10180015" cy="457200"/>
           </a:xfrm>
           <a:prstGeom prst="rect">
             <a:avLst/>
@@ -8379,43 +10033,29 @@
           <a:p>
             <a:pPr algn="l">
               <a:lnSpc>
-                <a:spcPct val="150000"/>
+                <a:spcPct val="140000"/>
               </a:lnSpc>
               <a:spcAft>
-                <a:spcPts val="1000"/>
+                <a:spcPts val="400"/>
               </a:spcAft>
             </a:pPr>
             <a:r>
-              <a:rPr sz="2200" b="0">
-                <a:solidFill>
-                  <a:srgbClr val="1C2A33"/>
+              <a:rPr sz="1350" b="0">
+                <a:solidFill>
+                  <a:srgbClr val="FFFFFF"/>
                 </a:solidFill>
                 <a:latin typeface="楷体"/>
                 <a:ea typeface="楷体"/>
                 <a:cs typeface="楷体"/>
               </a:rPr>
-              <a:t>本单元主题：生命的诗意。把今天学到的方法带进下一篇——自己读、自己想、自己写。</a:t>
-            </a:r>
-          </a:p>
-          <a:p>
-            <a:pPr algn="l"/>
-            <a:r>
-              <a:rPr sz="1600" b="1">
-                <a:solidFill>
-                  <a:srgbClr val="B23A2A"/>
-                </a:solidFill>
-                <a:latin typeface="微软雅黑"/>
-                <a:ea typeface="微软雅黑"/>
-                <a:cs typeface="微软雅黑"/>
-              </a:rPr>
-              <a:t>方法迁移：圈关键信息 → 理事件脉络 → 析人物精神</a:t>
-            </a:r>
-          </a:p>
-        </p:txBody>
-      </p:sp>
-      <p:sp>
-        <p:nvSpPr>
-          <p:cNvPr id="7" name="TextBox 6"/>
+              <a:t>从曹陶到苏辛，诗词写尽生命的姿态；带着方法，去读更多。</a:t>
+            </a:r>
+          </a:p>
+        </p:txBody>
+      </p:sp>
+      <p:sp>
+        <p:nvSpPr>
+          <p:cNvPr id="15" name="TextBox 14"/>
           <p:cNvSpPr txBox="1"/>
           <p:nvPr/>
         </p:nvSpPr>
